--- a/4_Presentation/fraud_detection.pptx
+++ b/4_Presentation/fraud_detection.pptx
@@ -122,19 +122,13 @@
       </a:defRPr>
     </a:lvl9pPr>
   </p:defaultTextStyle>
-  <p:extLst>
-    <p:ext uri="{EFAFB233-063F-42B5-8137-9DF3F51BA10A}">
-      <p15:sldGuideLst xmlns:p15="http://schemas.microsoft.com/office/powerpoint/2012/main"/>
-    </p:ext>
-  </p:extLst>
 </p:presentation>
 </file>
 
 <file path=ppt/revisionInfo.xml><?xml version="1.0" encoding="utf-8"?>
 <p1510:revInfo xmlns:a="http://schemas.openxmlformats.org/drawingml/2006/main" xmlns:r="http://schemas.openxmlformats.org/officeDocument/2006/relationships" xmlns:p1510="http://schemas.microsoft.com/office/powerpoint/2015/10/main">
   <p1510:revLst>
-    <p1510:client id="{1E84E4E8-AC38-010A-8AF7-C2FF8938230D}" v="487" dt="2026-06-17T11:35:19.447"/>
-    <p1510:client id="{61B36909-29AD-47FF-994D-4BDC2FDB6F0A}" v="1551" dt="2026-06-17T12:14:18.410"/>
+    <p1510:client id="{61B36909-29AD-47FF-994D-4BDC2FDB6F0A}" v="1573" dt="2026-06-25T16:44:00.069"/>
   </p1510:revLst>
 </p1510:revInfo>
 </file>
@@ -173,7 +167,7 @@
               </a:defRPr>
             </a:pPr>
             <a:r>
-              <a:rPr lang="de-DE" dirty="0"/>
+              <a:rPr lang="de-DE"/>
               <a:t>PR-AUC</a:t>
             </a:r>
           </a:p>
@@ -1128,6 +1122,3689 @@
 </cs:chartStyle>
 </file>
 
+<file path=ppt/diagrams/colors1.xml><?xml version="1.0" encoding="utf-8"?>
+<dgm:colorsDef xmlns:dgm="http://schemas.openxmlformats.org/drawingml/2006/diagram" xmlns:a="http://schemas.openxmlformats.org/drawingml/2006/main" uniqueId="urn:microsoft.com/office/officeart/2018/5/colors/Iconchunking_neutralicontext_colorful1">
+  <dgm:title val=""/>
+  <dgm:desc val=""/>
+  <dgm:catLst>
+    <dgm:cat type="colorful" pri="10100"/>
+  </dgm:catLst>
+  <dgm:styleLbl name="node0">
+    <dgm:fillClrLst meth="repeat">
+      <a:schemeClr val="accent1"/>
+    </dgm:fillClrLst>
+    <dgm:linClrLst meth="repeat">
+      <a:schemeClr val="lt1"/>
+    </dgm:linClrLst>
+    <dgm:effectClrLst/>
+    <dgm:txLinClrLst/>
+    <dgm:txFillClrLst/>
+    <dgm:txEffectClrLst/>
+  </dgm:styleLbl>
+  <dgm:styleLbl name="node1">
+    <dgm:fillClrLst meth="repeat">
+      <a:schemeClr val="bg1"/>
+    </dgm:fillClrLst>
+    <dgm:linClrLst meth="repeat">
+      <a:schemeClr val="lt1">
+        <a:alpha val="0"/>
+      </a:schemeClr>
+    </dgm:linClrLst>
+    <dgm:effectClrLst/>
+    <dgm:txLinClrLst/>
+    <dgm:txFillClrLst meth="repeat">
+      <a:schemeClr val="dk1"/>
+    </dgm:txFillClrLst>
+    <dgm:txEffectClrLst/>
+  </dgm:styleLbl>
+  <dgm:styleLbl name="alignNode1">
+    <dgm:fillClrLst meth="repeat">
+      <a:schemeClr val="accent2"/>
+      <a:schemeClr val="accent3"/>
+      <a:schemeClr val="accent4"/>
+      <a:schemeClr val="accent5"/>
+      <a:schemeClr val="accent6"/>
+    </dgm:fillClrLst>
+    <dgm:linClrLst meth="repeat">
+      <a:schemeClr val="accent2"/>
+      <a:schemeClr val="accent3"/>
+      <a:schemeClr val="accent4"/>
+      <a:schemeClr val="accent5"/>
+      <a:schemeClr val="accent6"/>
+    </dgm:linClrLst>
+    <dgm:effectClrLst/>
+    <dgm:txLinClrLst/>
+    <dgm:txFillClrLst/>
+    <dgm:txEffectClrLst/>
+  </dgm:styleLbl>
+  <dgm:styleLbl name="lnNode1">
+    <dgm:fillClrLst meth="repeat">
+      <a:schemeClr val="accent2"/>
+      <a:schemeClr val="accent3"/>
+      <a:schemeClr val="accent4"/>
+      <a:schemeClr val="accent5"/>
+      <a:schemeClr val="accent6"/>
+    </dgm:fillClrLst>
+    <dgm:linClrLst meth="repeat">
+      <a:schemeClr val="lt1"/>
+    </dgm:linClrLst>
+    <dgm:effectClrLst/>
+    <dgm:txLinClrLst/>
+    <dgm:txFillClrLst/>
+    <dgm:txEffectClrLst/>
+  </dgm:styleLbl>
+  <dgm:styleLbl name="vennNode1">
+    <dgm:fillClrLst meth="repeat">
+      <a:schemeClr val="accent2">
+        <a:alpha val="50000"/>
+      </a:schemeClr>
+      <a:schemeClr val="accent3">
+        <a:alpha val="50000"/>
+      </a:schemeClr>
+      <a:schemeClr val="accent4">
+        <a:alpha val="50000"/>
+      </a:schemeClr>
+      <a:schemeClr val="accent5">
+        <a:alpha val="50000"/>
+      </a:schemeClr>
+      <a:schemeClr val="accent6">
+        <a:alpha val="50000"/>
+      </a:schemeClr>
+    </dgm:fillClrLst>
+    <dgm:linClrLst meth="repeat">
+      <a:schemeClr val="lt1"/>
+    </dgm:linClrLst>
+    <dgm:effectClrLst/>
+    <dgm:txLinClrLst/>
+    <dgm:txFillClrLst/>
+    <dgm:txEffectClrLst/>
+  </dgm:styleLbl>
+  <dgm:styleLbl name="node2">
+    <dgm:fillClrLst>
+      <a:schemeClr val="accent2"/>
+    </dgm:fillClrLst>
+    <dgm:linClrLst meth="repeat">
+      <a:schemeClr val="lt1"/>
+    </dgm:linClrLst>
+    <dgm:effectClrLst/>
+    <dgm:txLinClrLst/>
+    <dgm:txFillClrLst/>
+    <dgm:txEffectClrLst/>
+  </dgm:styleLbl>
+  <dgm:styleLbl name="node3">
+    <dgm:fillClrLst>
+      <a:schemeClr val="accent3"/>
+    </dgm:fillClrLst>
+    <dgm:linClrLst meth="repeat">
+      <a:schemeClr val="lt1"/>
+    </dgm:linClrLst>
+    <dgm:effectClrLst/>
+    <dgm:txLinClrLst/>
+    <dgm:txFillClrLst/>
+    <dgm:txEffectClrLst/>
+  </dgm:styleLbl>
+  <dgm:styleLbl name="node4">
+    <dgm:fillClrLst>
+      <a:schemeClr val="accent4"/>
+    </dgm:fillClrLst>
+    <dgm:linClrLst meth="repeat">
+      <a:schemeClr val="lt1"/>
+    </dgm:linClrLst>
+    <dgm:effectClrLst/>
+    <dgm:txLinClrLst/>
+    <dgm:txFillClrLst/>
+    <dgm:txEffectClrLst/>
+  </dgm:styleLbl>
+  <dgm:styleLbl name="fgImgPlace1">
+    <dgm:fillClrLst meth="repeat">
+      <a:schemeClr val="accent2">
+        <a:tint val="50000"/>
+      </a:schemeClr>
+      <a:schemeClr val="accent3">
+        <a:tint val="50000"/>
+      </a:schemeClr>
+      <a:schemeClr val="accent4">
+        <a:tint val="50000"/>
+      </a:schemeClr>
+      <a:schemeClr val="accent5">
+        <a:tint val="50000"/>
+      </a:schemeClr>
+      <a:schemeClr val="accent6">
+        <a:tint val="50000"/>
+      </a:schemeClr>
+    </dgm:fillClrLst>
+    <dgm:linClrLst meth="repeat">
+      <a:schemeClr val="lt1"/>
+    </dgm:linClrLst>
+    <dgm:effectClrLst/>
+    <dgm:txLinClrLst/>
+    <dgm:txFillClrLst meth="repeat">
+      <a:schemeClr val="lt1"/>
+    </dgm:txFillClrLst>
+    <dgm:txEffectClrLst/>
+  </dgm:styleLbl>
+  <dgm:styleLbl name="alignImgPlace1">
+    <dgm:fillClrLst>
+      <a:schemeClr val="accent1">
+        <a:tint val="50000"/>
+      </a:schemeClr>
+      <a:schemeClr val="accent2">
+        <a:tint val="20000"/>
+      </a:schemeClr>
+    </dgm:fillClrLst>
+    <dgm:linClrLst meth="repeat">
+      <a:schemeClr val="lt1"/>
+    </dgm:linClrLst>
+    <dgm:effectClrLst/>
+    <dgm:txLinClrLst/>
+    <dgm:txFillClrLst meth="repeat">
+      <a:schemeClr val="lt1"/>
+    </dgm:txFillClrLst>
+    <dgm:txEffectClrLst/>
+  </dgm:styleLbl>
+  <dgm:styleLbl name="bgImgPlace1">
+    <dgm:fillClrLst>
+      <a:schemeClr val="accent1">
+        <a:tint val="50000"/>
+      </a:schemeClr>
+      <a:schemeClr val="accent2">
+        <a:tint val="20000"/>
+      </a:schemeClr>
+    </dgm:fillClrLst>
+    <dgm:linClrLst meth="repeat">
+      <a:schemeClr val="lt1"/>
+    </dgm:linClrLst>
+    <dgm:effectClrLst/>
+    <dgm:txLinClrLst/>
+    <dgm:txFillClrLst meth="repeat">
+      <a:schemeClr val="lt1"/>
+    </dgm:txFillClrLst>
+    <dgm:txEffectClrLst/>
+  </dgm:styleLbl>
+  <dgm:styleLbl name="sibTrans2D1">
+    <dgm:fillClrLst meth="repeat">
+      <a:schemeClr val="accent2"/>
+      <a:schemeClr val="accent3"/>
+      <a:schemeClr val="accent4"/>
+      <a:schemeClr val="accent5"/>
+      <a:schemeClr val="accent6"/>
+    </dgm:fillClrLst>
+    <dgm:linClrLst meth="cycle">
+      <a:schemeClr val="lt1"/>
+    </dgm:linClrLst>
+    <dgm:effectClrLst/>
+    <dgm:txLinClrLst/>
+    <dgm:txFillClrLst/>
+    <dgm:txEffectClrLst/>
+  </dgm:styleLbl>
+  <dgm:styleLbl name="fgSibTrans2D1">
+    <dgm:fillClrLst meth="repeat">
+      <a:schemeClr val="accent2"/>
+      <a:schemeClr val="accent3"/>
+      <a:schemeClr val="accent4"/>
+      <a:schemeClr val="accent5"/>
+      <a:schemeClr val="accent6"/>
+    </dgm:fillClrLst>
+    <dgm:linClrLst meth="cycle">
+      <a:schemeClr val="lt1"/>
+    </dgm:linClrLst>
+    <dgm:effectClrLst/>
+    <dgm:txLinClrLst/>
+    <dgm:txFillClrLst meth="repeat">
+      <a:schemeClr val="lt1"/>
+    </dgm:txFillClrLst>
+    <dgm:txEffectClrLst/>
+  </dgm:styleLbl>
+  <dgm:styleLbl name="bgSibTrans2D1">
+    <dgm:fillClrLst meth="repeat">
+      <a:schemeClr val="accent2"/>
+      <a:schemeClr val="accent3"/>
+      <a:schemeClr val="accent4"/>
+      <a:schemeClr val="accent5"/>
+      <a:schemeClr val="accent6"/>
+    </dgm:fillClrLst>
+    <dgm:linClrLst meth="cycle">
+      <a:schemeClr val="lt1"/>
+    </dgm:linClrLst>
+    <dgm:effectClrLst/>
+    <dgm:txLinClrLst/>
+    <dgm:txFillClrLst meth="repeat">
+      <a:schemeClr val="lt1"/>
+    </dgm:txFillClrLst>
+    <dgm:txEffectClrLst/>
+  </dgm:styleLbl>
+  <dgm:styleLbl name="sibTrans1D1">
+    <dgm:fillClrLst meth="repeat">
+      <a:schemeClr val="accent2"/>
+      <a:schemeClr val="accent3"/>
+      <a:schemeClr val="accent4"/>
+      <a:schemeClr val="accent5"/>
+      <a:schemeClr val="accent6"/>
+    </dgm:fillClrLst>
+    <dgm:linClrLst meth="repeat">
+      <a:schemeClr val="accent2"/>
+      <a:schemeClr val="accent3"/>
+      <a:schemeClr val="accent4"/>
+      <a:schemeClr val="accent5"/>
+      <a:schemeClr val="accent6"/>
+    </dgm:linClrLst>
+    <dgm:effectClrLst/>
+    <dgm:txLinClrLst/>
+    <dgm:txFillClrLst meth="repeat">
+      <a:schemeClr val="tx1"/>
+    </dgm:txFillClrLst>
+    <dgm:txEffectClrLst/>
+  </dgm:styleLbl>
+  <dgm:styleLbl name="callout">
+    <dgm:fillClrLst meth="repeat">
+      <a:schemeClr val="accent2"/>
+    </dgm:fillClrLst>
+    <dgm:linClrLst meth="repeat">
+      <a:schemeClr val="accent2">
+        <a:tint val="50000"/>
+      </a:schemeClr>
+    </dgm:linClrLst>
+    <dgm:effectClrLst/>
+    <dgm:txLinClrLst/>
+    <dgm:txFillClrLst meth="repeat">
+      <a:schemeClr val="tx1"/>
+    </dgm:txFillClrLst>
+    <dgm:txEffectClrLst/>
+  </dgm:styleLbl>
+  <dgm:styleLbl name="asst0">
+    <dgm:fillClrLst meth="repeat">
+      <a:schemeClr val="accent1"/>
+    </dgm:fillClrLst>
+    <dgm:linClrLst meth="repeat">
+      <a:schemeClr val="lt1"/>
+    </dgm:linClrLst>
+    <dgm:effectClrLst/>
+    <dgm:txLinClrLst/>
+    <dgm:txFillClrLst/>
+    <dgm:txEffectClrLst/>
+  </dgm:styleLbl>
+  <dgm:styleLbl name="asst1">
+    <dgm:fillClrLst meth="repeat">
+      <a:schemeClr val="accent2"/>
+    </dgm:fillClrLst>
+    <dgm:linClrLst meth="repeat">
+      <a:schemeClr val="lt1"/>
+    </dgm:linClrLst>
+    <dgm:effectClrLst/>
+    <dgm:txLinClrLst/>
+    <dgm:txFillClrLst/>
+    <dgm:txEffectClrLst/>
+  </dgm:styleLbl>
+  <dgm:styleLbl name="asst2">
+    <dgm:fillClrLst>
+      <a:schemeClr val="accent3"/>
+    </dgm:fillClrLst>
+    <dgm:linClrLst meth="repeat">
+      <a:schemeClr val="lt1"/>
+    </dgm:linClrLst>
+    <dgm:effectClrLst/>
+    <dgm:txLinClrLst/>
+    <dgm:txFillClrLst/>
+    <dgm:txEffectClrLst/>
+  </dgm:styleLbl>
+  <dgm:styleLbl name="asst3">
+    <dgm:fillClrLst>
+      <a:schemeClr val="accent4"/>
+    </dgm:fillClrLst>
+    <dgm:linClrLst meth="repeat">
+      <a:schemeClr val="lt1"/>
+    </dgm:linClrLst>
+    <dgm:effectClrLst/>
+    <dgm:txLinClrLst/>
+    <dgm:txFillClrLst/>
+    <dgm:txEffectClrLst/>
+  </dgm:styleLbl>
+  <dgm:styleLbl name="asst4">
+    <dgm:fillClrLst>
+      <a:schemeClr val="accent5"/>
+    </dgm:fillClrLst>
+    <dgm:linClrLst meth="repeat">
+      <a:schemeClr val="lt1"/>
+    </dgm:linClrLst>
+    <dgm:effectClrLst/>
+    <dgm:txLinClrLst/>
+    <dgm:txFillClrLst/>
+    <dgm:txEffectClrLst/>
+  </dgm:styleLbl>
+  <dgm:styleLbl name="parChTrans2D1">
+    <dgm:fillClrLst meth="repeat">
+      <a:schemeClr val="accent2"/>
+    </dgm:fillClrLst>
+    <dgm:linClrLst meth="repeat">
+      <a:schemeClr val="lt1"/>
+    </dgm:linClrLst>
+    <dgm:effectClrLst/>
+    <dgm:txLinClrLst/>
+    <dgm:txFillClrLst meth="repeat">
+      <a:schemeClr val="lt1"/>
+    </dgm:txFillClrLst>
+    <dgm:txEffectClrLst/>
+  </dgm:styleLbl>
+  <dgm:styleLbl name="parChTrans2D2">
+    <dgm:fillClrLst meth="repeat">
+      <a:schemeClr val="accent3"/>
+    </dgm:fillClrLst>
+    <dgm:linClrLst meth="repeat">
+      <a:schemeClr val="lt1"/>
+    </dgm:linClrLst>
+    <dgm:effectClrLst/>
+    <dgm:txLinClrLst/>
+    <dgm:txFillClrLst/>
+    <dgm:txEffectClrLst/>
+  </dgm:styleLbl>
+  <dgm:styleLbl name="parChTrans2D3">
+    <dgm:fillClrLst meth="repeat">
+      <a:schemeClr val="accent4"/>
+    </dgm:fillClrLst>
+    <dgm:linClrLst meth="repeat">
+      <a:schemeClr val="lt1"/>
+    </dgm:linClrLst>
+    <dgm:effectClrLst/>
+    <dgm:txLinClrLst/>
+    <dgm:txFillClrLst/>
+    <dgm:txEffectClrLst/>
+  </dgm:styleLbl>
+  <dgm:styleLbl name="parChTrans2D4">
+    <dgm:fillClrLst meth="repeat">
+      <a:schemeClr val="accent5"/>
+    </dgm:fillClrLst>
+    <dgm:linClrLst meth="repeat">
+      <a:schemeClr val="lt1"/>
+    </dgm:linClrLst>
+    <dgm:effectClrLst/>
+    <dgm:txLinClrLst/>
+    <dgm:txFillClrLst meth="repeat">
+      <a:schemeClr val="lt1"/>
+    </dgm:txFillClrLst>
+    <dgm:txEffectClrLst/>
+  </dgm:styleLbl>
+  <dgm:styleLbl name="parChTrans1D1">
+    <dgm:fillClrLst meth="repeat">
+      <a:schemeClr val="accent2"/>
+    </dgm:fillClrLst>
+    <dgm:linClrLst meth="repeat">
+      <a:schemeClr val="accent1"/>
+    </dgm:linClrLst>
+    <dgm:effectClrLst/>
+    <dgm:txLinClrLst/>
+    <dgm:txFillClrLst meth="repeat">
+      <a:schemeClr val="tx1"/>
+    </dgm:txFillClrLst>
+    <dgm:txEffectClrLst/>
+  </dgm:styleLbl>
+  <dgm:styleLbl name="parChTrans1D2">
+    <dgm:fillClrLst meth="repeat">
+      <a:schemeClr val="accent3">
+        <a:tint val="90000"/>
+      </a:schemeClr>
+    </dgm:fillClrLst>
+    <dgm:linClrLst meth="repeat">
+      <a:schemeClr val="accent2"/>
+    </dgm:linClrLst>
+    <dgm:effectClrLst/>
+    <dgm:txLinClrLst/>
+    <dgm:txFillClrLst meth="repeat">
+      <a:schemeClr val="tx1"/>
+    </dgm:txFillClrLst>
+    <dgm:txEffectClrLst/>
+  </dgm:styleLbl>
+  <dgm:styleLbl name="parChTrans1D3">
+    <dgm:fillClrLst meth="repeat">
+      <a:schemeClr val="accent4">
+        <a:tint val="70000"/>
+      </a:schemeClr>
+    </dgm:fillClrLst>
+    <dgm:linClrLst meth="repeat">
+      <a:schemeClr val="accent3"/>
+    </dgm:linClrLst>
+    <dgm:effectClrLst/>
+    <dgm:txLinClrLst/>
+    <dgm:txFillClrLst meth="repeat">
+      <a:schemeClr val="tx1"/>
+    </dgm:txFillClrLst>
+    <dgm:txEffectClrLst/>
+  </dgm:styleLbl>
+  <dgm:styleLbl name="parChTrans1D4">
+    <dgm:fillClrLst meth="repeat">
+      <a:schemeClr val="accent5">
+        <a:tint val="50000"/>
+      </a:schemeClr>
+    </dgm:fillClrLst>
+    <dgm:linClrLst meth="repeat">
+      <a:schemeClr val="accent4"/>
+    </dgm:linClrLst>
+    <dgm:effectClrLst/>
+    <dgm:txLinClrLst/>
+    <dgm:txFillClrLst meth="repeat">
+      <a:schemeClr val="tx1"/>
+    </dgm:txFillClrLst>
+    <dgm:txEffectClrLst/>
+  </dgm:styleLbl>
+  <dgm:styleLbl name="fgAcc1">
+    <dgm:fillClrLst meth="repeat">
+      <a:schemeClr val="lt1">
+        <a:alpha val="90000"/>
+      </a:schemeClr>
+    </dgm:fillClrLst>
+    <dgm:linClrLst meth="repeat">
+      <a:schemeClr val="accent2"/>
+      <a:schemeClr val="accent3"/>
+      <a:schemeClr val="accent4"/>
+      <a:schemeClr val="accent5"/>
+      <a:schemeClr val="accent6"/>
+    </dgm:linClrLst>
+    <dgm:effectClrLst/>
+    <dgm:txLinClrLst/>
+    <dgm:txFillClrLst meth="repeat">
+      <a:schemeClr val="dk1"/>
+    </dgm:txFillClrLst>
+    <dgm:txEffectClrLst/>
+  </dgm:styleLbl>
+  <dgm:styleLbl name="conFgAcc1">
+    <dgm:fillClrLst meth="repeat">
+      <a:schemeClr val="lt1">
+        <a:alpha val="90000"/>
+      </a:schemeClr>
+    </dgm:fillClrLst>
+    <dgm:linClrLst meth="repeat">
+      <a:schemeClr val="accent2"/>
+      <a:schemeClr val="accent3"/>
+      <a:schemeClr val="accent4"/>
+      <a:schemeClr val="accent5"/>
+      <a:schemeClr val="accent6"/>
+    </dgm:linClrLst>
+    <dgm:effectClrLst/>
+    <dgm:txLinClrLst/>
+    <dgm:txFillClrLst meth="repeat">
+      <a:schemeClr val="dk1"/>
+    </dgm:txFillClrLst>
+    <dgm:txEffectClrLst/>
+  </dgm:styleLbl>
+  <dgm:styleLbl name="alignAcc1">
+    <dgm:fillClrLst meth="repeat">
+      <a:schemeClr val="lt1">
+        <a:alpha val="90000"/>
+      </a:schemeClr>
+    </dgm:fillClrLst>
+    <dgm:linClrLst meth="repeat">
+      <a:schemeClr val="accent2"/>
+      <a:schemeClr val="accent3"/>
+      <a:schemeClr val="accent4"/>
+      <a:schemeClr val="accent5"/>
+      <a:schemeClr val="accent6"/>
+    </dgm:linClrLst>
+    <dgm:effectClrLst/>
+    <dgm:txLinClrLst/>
+    <dgm:txFillClrLst meth="repeat">
+      <a:schemeClr val="dk1"/>
+    </dgm:txFillClrLst>
+    <dgm:txEffectClrLst/>
+  </dgm:styleLbl>
+  <dgm:styleLbl name="trAlignAcc1">
+    <dgm:fillClrLst meth="repeat">
+      <a:schemeClr val="lt1">
+        <a:alpha val="40000"/>
+      </a:schemeClr>
+    </dgm:fillClrLst>
+    <dgm:linClrLst meth="repeat">
+      <a:schemeClr val="accent1"/>
+    </dgm:linClrLst>
+    <dgm:effectClrLst/>
+    <dgm:txLinClrLst/>
+    <dgm:txFillClrLst meth="repeat">
+      <a:schemeClr val="dk1"/>
+    </dgm:txFillClrLst>
+    <dgm:txEffectClrLst/>
+  </dgm:styleLbl>
+  <dgm:styleLbl name="bgAcc1">
+    <dgm:fillClrLst meth="repeat">
+      <a:schemeClr val="lt1">
+        <a:alpha val="90000"/>
+      </a:schemeClr>
+    </dgm:fillClrLst>
+    <dgm:linClrLst meth="repeat">
+      <a:schemeClr val="accent2"/>
+      <a:schemeClr val="accent3"/>
+      <a:schemeClr val="accent4"/>
+      <a:schemeClr val="accent5"/>
+      <a:schemeClr val="accent6"/>
+    </dgm:linClrLst>
+    <dgm:effectClrLst/>
+    <dgm:txLinClrLst/>
+    <dgm:txFillClrLst meth="repeat">
+      <a:schemeClr val="dk1"/>
+    </dgm:txFillClrLst>
+    <dgm:txEffectClrLst/>
+  </dgm:styleLbl>
+  <dgm:styleLbl name="solidFgAcc1">
+    <dgm:fillClrLst meth="repeat">
+      <a:schemeClr val="lt1"/>
+    </dgm:fillClrLst>
+    <dgm:linClrLst meth="repeat">
+      <a:schemeClr val="accent2"/>
+      <a:schemeClr val="accent3"/>
+      <a:schemeClr val="accent4"/>
+      <a:schemeClr val="accent5"/>
+      <a:schemeClr val="accent6"/>
+    </dgm:linClrLst>
+    <dgm:effectClrLst/>
+    <dgm:txLinClrLst/>
+    <dgm:txFillClrLst meth="repeat">
+      <a:schemeClr val="dk1"/>
+    </dgm:txFillClrLst>
+    <dgm:txEffectClrLst/>
+  </dgm:styleLbl>
+  <dgm:styleLbl name="solidAlignAcc1">
+    <dgm:fillClrLst meth="repeat">
+      <a:schemeClr val="lt1"/>
+    </dgm:fillClrLst>
+    <dgm:linClrLst meth="repeat">
+      <a:schemeClr val="accent2"/>
+      <a:schemeClr val="accent3"/>
+      <a:schemeClr val="accent4"/>
+      <a:schemeClr val="accent5"/>
+      <a:schemeClr val="accent6"/>
+    </dgm:linClrLst>
+    <dgm:effectClrLst/>
+    <dgm:txLinClrLst/>
+    <dgm:txFillClrLst meth="repeat">
+      <a:schemeClr val="dk1"/>
+    </dgm:txFillClrLst>
+    <dgm:txEffectClrLst/>
+  </dgm:styleLbl>
+  <dgm:styleLbl name="solidBgAcc1">
+    <dgm:fillClrLst meth="repeat">
+      <a:schemeClr val="lt1"/>
+    </dgm:fillClrLst>
+    <dgm:linClrLst meth="repeat">
+      <a:schemeClr val="accent2"/>
+      <a:schemeClr val="accent3"/>
+      <a:schemeClr val="accent4"/>
+      <a:schemeClr val="accent5"/>
+      <a:schemeClr val="accent6"/>
+    </dgm:linClrLst>
+    <dgm:effectClrLst/>
+    <dgm:txLinClrLst/>
+    <dgm:txFillClrLst meth="repeat">
+      <a:schemeClr val="dk1"/>
+    </dgm:txFillClrLst>
+    <dgm:txEffectClrLst/>
+  </dgm:styleLbl>
+  <dgm:styleLbl name="fgAccFollowNode1">
+    <dgm:fillClrLst meth="repeat">
+      <a:schemeClr val="accent2">
+        <a:tint val="40000"/>
+        <a:alpha val="90000"/>
+      </a:schemeClr>
+      <a:schemeClr val="accent3">
+        <a:tint val="40000"/>
+        <a:alpha val="90000"/>
+      </a:schemeClr>
+      <a:schemeClr val="accent4">
+        <a:tint val="40000"/>
+        <a:alpha val="90000"/>
+      </a:schemeClr>
+      <a:schemeClr val="accent5">
+        <a:tint val="40000"/>
+        <a:alpha val="90000"/>
+      </a:schemeClr>
+      <a:schemeClr val="accent6">
+        <a:tint val="40000"/>
+        <a:alpha val="90000"/>
+      </a:schemeClr>
+    </dgm:fillClrLst>
+    <dgm:linClrLst meth="repeat">
+      <a:schemeClr val="accent2">
+        <a:tint val="40000"/>
+        <a:alpha val="90000"/>
+      </a:schemeClr>
+      <a:schemeClr val="accent3">
+        <a:tint val="40000"/>
+        <a:alpha val="90000"/>
+      </a:schemeClr>
+      <a:schemeClr val="accent4">
+        <a:tint val="40000"/>
+        <a:alpha val="90000"/>
+      </a:schemeClr>
+      <a:schemeClr val="accent5">
+        <a:tint val="40000"/>
+        <a:alpha val="90000"/>
+      </a:schemeClr>
+      <a:schemeClr val="accent6">
+        <a:tint val="40000"/>
+        <a:alpha val="90000"/>
+      </a:schemeClr>
+    </dgm:linClrLst>
+    <dgm:effectClrLst/>
+    <dgm:txLinClrLst/>
+    <dgm:txFillClrLst meth="repeat">
+      <a:schemeClr val="dk1"/>
+    </dgm:txFillClrLst>
+    <dgm:txEffectClrLst/>
+  </dgm:styleLbl>
+  <dgm:styleLbl name="alignAccFollowNode1">
+    <dgm:fillClrLst meth="repeat">
+      <a:schemeClr val="accent2">
+        <a:tint val="40000"/>
+        <a:alpha val="90000"/>
+      </a:schemeClr>
+      <a:schemeClr val="accent3">
+        <a:tint val="40000"/>
+        <a:alpha val="90000"/>
+      </a:schemeClr>
+      <a:schemeClr val="accent4">
+        <a:tint val="40000"/>
+        <a:alpha val="90000"/>
+      </a:schemeClr>
+      <a:schemeClr val="accent5">
+        <a:tint val="40000"/>
+        <a:alpha val="90000"/>
+      </a:schemeClr>
+      <a:schemeClr val="accent6">
+        <a:tint val="40000"/>
+        <a:alpha val="90000"/>
+      </a:schemeClr>
+    </dgm:fillClrLst>
+    <dgm:linClrLst meth="repeat">
+      <a:schemeClr val="accent2">
+        <a:tint val="40000"/>
+        <a:alpha val="90000"/>
+      </a:schemeClr>
+      <a:schemeClr val="accent3">
+        <a:tint val="40000"/>
+        <a:alpha val="90000"/>
+      </a:schemeClr>
+      <a:schemeClr val="accent4">
+        <a:tint val="40000"/>
+        <a:alpha val="90000"/>
+      </a:schemeClr>
+      <a:schemeClr val="accent5">
+        <a:tint val="40000"/>
+        <a:alpha val="90000"/>
+      </a:schemeClr>
+      <a:schemeClr val="accent6">
+        <a:tint val="40000"/>
+        <a:alpha val="90000"/>
+      </a:schemeClr>
+    </dgm:linClrLst>
+    <dgm:effectClrLst/>
+    <dgm:txLinClrLst/>
+    <dgm:txFillClrLst meth="repeat">
+      <a:schemeClr val="dk1"/>
+    </dgm:txFillClrLst>
+    <dgm:txEffectClrLst/>
+  </dgm:styleLbl>
+  <dgm:styleLbl name="bgAccFollowNode1">
+    <dgm:fillClrLst meth="repeat">
+      <a:schemeClr val="accent2">
+        <a:tint val="40000"/>
+        <a:alpha val="90000"/>
+      </a:schemeClr>
+      <a:schemeClr val="accent3">
+        <a:tint val="40000"/>
+        <a:alpha val="90000"/>
+      </a:schemeClr>
+      <a:schemeClr val="accent4">
+        <a:tint val="40000"/>
+        <a:alpha val="90000"/>
+      </a:schemeClr>
+      <a:schemeClr val="accent5">
+        <a:tint val="40000"/>
+        <a:alpha val="90000"/>
+      </a:schemeClr>
+      <a:schemeClr val="accent6">
+        <a:tint val="40000"/>
+        <a:alpha val="90000"/>
+      </a:schemeClr>
+    </dgm:fillClrLst>
+    <dgm:linClrLst meth="repeat">
+      <a:schemeClr val="accent2">
+        <a:tint val="40000"/>
+        <a:alpha val="90000"/>
+      </a:schemeClr>
+      <a:schemeClr val="accent3">
+        <a:tint val="40000"/>
+        <a:alpha val="90000"/>
+      </a:schemeClr>
+      <a:schemeClr val="accent4">
+        <a:tint val="40000"/>
+        <a:alpha val="90000"/>
+      </a:schemeClr>
+      <a:schemeClr val="accent5">
+        <a:tint val="40000"/>
+        <a:alpha val="90000"/>
+      </a:schemeClr>
+      <a:schemeClr val="accent6">
+        <a:tint val="40000"/>
+        <a:alpha val="90000"/>
+      </a:schemeClr>
+    </dgm:linClrLst>
+    <dgm:effectClrLst/>
+    <dgm:txLinClrLst/>
+    <dgm:txFillClrLst meth="repeat">
+      <a:schemeClr val="dk1"/>
+    </dgm:txFillClrLst>
+    <dgm:txEffectClrLst/>
+  </dgm:styleLbl>
+  <dgm:styleLbl name="fgAcc0">
+    <dgm:fillClrLst meth="repeat">
+      <a:schemeClr val="lt1">
+        <a:alpha val="90000"/>
+      </a:schemeClr>
+    </dgm:fillClrLst>
+    <dgm:linClrLst>
+      <a:schemeClr val="accent1"/>
+    </dgm:linClrLst>
+    <dgm:effectClrLst/>
+    <dgm:txLinClrLst/>
+    <dgm:txFillClrLst meth="repeat">
+      <a:schemeClr val="dk1"/>
+    </dgm:txFillClrLst>
+    <dgm:txEffectClrLst/>
+  </dgm:styleLbl>
+  <dgm:styleLbl name="fgAcc2">
+    <dgm:fillClrLst meth="repeat">
+      <a:schemeClr val="lt1">
+        <a:alpha val="90000"/>
+      </a:schemeClr>
+    </dgm:fillClrLst>
+    <dgm:linClrLst>
+      <a:schemeClr val="accent2"/>
+    </dgm:linClrLst>
+    <dgm:effectClrLst/>
+    <dgm:txLinClrLst/>
+    <dgm:txFillClrLst meth="repeat">
+      <a:schemeClr val="dk1"/>
+    </dgm:txFillClrLst>
+    <dgm:txEffectClrLst/>
+  </dgm:styleLbl>
+  <dgm:styleLbl name="fgAcc3">
+    <dgm:fillClrLst meth="repeat">
+      <a:schemeClr val="lt1">
+        <a:alpha val="90000"/>
+      </a:schemeClr>
+    </dgm:fillClrLst>
+    <dgm:linClrLst>
+      <a:schemeClr val="accent3"/>
+    </dgm:linClrLst>
+    <dgm:effectClrLst/>
+    <dgm:txLinClrLst/>
+    <dgm:txFillClrLst meth="repeat">
+      <a:schemeClr val="dk1"/>
+    </dgm:txFillClrLst>
+    <dgm:txEffectClrLst/>
+  </dgm:styleLbl>
+  <dgm:styleLbl name="fgAcc4">
+    <dgm:fillClrLst meth="repeat">
+      <a:schemeClr val="lt1">
+        <a:alpha val="90000"/>
+      </a:schemeClr>
+    </dgm:fillClrLst>
+    <dgm:linClrLst>
+      <a:schemeClr val="accent4"/>
+    </dgm:linClrLst>
+    <dgm:effectClrLst/>
+    <dgm:txLinClrLst/>
+    <dgm:txFillClrLst meth="repeat">
+      <a:schemeClr val="dk1"/>
+    </dgm:txFillClrLst>
+    <dgm:txEffectClrLst/>
+  </dgm:styleLbl>
+  <dgm:styleLbl name="bgShp">
+    <dgm:fillClrLst meth="repeat">
+      <a:schemeClr val="accent2"/>
+      <a:schemeClr val="accent3"/>
+      <a:schemeClr val="accent4"/>
+      <a:schemeClr val="accent5"/>
+      <a:schemeClr val="accent6"/>
+    </dgm:fillClrLst>
+    <dgm:linClrLst meth="repeat">
+      <a:schemeClr val="lt1">
+        <a:alpha val="0"/>
+      </a:schemeClr>
+    </dgm:linClrLst>
+    <dgm:effectClrLst/>
+    <dgm:txLinClrLst/>
+    <dgm:txFillClrLst/>
+    <dgm:txEffectClrLst/>
+  </dgm:styleLbl>
+  <dgm:styleLbl name="dkBgShp">
+    <dgm:fillClrLst meth="repeat">
+      <a:schemeClr val="accent2">
+        <a:shade val="90000"/>
+      </a:schemeClr>
+    </dgm:fillClrLst>
+    <dgm:linClrLst meth="repeat">
+      <a:schemeClr val="dk1"/>
+    </dgm:linClrLst>
+    <dgm:effectClrLst/>
+    <dgm:txLinClrLst/>
+    <dgm:txFillClrLst meth="repeat">
+      <a:schemeClr val="lt1"/>
+    </dgm:txFillClrLst>
+    <dgm:txEffectClrLst/>
+  </dgm:styleLbl>
+  <dgm:styleLbl name="trBgShp">
+    <dgm:fillClrLst meth="repeat">
+      <a:schemeClr val="accent1">
+        <a:tint val="50000"/>
+        <a:alpha val="40000"/>
+      </a:schemeClr>
+    </dgm:fillClrLst>
+    <dgm:linClrLst meth="repeat">
+      <a:schemeClr val="accent2"/>
+    </dgm:linClrLst>
+    <dgm:effectClrLst/>
+    <dgm:txLinClrLst/>
+    <dgm:txFillClrLst meth="repeat">
+      <a:schemeClr val="lt1"/>
+    </dgm:txFillClrLst>
+    <dgm:txEffectClrLst/>
+  </dgm:styleLbl>
+  <dgm:styleLbl name="fgShp">
+    <dgm:fillClrLst meth="repeat">
+      <a:schemeClr val="accent2">
+        <a:tint val="40000"/>
+      </a:schemeClr>
+    </dgm:fillClrLst>
+    <dgm:linClrLst meth="repeat">
+      <a:schemeClr val="lt1"/>
+    </dgm:linClrLst>
+    <dgm:effectClrLst/>
+    <dgm:txLinClrLst/>
+    <dgm:txFillClrLst meth="repeat">
+      <a:schemeClr val="dk1"/>
+    </dgm:txFillClrLst>
+    <dgm:txEffectClrLst/>
+  </dgm:styleLbl>
+  <dgm:styleLbl name="revTx">
+    <dgm:fillClrLst meth="repeat">
+      <a:schemeClr val="lt1">
+        <a:alpha val="0"/>
+      </a:schemeClr>
+    </dgm:fillClrLst>
+    <dgm:linClrLst meth="repeat">
+      <a:schemeClr val="dk1">
+        <a:alpha val="0"/>
+      </a:schemeClr>
+    </dgm:linClrLst>
+    <dgm:effectClrLst/>
+    <dgm:txLinClrLst/>
+    <dgm:txFillClrLst meth="repeat">
+      <a:schemeClr val="bg1"/>
+    </dgm:txFillClrLst>
+    <dgm:txEffectClrLst/>
+  </dgm:styleLbl>
+</dgm:colorsDef>
+</file>
+
+<file path=ppt/diagrams/data1.xml><?xml version="1.0" encoding="utf-8"?>
+<dgm:dataModel xmlns:dgm="http://schemas.openxmlformats.org/drawingml/2006/diagram" xmlns:a="http://schemas.openxmlformats.org/drawingml/2006/main">
+  <dgm:ptLst>
+    <dgm:pt modelId="{22F7493A-1D16-474C-A1BD-CE81F02449A0}" type="doc">
+      <dgm:prSet loTypeId="urn:microsoft.com/office/officeart/2018/2/layout/IconVerticalSolidList" loCatId="icon" qsTypeId="urn:microsoft.com/office/officeart/2005/8/quickstyle/simple1" qsCatId="simple" csTypeId="urn:microsoft.com/office/officeart/2018/5/colors/Iconchunking_neutralicontext_colorful1" csCatId="colorful" phldr="1"/>
+      <dgm:spPr/>
+      <dgm:t>
+        <a:bodyPr/>
+        <a:lstStyle/>
+        <a:p>
+          <a:endParaRPr lang="en-US"/>
+        </a:p>
+      </dgm:t>
+    </dgm:pt>
+    <dgm:pt modelId="{551ED31F-67AD-4559-B617-699FA4DE5401}">
+      <dgm:prSet/>
+      <dgm:spPr/>
+      <dgm:t>
+        <a:bodyPr/>
+        <a:lstStyle/>
+        <a:p>
+          <a:pPr>
+            <a:lnSpc>
+              <a:spcPct val="100000"/>
+            </a:lnSpc>
+          </a:pPr>
+          <a:endParaRPr lang="en-US" dirty="0"/>
+        </a:p>
+        <a:p>
+          <a:pPr>
+            <a:lnSpc>
+              <a:spcPct val="100000"/>
+            </a:lnSpc>
+          </a:pPr>
+          <a:r>
+            <a:rPr lang="en-US" dirty="0"/>
+            <a:t>Find the best way to </a:t>
+          </a:r>
+          <a:r>
+            <a:rPr lang="en-US" dirty="0" err="1"/>
+            <a:t>analyse</a:t>
+          </a:r>
+          <a:r>
+            <a:rPr lang="en-US" dirty="0"/>
+            <a:t> shopping basket data from a retailer partner in order to detect fraud cases</a:t>
+          </a:r>
+        </a:p>
+      </dgm:t>
+    </dgm:pt>
+    <dgm:pt modelId="{BDF92A0B-10C8-4AD2-A5D5-E045A41B3B2B}" type="parTrans" cxnId="{EDCE4556-CC52-41B3-B0C5-77E72EA81DD1}">
+      <dgm:prSet/>
+      <dgm:spPr/>
+      <dgm:t>
+        <a:bodyPr/>
+        <a:lstStyle/>
+        <a:p>
+          <a:endParaRPr lang="en-US"/>
+        </a:p>
+      </dgm:t>
+    </dgm:pt>
+    <dgm:pt modelId="{1BB36995-8537-411E-BC75-39E8CEFAF14D}" type="sibTrans" cxnId="{EDCE4556-CC52-41B3-B0C5-77E72EA81DD1}">
+      <dgm:prSet/>
+      <dgm:spPr/>
+      <dgm:t>
+        <a:bodyPr/>
+        <a:lstStyle/>
+        <a:p>
+          <a:endParaRPr lang="en-US"/>
+        </a:p>
+      </dgm:t>
+    </dgm:pt>
+    <dgm:pt modelId="{DA346400-B06D-4A7D-92B5-2CF7DC1ED48A}">
+      <dgm:prSet custT="1"/>
+      <dgm:spPr/>
+      <dgm:t>
+        <a:bodyPr/>
+        <a:lstStyle/>
+        <a:p>
+          <a:pPr>
+            <a:lnSpc>
+              <a:spcPct val="100000"/>
+            </a:lnSpc>
+          </a:pPr>
+          <a:r>
+            <a:rPr lang="de-DE" sz="1600" b="1" dirty="0"/>
+            <a:t>Problem</a:t>
+          </a:r>
+          <a:r>
+            <a:rPr lang="de-DE" sz="1600" dirty="0"/>
+            <a:t>:</a:t>
+          </a:r>
+        </a:p>
+        <a:p>
+          <a:pPr>
+            <a:lnSpc>
+              <a:spcPct val="100000"/>
+            </a:lnSpc>
+          </a:pPr>
+          <a:r>
+            <a:rPr lang="de-DE" sz="1600" dirty="0" err="1"/>
+            <a:t>Fraudsters</a:t>
+          </a:r>
+          <a:r>
+            <a:rPr lang="de-DE" sz="1600" dirty="0"/>
+            <a:t> </a:t>
+          </a:r>
+          <a:r>
+            <a:rPr lang="de-DE" sz="1600" dirty="0" err="1"/>
+            <a:t>use</a:t>
+          </a:r>
+          <a:r>
+            <a:rPr lang="de-DE" sz="1600" dirty="0"/>
+            <a:t> </a:t>
+          </a:r>
+          <a:r>
+            <a:rPr lang="de-DE" sz="1600" b="1" dirty="0"/>
+            <a:t>“Buy </a:t>
+          </a:r>
+          <a:r>
+            <a:rPr lang="de-DE" sz="1600" b="1" dirty="0" err="1"/>
+            <a:t>now</a:t>
+          </a:r>
+          <a:r>
+            <a:rPr lang="de-DE" sz="1600" b="1" dirty="0"/>
+            <a:t> – </a:t>
+          </a:r>
+          <a:r>
+            <a:rPr lang="de-DE" sz="1600" b="1" dirty="0" err="1"/>
+            <a:t>pay</a:t>
+          </a:r>
+          <a:r>
+            <a:rPr lang="de-DE" sz="1600" b="1" dirty="0"/>
+            <a:t> </a:t>
+          </a:r>
+          <a:r>
+            <a:rPr lang="de-DE" sz="1600" b="1" dirty="0" err="1"/>
+            <a:t>later</a:t>
+          </a:r>
+          <a:r>
+            <a:rPr lang="de-DE" sz="1600" b="1" dirty="0"/>
+            <a:t>“ </a:t>
+          </a:r>
+          <a:r>
+            <a:rPr lang="de-DE" sz="1600" dirty="0"/>
+            <a:t>but </a:t>
+          </a:r>
+          <a:r>
+            <a:rPr lang="de-DE" sz="1600" dirty="0" err="1"/>
+            <a:t>never</a:t>
+          </a:r>
+          <a:r>
+            <a:rPr lang="de-DE" sz="1600" dirty="0"/>
+            <a:t> </a:t>
+          </a:r>
+          <a:r>
+            <a:rPr lang="de-DE" sz="1600" dirty="0" err="1"/>
+            <a:t>pay</a:t>
+          </a:r>
+          <a:endParaRPr lang="en-US" sz="1600" dirty="0"/>
+        </a:p>
+      </dgm:t>
+    </dgm:pt>
+    <dgm:pt modelId="{308D8741-E804-4D5A-A3C1-A059C8FCA63B}" type="parTrans" cxnId="{03416BC3-8063-48CD-B404-9D23186E7C1A}">
+      <dgm:prSet/>
+      <dgm:spPr/>
+      <dgm:t>
+        <a:bodyPr/>
+        <a:lstStyle/>
+        <a:p>
+          <a:endParaRPr lang="en-US"/>
+        </a:p>
+      </dgm:t>
+    </dgm:pt>
+    <dgm:pt modelId="{0796445E-A9AF-4651-82BE-18B0DB867AEE}" type="sibTrans" cxnId="{03416BC3-8063-48CD-B404-9D23186E7C1A}">
+      <dgm:prSet/>
+      <dgm:spPr/>
+      <dgm:t>
+        <a:bodyPr/>
+        <a:lstStyle/>
+        <a:p>
+          <a:endParaRPr lang="en-US"/>
+        </a:p>
+      </dgm:t>
+    </dgm:pt>
+    <dgm:pt modelId="{53BFD304-CBD0-4730-91DC-6341545AEFCB}">
+      <dgm:prSet/>
+      <dgm:spPr/>
+      <dgm:t>
+        <a:bodyPr/>
+        <a:lstStyle/>
+        <a:p>
+          <a:pPr>
+            <a:lnSpc>
+              <a:spcPct val="100000"/>
+            </a:lnSpc>
+          </a:pPr>
+          <a:r>
+            <a:rPr lang="en-US" dirty="0"/>
+            <a:t>Classification – </a:t>
+          </a:r>
+          <a:r>
+            <a:rPr lang="en-US" b="1" dirty="0"/>
+            <a:t>Fraud</a:t>
+          </a:r>
+          <a:r>
+            <a:rPr lang="en-US" dirty="0"/>
+            <a:t>/</a:t>
+          </a:r>
+          <a:r>
+            <a:rPr lang="en-US" b="1" dirty="0"/>
+            <a:t>Not</a:t>
+          </a:r>
+          <a:r>
+            <a:rPr lang="en-US" dirty="0"/>
+            <a:t> </a:t>
+          </a:r>
+          <a:r>
+            <a:rPr lang="en-US" b="1" dirty="0"/>
+            <a:t>Fraud</a:t>
+          </a:r>
+        </a:p>
+      </dgm:t>
+    </dgm:pt>
+    <dgm:pt modelId="{3DE2EA2A-EFF2-4A6E-BB2F-FFC98B7F0561}" type="parTrans" cxnId="{8D600BCB-9B65-4E3A-A780-895D88B699D9}">
+      <dgm:prSet/>
+      <dgm:spPr/>
+      <dgm:t>
+        <a:bodyPr/>
+        <a:lstStyle/>
+        <a:p>
+          <a:endParaRPr lang="en-US"/>
+        </a:p>
+      </dgm:t>
+    </dgm:pt>
+    <dgm:pt modelId="{000AAF08-90C5-482E-A020-5B3E24637A1A}" type="sibTrans" cxnId="{8D600BCB-9B65-4E3A-A780-895D88B699D9}">
+      <dgm:prSet/>
+      <dgm:spPr/>
+      <dgm:t>
+        <a:bodyPr/>
+        <a:lstStyle/>
+        <a:p>
+          <a:endParaRPr lang="en-US"/>
+        </a:p>
+      </dgm:t>
+    </dgm:pt>
+    <dgm:pt modelId="{37AD6B58-915A-4207-9E62-668F121F9FD8}">
+      <dgm:prSet/>
+      <dgm:spPr/>
+      <dgm:t>
+        <a:bodyPr/>
+        <a:lstStyle/>
+        <a:p>
+          <a:pPr>
+            <a:lnSpc>
+              <a:spcPct val="100000"/>
+            </a:lnSpc>
+          </a:pPr>
+          <a:endParaRPr lang="en-US" dirty="0"/>
+        </a:p>
+        <a:p>
+          <a:pPr>
+            <a:lnSpc>
+              <a:spcPct val="100000"/>
+            </a:lnSpc>
+          </a:pPr>
+          <a:r>
+            <a:rPr lang="en-US" dirty="0"/>
+            <a:t>Tabular Data with shopping basket contents, e.g. item type, number of items, prices per item</a:t>
+          </a:r>
+        </a:p>
+      </dgm:t>
+    </dgm:pt>
+    <dgm:pt modelId="{344B6868-7CBC-467D-843D-E33E1E6922A0}" type="parTrans" cxnId="{B48FDC46-E830-4BC5-842C-7E3EC1A2A3DF}">
+      <dgm:prSet/>
+      <dgm:spPr/>
+      <dgm:t>
+        <a:bodyPr/>
+        <a:lstStyle/>
+        <a:p>
+          <a:endParaRPr lang="en-US"/>
+        </a:p>
+      </dgm:t>
+    </dgm:pt>
+    <dgm:pt modelId="{EC76B252-567A-4492-B75D-8EDCB1DB9A64}" type="sibTrans" cxnId="{B48FDC46-E830-4BC5-842C-7E3EC1A2A3DF}">
+      <dgm:prSet/>
+      <dgm:spPr/>
+      <dgm:t>
+        <a:bodyPr/>
+        <a:lstStyle/>
+        <a:p>
+          <a:endParaRPr lang="en-US"/>
+        </a:p>
+      </dgm:t>
+    </dgm:pt>
+    <dgm:pt modelId="{CAF1B615-EBE7-4F5F-B86B-62301D639A95}">
+      <dgm:prSet custT="1"/>
+      <dgm:spPr/>
+      <dgm:t>
+        <a:bodyPr/>
+        <a:lstStyle/>
+        <a:p>
+          <a:pPr>
+            <a:lnSpc>
+              <a:spcPct val="100000"/>
+            </a:lnSpc>
+          </a:pPr>
+          <a:r>
+            <a:rPr lang="de-DE" sz="1400" b="1" i="0" dirty="0"/>
+            <a:t>115.988 </a:t>
+          </a:r>
+          <a:r>
+            <a:rPr lang="de-DE" sz="1400" b="1" i="0" dirty="0" err="1"/>
+            <a:t>samples</a:t>
+          </a:r>
+          <a:r>
+            <a:rPr lang="de-DE" sz="1400" b="1" i="0" dirty="0"/>
+            <a:t>:</a:t>
+          </a:r>
+          <a:r>
+            <a:rPr lang="de-DE" sz="1400" i="0" dirty="0"/>
+            <a:t>  ~1.4% </a:t>
+          </a:r>
+          <a:r>
+            <a:rPr lang="de-DE" sz="1400" i="0" dirty="0" err="1"/>
+            <a:t>fraud</a:t>
+          </a:r>
+          <a:endParaRPr lang="en-US" sz="1400" dirty="0"/>
+        </a:p>
+      </dgm:t>
+    </dgm:pt>
+    <dgm:pt modelId="{6DE4BABC-72F1-480C-9973-427007DAF82B}" type="parTrans" cxnId="{18AA5CA3-4746-4E5C-8240-042B5AA29174}">
+      <dgm:prSet/>
+      <dgm:spPr/>
+      <dgm:t>
+        <a:bodyPr/>
+        <a:lstStyle/>
+        <a:p>
+          <a:endParaRPr lang="en-US"/>
+        </a:p>
+      </dgm:t>
+    </dgm:pt>
+    <dgm:pt modelId="{6781729E-7117-4D50-A1CE-3DA6224570C5}" type="sibTrans" cxnId="{18AA5CA3-4746-4E5C-8240-042B5AA29174}">
+      <dgm:prSet/>
+      <dgm:spPr/>
+      <dgm:t>
+        <a:bodyPr/>
+        <a:lstStyle/>
+        <a:p>
+          <a:endParaRPr lang="en-US"/>
+        </a:p>
+      </dgm:t>
+    </dgm:pt>
+    <dgm:pt modelId="{FDFD596E-0DE0-40D3-90C5-1E0CC17B0109}">
+      <dgm:prSet custT="1"/>
+      <dgm:spPr/>
+      <dgm:t>
+        <a:bodyPr/>
+        <a:lstStyle/>
+        <a:p>
+          <a:pPr>
+            <a:lnSpc>
+              <a:spcPct val="100000"/>
+            </a:lnSpc>
+          </a:pPr>
+          <a:r>
+            <a:rPr lang="de-DE" sz="1400" i="0" dirty="0"/>
+            <a:t>147 </a:t>
+          </a:r>
+          <a:r>
+            <a:rPr lang="de-DE" sz="1400" i="0" dirty="0" err="1"/>
+            <a:t>columns</a:t>
+          </a:r>
+          <a:r>
+            <a:rPr lang="de-DE" sz="1400" i="0" dirty="0"/>
+            <a:t>: 144 are </a:t>
+          </a:r>
+          <a:r>
+            <a:rPr lang="de-DE" sz="1400" i="0" dirty="0" err="1"/>
+            <a:t>grouped</a:t>
+          </a:r>
+          <a:r>
+            <a:rPr lang="de-DE" sz="1400" i="0" dirty="0"/>
+            <a:t> </a:t>
+          </a:r>
+          <a:r>
+            <a:rPr lang="de-DE" sz="1400" i="0" dirty="0" err="1"/>
+            <a:t>into</a:t>
+          </a:r>
+          <a:r>
+            <a:rPr lang="de-DE" sz="1400" i="0" dirty="0"/>
+            <a:t> 6 </a:t>
+          </a:r>
+          <a:r>
+            <a:rPr lang="de-DE" sz="1400" i="0" dirty="0" err="1"/>
+            <a:t>categories</a:t>
+          </a:r>
+          <a:r>
+            <a:rPr lang="de-DE" sz="1400" i="0" dirty="0"/>
+            <a:t> </a:t>
+          </a:r>
+          <a:endParaRPr lang="en-US" sz="1400" dirty="0"/>
+        </a:p>
+      </dgm:t>
+    </dgm:pt>
+    <dgm:pt modelId="{D912767D-D118-48BC-A700-1F8E2C254E37}" type="parTrans" cxnId="{2FB29867-616D-4E27-9163-66BB191DAEA8}">
+      <dgm:prSet/>
+      <dgm:spPr/>
+      <dgm:t>
+        <a:bodyPr/>
+        <a:lstStyle/>
+        <a:p>
+          <a:endParaRPr lang="en-US"/>
+        </a:p>
+      </dgm:t>
+    </dgm:pt>
+    <dgm:pt modelId="{76C918DE-56E7-43A6-9C35-B883A61437EE}" type="sibTrans" cxnId="{2FB29867-616D-4E27-9163-66BB191DAEA8}">
+      <dgm:prSet/>
+      <dgm:spPr/>
+      <dgm:t>
+        <a:bodyPr/>
+        <a:lstStyle/>
+        <a:p>
+          <a:endParaRPr lang="en-US"/>
+        </a:p>
+      </dgm:t>
+    </dgm:pt>
+    <dgm:pt modelId="{79DDA416-BE4B-4FA7-9054-DF263C322AC2}" type="pres">
+      <dgm:prSet presAssocID="{22F7493A-1D16-474C-A1BD-CE81F02449A0}" presName="root" presStyleCnt="0">
+        <dgm:presLayoutVars>
+          <dgm:dir/>
+          <dgm:resizeHandles val="exact"/>
+        </dgm:presLayoutVars>
+      </dgm:prSet>
+      <dgm:spPr/>
+    </dgm:pt>
+    <dgm:pt modelId="{D8FEF86B-BBFD-40F4-843E-0200C8419B99}" type="pres">
+      <dgm:prSet presAssocID="{551ED31F-67AD-4559-B617-699FA4DE5401}" presName="compNode" presStyleCnt="0"/>
+      <dgm:spPr/>
+    </dgm:pt>
+    <dgm:pt modelId="{3C4638DA-4FE9-4480-9B42-38B852428DA1}" type="pres">
+      <dgm:prSet presAssocID="{551ED31F-67AD-4559-B617-699FA4DE5401}" presName="bgRect" presStyleLbl="bgShp" presStyleIdx="0" presStyleCnt="3" custLinFactNeighborY="-43"/>
+      <dgm:spPr/>
+    </dgm:pt>
+    <dgm:pt modelId="{85E6C84C-7F4C-4429-96A0-FE99FB329A35}" type="pres">
+      <dgm:prSet presAssocID="{551ED31F-67AD-4559-B617-699FA4DE5401}" presName="iconRect" presStyleLbl="node1" presStyleIdx="0" presStyleCnt="3"/>
+      <dgm:spPr>
+        <a:blipFill>
+          <a:blip xmlns:r="http://schemas.openxmlformats.org/officeDocument/2006/relationships">
+            <a:extLst>
+              <a:ext uri="{28A0092B-C50C-407E-A947-70E740481C1C}">
+                <a14:useLocalDpi xmlns:a14="http://schemas.microsoft.com/office/drawing/2010/main" val="0"/>
+              </a:ext>
+              <a:ext uri="{96DAC541-7B7A-43D3-8B79-37D633B846F1}">
+                <asvg:svgBlip xmlns:asvg="http://schemas.microsoft.com/office/drawing/2016/SVG/main" r:embed="rId1"/>
+              </a:ext>
+            </a:extLst>
+          </a:blip>
+          <a:stretch>
+            <a:fillRect/>
+          </a:stretch>
+        </a:blipFill>
+        <a:ln>
+          <a:noFill/>
+        </a:ln>
+      </dgm:spPr>
+      <dgm:extLst>
+        <a:ext uri="{E40237B7-FDA0-4F09-8148-C483321AD2D9}">
+          <dgm14:cNvPr xmlns:dgm14="http://schemas.microsoft.com/office/drawing/2010/diagram" id="0" name="" descr="Shopping cart"/>
+        </a:ext>
+      </dgm:extLst>
+    </dgm:pt>
+    <dgm:pt modelId="{9A67D3A6-75A3-44E5-AD23-00E9B49E9D72}" type="pres">
+      <dgm:prSet presAssocID="{551ED31F-67AD-4559-B617-699FA4DE5401}" presName="spaceRect" presStyleCnt="0"/>
+      <dgm:spPr/>
+    </dgm:pt>
+    <dgm:pt modelId="{9F31BF2A-A04C-4218-A245-CC95FE531CC1}" type="pres">
+      <dgm:prSet presAssocID="{551ED31F-67AD-4559-B617-699FA4DE5401}" presName="parTx" presStyleLbl="revTx" presStyleIdx="0" presStyleCnt="5">
+        <dgm:presLayoutVars>
+          <dgm:chMax val="0"/>
+          <dgm:chPref val="0"/>
+        </dgm:presLayoutVars>
+      </dgm:prSet>
+      <dgm:spPr/>
+    </dgm:pt>
+    <dgm:pt modelId="{5AFA770A-7ED3-481B-ABAE-C0E22B69FBD3}" type="pres">
+      <dgm:prSet presAssocID="{551ED31F-67AD-4559-B617-699FA4DE5401}" presName="desTx" presStyleLbl="revTx" presStyleIdx="1" presStyleCnt="5">
+        <dgm:presLayoutVars/>
+      </dgm:prSet>
+      <dgm:spPr/>
+    </dgm:pt>
+    <dgm:pt modelId="{E310A20A-2AD0-4384-A6B1-85C4EA6E00BD}" type="pres">
+      <dgm:prSet presAssocID="{1BB36995-8537-411E-BC75-39E8CEFAF14D}" presName="sibTrans" presStyleCnt="0"/>
+      <dgm:spPr/>
+    </dgm:pt>
+    <dgm:pt modelId="{78242AF8-A29D-41C6-80FE-1C9A585D083D}" type="pres">
+      <dgm:prSet presAssocID="{53BFD304-CBD0-4730-91DC-6341545AEFCB}" presName="compNode" presStyleCnt="0"/>
+      <dgm:spPr/>
+    </dgm:pt>
+    <dgm:pt modelId="{A8008B8D-C222-4DB5-A92A-62267AF37509}" type="pres">
+      <dgm:prSet presAssocID="{53BFD304-CBD0-4730-91DC-6341545AEFCB}" presName="bgRect" presStyleLbl="bgShp" presStyleIdx="1" presStyleCnt="3"/>
+      <dgm:spPr/>
+    </dgm:pt>
+    <dgm:pt modelId="{8C515449-006B-4FC0-B094-35F0A7893B09}" type="pres">
+      <dgm:prSet presAssocID="{53BFD304-CBD0-4730-91DC-6341545AEFCB}" presName="iconRect" presStyleLbl="node1" presStyleIdx="1" presStyleCnt="3"/>
+      <dgm:spPr>
+        <a:blipFill>
+          <a:blip xmlns:r="http://schemas.openxmlformats.org/officeDocument/2006/relationships">
+            <a:extLst>
+              <a:ext uri="{28A0092B-C50C-407E-A947-70E740481C1C}">
+                <a14:useLocalDpi xmlns:a14="http://schemas.microsoft.com/office/drawing/2010/main" val="0"/>
+              </a:ext>
+              <a:ext uri="{96DAC541-7B7A-43D3-8B79-37D633B846F1}">
+                <asvg:svgBlip xmlns:asvg="http://schemas.microsoft.com/office/drawing/2016/SVG/main" r:embed="rId2"/>
+              </a:ext>
+            </a:extLst>
+          </a:blip>
+          <a:stretch>
+            <a:fillRect/>
+          </a:stretch>
+        </a:blipFill>
+        <a:ln>
+          <a:noFill/>
+        </a:ln>
+      </dgm:spPr>
+      <dgm:extLst>
+        <a:ext uri="{E40237B7-FDA0-4F09-8148-C483321AD2D9}">
+          <dgm14:cNvPr xmlns:dgm14="http://schemas.microsoft.com/office/drawing/2010/diagram" id="0" name="" descr="Räuber"/>
+        </a:ext>
+      </dgm:extLst>
+    </dgm:pt>
+    <dgm:pt modelId="{B18872E1-5291-488B-81A1-FE5AEEEEE760}" type="pres">
+      <dgm:prSet presAssocID="{53BFD304-CBD0-4730-91DC-6341545AEFCB}" presName="spaceRect" presStyleCnt="0"/>
+      <dgm:spPr/>
+    </dgm:pt>
+    <dgm:pt modelId="{4CBA44FE-B05D-4CC6-BC98-DDEB1DFA7E11}" type="pres">
+      <dgm:prSet presAssocID="{53BFD304-CBD0-4730-91DC-6341545AEFCB}" presName="parTx" presStyleLbl="revTx" presStyleIdx="2" presStyleCnt="5">
+        <dgm:presLayoutVars>
+          <dgm:chMax val="0"/>
+          <dgm:chPref val="0"/>
+        </dgm:presLayoutVars>
+      </dgm:prSet>
+      <dgm:spPr/>
+    </dgm:pt>
+    <dgm:pt modelId="{CE3E12E1-ADB9-4317-BCC7-4C4BBA18C854}" type="pres">
+      <dgm:prSet presAssocID="{000AAF08-90C5-482E-A020-5B3E24637A1A}" presName="sibTrans" presStyleCnt="0"/>
+      <dgm:spPr/>
+    </dgm:pt>
+    <dgm:pt modelId="{EC890AA4-DCC3-4F2A-84C5-262E6C2E3120}" type="pres">
+      <dgm:prSet presAssocID="{37AD6B58-915A-4207-9E62-668F121F9FD8}" presName="compNode" presStyleCnt="0"/>
+      <dgm:spPr/>
+    </dgm:pt>
+    <dgm:pt modelId="{AA9F011E-40AF-47E0-A8F9-D2565559C056}" type="pres">
+      <dgm:prSet presAssocID="{37AD6B58-915A-4207-9E62-668F121F9FD8}" presName="bgRect" presStyleLbl="bgShp" presStyleIdx="2" presStyleCnt="3"/>
+      <dgm:spPr/>
+    </dgm:pt>
+    <dgm:pt modelId="{FA189174-2E5A-4C19-A586-0334DEC6835B}" type="pres">
+      <dgm:prSet presAssocID="{37AD6B58-915A-4207-9E62-668F121F9FD8}" presName="iconRect" presStyleLbl="node1" presStyleIdx="2" presStyleCnt="3"/>
+      <dgm:spPr>
+        <a:blipFill>
+          <a:blip xmlns:r="http://schemas.openxmlformats.org/officeDocument/2006/relationships">
+            <a:extLst>
+              <a:ext uri="{28A0092B-C50C-407E-A947-70E740481C1C}">
+                <a14:useLocalDpi xmlns:a14="http://schemas.microsoft.com/office/drawing/2010/main" val="0"/>
+              </a:ext>
+              <a:ext uri="{96DAC541-7B7A-43D3-8B79-37D633B846F1}">
+                <asvg:svgBlip xmlns:asvg="http://schemas.microsoft.com/office/drawing/2016/SVG/main" r:embed="rId3"/>
+              </a:ext>
+            </a:extLst>
+          </a:blip>
+          <a:stretch>
+            <a:fillRect/>
+          </a:stretch>
+        </a:blipFill>
+        <a:ln>
+          <a:noFill/>
+        </a:ln>
+      </dgm:spPr>
+      <dgm:extLst>
+        <a:ext uri="{E40237B7-FDA0-4F09-8148-C483321AD2D9}">
+          <dgm14:cNvPr xmlns:dgm14="http://schemas.microsoft.com/office/drawing/2010/diagram" id="0" name="" descr="Shopping basket"/>
+        </a:ext>
+      </dgm:extLst>
+    </dgm:pt>
+    <dgm:pt modelId="{B2D83232-81DB-4EFF-B9CF-96FDCA70D336}" type="pres">
+      <dgm:prSet presAssocID="{37AD6B58-915A-4207-9E62-668F121F9FD8}" presName="spaceRect" presStyleCnt="0"/>
+      <dgm:spPr/>
+    </dgm:pt>
+    <dgm:pt modelId="{5409EBFA-0566-4A12-AB95-91D792EEFEE4}" type="pres">
+      <dgm:prSet presAssocID="{37AD6B58-915A-4207-9E62-668F121F9FD8}" presName="parTx" presStyleLbl="revTx" presStyleIdx="3" presStyleCnt="5">
+        <dgm:presLayoutVars>
+          <dgm:chMax val="0"/>
+          <dgm:chPref val="0"/>
+        </dgm:presLayoutVars>
+      </dgm:prSet>
+      <dgm:spPr/>
+    </dgm:pt>
+    <dgm:pt modelId="{4DFC89F5-32BE-4FDB-9EF4-15F94E86BE40}" type="pres">
+      <dgm:prSet presAssocID="{37AD6B58-915A-4207-9E62-668F121F9FD8}" presName="desTx" presStyleLbl="revTx" presStyleIdx="4" presStyleCnt="5">
+        <dgm:presLayoutVars/>
+      </dgm:prSet>
+      <dgm:spPr/>
+    </dgm:pt>
+  </dgm:ptLst>
+  <dgm:cxnLst>
+    <dgm:cxn modelId="{2B5C5811-A08C-4D3C-927F-223F073C977E}" type="presOf" srcId="{CAF1B615-EBE7-4F5F-B86B-62301D639A95}" destId="{4DFC89F5-32BE-4FDB-9EF4-15F94E86BE40}" srcOrd="0" destOrd="0" presId="urn:microsoft.com/office/officeart/2018/2/layout/IconVerticalSolidList"/>
+    <dgm:cxn modelId="{08D21E25-84DE-42B5-9BE1-37FC8B7CEAE5}" type="presOf" srcId="{37AD6B58-915A-4207-9E62-668F121F9FD8}" destId="{5409EBFA-0566-4A12-AB95-91D792EEFEE4}" srcOrd="0" destOrd="0" presId="urn:microsoft.com/office/officeart/2018/2/layout/IconVerticalSolidList"/>
+    <dgm:cxn modelId="{B48FDC46-E830-4BC5-842C-7E3EC1A2A3DF}" srcId="{22F7493A-1D16-474C-A1BD-CE81F02449A0}" destId="{37AD6B58-915A-4207-9E62-668F121F9FD8}" srcOrd="2" destOrd="0" parTransId="{344B6868-7CBC-467D-843D-E33E1E6922A0}" sibTransId="{EC76B252-567A-4492-B75D-8EDCB1DB9A64}"/>
+    <dgm:cxn modelId="{2FB29867-616D-4E27-9163-66BB191DAEA8}" srcId="{37AD6B58-915A-4207-9E62-668F121F9FD8}" destId="{FDFD596E-0DE0-40D3-90C5-1E0CC17B0109}" srcOrd="1" destOrd="0" parTransId="{D912767D-D118-48BC-A700-1F8E2C254E37}" sibTransId="{76C918DE-56E7-43A6-9C35-B883A61437EE}"/>
+    <dgm:cxn modelId="{EDCE4556-CC52-41B3-B0C5-77E72EA81DD1}" srcId="{22F7493A-1D16-474C-A1BD-CE81F02449A0}" destId="{551ED31F-67AD-4559-B617-699FA4DE5401}" srcOrd="0" destOrd="0" parTransId="{BDF92A0B-10C8-4AD2-A5D5-E045A41B3B2B}" sibTransId="{1BB36995-8537-411E-BC75-39E8CEFAF14D}"/>
+    <dgm:cxn modelId="{31DA1877-4374-463E-A4FA-BE4424493E7C}" type="presOf" srcId="{53BFD304-CBD0-4730-91DC-6341545AEFCB}" destId="{4CBA44FE-B05D-4CC6-BC98-DDEB1DFA7E11}" srcOrd="0" destOrd="0" presId="urn:microsoft.com/office/officeart/2018/2/layout/IconVerticalSolidList"/>
+    <dgm:cxn modelId="{F47C3D79-F771-4D28-9F2F-9E93EAF86AC3}" type="presOf" srcId="{551ED31F-67AD-4559-B617-699FA4DE5401}" destId="{9F31BF2A-A04C-4218-A245-CC95FE531CC1}" srcOrd="0" destOrd="0" presId="urn:microsoft.com/office/officeart/2018/2/layout/IconVerticalSolidList"/>
+    <dgm:cxn modelId="{18AA5CA3-4746-4E5C-8240-042B5AA29174}" srcId="{37AD6B58-915A-4207-9E62-668F121F9FD8}" destId="{CAF1B615-EBE7-4F5F-B86B-62301D639A95}" srcOrd="0" destOrd="0" parTransId="{6DE4BABC-72F1-480C-9973-427007DAF82B}" sibTransId="{6781729E-7117-4D50-A1CE-3DA6224570C5}"/>
+    <dgm:cxn modelId="{07A3F0B4-8649-442F-82DD-CE7A301A749D}" type="presOf" srcId="{22F7493A-1D16-474C-A1BD-CE81F02449A0}" destId="{79DDA416-BE4B-4FA7-9054-DF263C322AC2}" srcOrd="0" destOrd="0" presId="urn:microsoft.com/office/officeart/2018/2/layout/IconVerticalSolidList"/>
+    <dgm:cxn modelId="{03416BC3-8063-48CD-B404-9D23186E7C1A}" srcId="{551ED31F-67AD-4559-B617-699FA4DE5401}" destId="{DA346400-B06D-4A7D-92B5-2CF7DC1ED48A}" srcOrd="0" destOrd="0" parTransId="{308D8741-E804-4D5A-A3C1-A059C8FCA63B}" sibTransId="{0796445E-A9AF-4651-82BE-18B0DB867AEE}"/>
+    <dgm:cxn modelId="{8D600BCB-9B65-4E3A-A780-895D88B699D9}" srcId="{22F7493A-1D16-474C-A1BD-CE81F02449A0}" destId="{53BFD304-CBD0-4730-91DC-6341545AEFCB}" srcOrd="1" destOrd="0" parTransId="{3DE2EA2A-EFF2-4A6E-BB2F-FFC98B7F0561}" sibTransId="{000AAF08-90C5-482E-A020-5B3E24637A1A}"/>
+    <dgm:cxn modelId="{9E32A9D4-9388-4102-A9FB-EE47BD78B67C}" type="presOf" srcId="{FDFD596E-0DE0-40D3-90C5-1E0CC17B0109}" destId="{4DFC89F5-32BE-4FDB-9EF4-15F94E86BE40}" srcOrd="0" destOrd="1" presId="urn:microsoft.com/office/officeart/2018/2/layout/IconVerticalSolidList"/>
+    <dgm:cxn modelId="{77BC2DEF-4731-4F40-A5F1-D1E3753CB150}" type="presOf" srcId="{DA346400-B06D-4A7D-92B5-2CF7DC1ED48A}" destId="{5AFA770A-7ED3-481B-ABAE-C0E22B69FBD3}" srcOrd="0" destOrd="0" presId="urn:microsoft.com/office/officeart/2018/2/layout/IconVerticalSolidList"/>
+    <dgm:cxn modelId="{9BC67188-9031-4C08-A33B-0869BC99DA3B}" type="presParOf" srcId="{79DDA416-BE4B-4FA7-9054-DF263C322AC2}" destId="{D8FEF86B-BBFD-40F4-843E-0200C8419B99}" srcOrd="0" destOrd="0" presId="urn:microsoft.com/office/officeart/2018/2/layout/IconVerticalSolidList"/>
+    <dgm:cxn modelId="{8D876F15-85CD-4929-9D65-E5051EE26F79}" type="presParOf" srcId="{D8FEF86B-BBFD-40F4-843E-0200C8419B99}" destId="{3C4638DA-4FE9-4480-9B42-38B852428DA1}" srcOrd="0" destOrd="0" presId="urn:microsoft.com/office/officeart/2018/2/layout/IconVerticalSolidList"/>
+    <dgm:cxn modelId="{A93C5AB1-2094-4403-BD2B-1D8DEC4A9E57}" type="presParOf" srcId="{D8FEF86B-BBFD-40F4-843E-0200C8419B99}" destId="{85E6C84C-7F4C-4429-96A0-FE99FB329A35}" srcOrd="1" destOrd="0" presId="urn:microsoft.com/office/officeart/2018/2/layout/IconVerticalSolidList"/>
+    <dgm:cxn modelId="{073543CA-D1A1-421E-8236-DB9C769007E6}" type="presParOf" srcId="{D8FEF86B-BBFD-40F4-843E-0200C8419B99}" destId="{9A67D3A6-75A3-44E5-AD23-00E9B49E9D72}" srcOrd="2" destOrd="0" presId="urn:microsoft.com/office/officeart/2018/2/layout/IconVerticalSolidList"/>
+    <dgm:cxn modelId="{58CFB772-213B-4E15-8D02-9C40625C6683}" type="presParOf" srcId="{D8FEF86B-BBFD-40F4-843E-0200C8419B99}" destId="{9F31BF2A-A04C-4218-A245-CC95FE531CC1}" srcOrd="3" destOrd="0" presId="urn:microsoft.com/office/officeart/2018/2/layout/IconVerticalSolidList"/>
+    <dgm:cxn modelId="{1F878DFC-5BC7-4496-9BCF-625E61EDF2FE}" type="presParOf" srcId="{D8FEF86B-BBFD-40F4-843E-0200C8419B99}" destId="{5AFA770A-7ED3-481B-ABAE-C0E22B69FBD3}" srcOrd="4" destOrd="0" presId="urn:microsoft.com/office/officeart/2018/2/layout/IconVerticalSolidList"/>
+    <dgm:cxn modelId="{C690374A-F964-4C93-9E06-F4C8B078736E}" type="presParOf" srcId="{79DDA416-BE4B-4FA7-9054-DF263C322AC2}" destId="{E310A20A-2AD0-4384-A6B1-85C4EA6E00BD}" srcOrd="1" destOrd="0" presId="urn:microsoft.com/office/officeart/2018/2/layout/IconVerticalSolidList"/>
+    <dgm:cxn modelId="{2D5C1F1F-2C7E-42CC-88FC-E7DC43AEDB93}" type="presParOf" srcId="{79DDA416-BE4B-4FA7-9054-DF263C322AC2}" destId="{78242AF8-A29D-41C6-80FE-1C9A585D083D}" srcOrd="2" destOrd="0" presId="urn:microsoft.com/office/officeart/2018/2/layout/IconVerticalSolidList"/>
+    <dgm:cxn modelId="{005EBFBC-FE48-4F57-9D77-C6D9657948B3}" type="presParOf" srcId="{78242AF8-A29D-41C6-80FE-1C9A585D083D}" destId="{A8008B8D-C222-4DB5-A92A-62267AF37509}" srcOrd="0" destOrd="0" presId="urn:microsoft.com/office/officeart/2018/2/layout/IconVerticalSolidList"/>
+    <dgm:cxn modelId="{5EB3160D-06FA-4701-AC26-7C513C82F3E8}" type="presParOf" srcId="{78242AF8-A29D-41C6-80FE-1C9A585D083D}" destId="{8C515449-006B-4FC0-B094-35F0A7893B09}" srcOrd="1" destOrd="0" presId="urn:microsoft.com/office/officeart/2018/2/layout/IconVerticalSolidList"/>
+    <dgm:cxn modelId="{DEF6AAE9-E17E-489A-AD83-762A3116A297}" type="presParOf" srcId="{78242AF8-A29D-41C6-80FE-1C9A585D083D}" destId="{B18872E1-5291-488B-81A1-FE5AEEEEE760}" srcOrd="2" destOrd="0" presId="urn:microsoft.com/office/officeart/2018/2/layout/IconVerticalSolidList"/>
+    <dgm:cxn modelId="{9D979830-0FC3-4EDD-8DF1-5006F0C00DBB}" type="presParOf" srcId="{78242AF8-A29D-41C6-80FE-1C9A585D083D}" destId="{4CBA44FE-B05D-4CC6-BC98-DDEB1DFA7E11}" srcOrd="3" destOrd="0" presId="urn:microsoft.com/office/officeart/2018/2/layout/IconVerticalSolidList"/>
+    <dgm:cxn modelId="{43A4E99A-1740-4292-A9FE-06B3C0E5B11C}" type="presParOf" srcId="{79DDA416-BE4B-4FA7-9054-DF263C322AC2}" destId="{CE3E12E1-ADB9-4317-BCC7-4C4BBA18C854}" srcOrd="3" destOrd="0" presId="urn:microsoft.com/office/officeart/2018/2/layout/IconVerticalSolidList"/>
+    <dgm:cxn modelId="{2DF20716-D60D-4158-93FE-F49858E3A17B}" type="presParOf" srcId="{79DDA416-BE4B-4FA7-9054-DF263C322AC2}" destId="{EC890AA4-DCC3-4F2A-84C5-262E6C2E3120}" srcOrd="4" destOrd="0" presId="urn:microsoft.com/office/officeart/2018/2/layout/IconVerticalSolidList"/>
+    <dgm:cxn modelId="{BBF11E84-7314-47EE-8C4F-A01CE5CF882C}" type="presParOf" srcId="{EC890AA4-DCC3-4F2A-84C5-262E6C2E3120}" destId="{AA9F011E-40AF-47E0-A8F9-D2565559C056}" srcOrd="0" destOrd="0" presId="urn:microsoft.com/office/officeart/2018/2/layout/IconVerticalSolidList"/>
+    <dgm:cxn modelId="{2262D764-B697-4158-AB89-616CD1A26841}" type="presParOf" srcId="{EC890AA4-DCC3-4F2A-84C5-262E6C2E3120}" destId="{FA189174-2E5A-4C19-A586-0334DEC6835B}" srcOrd="1" destOrd="0" presId="urn:microsoft.com/office/officeart/2018/2/layout/IconVerticalSolidList"/>
+    <dgm:cxn modelId="{33A2E15A-6C46-47C4-9C99-97365BAB7C6C}" type="presParOf" srcId="{EC890AA4-DCC3-4F2A-84C5-262E6C2E3120}" destId="{B2D83232-81DB-4EFF-B9CF-96FDCA70D336}" srcOrd="2" destOrd="0" presId="urn:microsoft.com/office/officeart/2018/2/layout/IconVerticalSolidList"/>
+    <dgm:cxn modelId="{EBA55D5A-7783-47AB-8963-8A741C692DAC}" type="presParOf" srcId="{EC890AA4-DCC3-4F2A-84C5-262E6C2E3120}" destId="{5409EBFA-0566-4A12-AB95-91D792EEFEE4}" srcOrd="3" destOrd="0" presId="urn:microsoft.com/office/officeart/2018/2/layout/IconVerticalSolidList"/>
+    <dgm:cxn modelId="{B111280A-B2AD-4363-A87D-5A146CF4C426}" type="presParOf" srcId="{EC890AA4-DCC3-4F2A-84C5-262E6C2E3120}" destId="{4DFC89F5-32BE-4FDB-9EF4-15F94E86BE40}" srcOrd="4" destOrd="0" presId="urn:microsoft.com/office/officeart/2018/2/layout/IconVerticalSolidList"/>
+  </dgm:cxnLst>
+  <dgm:bg/>
+  <dgm:whole/>
+  <dgm:extLst>
+    <a:ext uri="http://schemas.microsoft.com/office/drawing/2008/diagram">
+      <dsp:dataModelExt xmlns:dsp="http://schemas.microsoft.com/office/drawing/2008/diagram" relId="rId6" minVer="http://schemas.openxmlformats.org/drawingml/2006/diagram"/>
+    </a:ext>
+  </dgm:extLst>
+</dgm:dataModel>
+</file>
+
+<file path=ppt/diagrams/drawing1.xml><?xml version="1.0" encoding="utf-8"?>
+<dsp:drawing xmlns:dgm="http://schemas.openxmlformats.org/drawingml/2006/diagram" xmlns:dsp="http://schemas.microsoft.com/office/drawing/2008/diagram" xmlns:a="http://schemas.openxmlformats.org/drawingml/2006/main">
+  <dsp:spTree>
+    <dsp:nvGrpSpPr>
+      <dsp:cNvPr id="0" name=""/>
+      <dsp:cNvGrpSpPr/>
+    </dsp:nvGrpSpPr>
+    <dsp:grpSpPr/>
+    <dsp:sp modelId="{3C4638DA-4FE9-4480-9B42-38B852428DA1}">
+      <dsp:nvSpPr>
+        <dsp:cNvPr id="0" name=""/>
+        <dsp:cNvSpPr/>
+      </dsp:nvSpPr>
+      <dsp:spPr>
+        <a:xfrm>
+          <a:off x="0" y="0"/>
+          <a:ext cx="6506304" cy="1593279"/>
+        </a:xfrm>
+        <a:prstGeom prst="roundRect">
+          <a:avLst>
+            <a:gd name="adj" fmla="val 10000"/>
+          </a:avLst>
+        </a:prstGeom>
+        <a:solidFill>
+          <a:schemeClr val="accent2">
+            <a:hueOff val="0"/>
+            <a:satOff val="0"/>
+            <a:lumOff val="0"/>
+            <a:alphaOff val="0"/>
+          </a:schemeClr>
+        </a:solidFill>
+        <a:ln>
+          <a:noFill/>
+        </a:ln>
+        <a:effectLst/>
+      </dsp:spPr>
+      <dsp:style>
+        <a:lnRef idx="0">
+          <a:scrgbClr r="0" g="0" b="0"/>
+        </a:lnRef>
+        <a:fillRef idx="1">
+          <a:scrgbClr r="0" g="0" b="0"/>
+        </a:fillRef>
+        <a:effectRef idx="0">
+          <a:scrgbClr r="0" g="0" b="0"/>
+        </a:effectRef>
+        <a:fontRef idx="minor"/>
+      </dsp:style>
+    </dsp:sp>
+    <dsp:sp modelId="{85E6C84C-7F4C-4429-96A0-FE99FB329A35}">
+      <dsp:nvSpPr>
+        <dsp:cNvPr id="0" name=""/>
+        <dsp:cNvSpPr/>
+      </dsp:nvSpPr>
+      <dsp:spPr>
+        <a:xfrm>
+          <a:off x="481967" y="359168"/>
+          <a:ext cx="876303" cy="876303"/>
+        </a:xfrm>
+        <a:prstGeom prst="rect">
+          <a:avLst/>
+        </a:prstGeom>
+        <a:blipFill>
+          <a:blip xmlns:r="http://schemas.openxmlformats.org/officeDocument/2006/relationships">
+            <a:extLst>
+              <a:ext uri="{28A0092B-C50C-407E-A947-70E740481C1C}">
+                <a14:useLocalDpi xmlns:a14="http://schemas.microsoft.com/office/drawing/2010/main" val="0"/>
+              </a:ext>
+              <a:ext uri="{96DAC541-7B7A-43D3-8B79-37D633B846F1}">
+                <asvg:svgBlip xmlns:asvg="http://schemas.microsoft.com/office/drawing/2016/SVG/main" r:embed="rId1"/>
+              </a:ext>
+            </a:extLst>
+          </a:blip>
+          <a:stretch>
+            <a:fillRect/>
+          </a:stretch>
+        </a:blipFill>
+        <a:ln w="34925" cap="flat" cmpd="sng" algn="in">
+          <a:noFill/>
+          <a:prstDash val="solid"/>
+        </a:ln>
+        <a:effectLst/>
+      </dsp:spPr>
+      <dsp:style>
+        <a:lnRef idx="2">
+          <a:scrgbClr r="0" g="0" b="0"/>
+        </a:lnRef>
+        <a:fillRef idx="1">
+          <a:scrgbClr r="0" g="0" b="0"/>
+        </a:fillRef>
+        <a:effectRef idx="0">
+          <a:scrgbClr r="0" g="0" b="0"/>
+        </a:effectRef>
+        <a:fontRef idx="minor">
+          <a:schemeClr val="lt1"/>
+        </a:fontRef>
+      </dsp:style>
+    </dsp:sp>
+    <dsp:sp modelId="{9F31BF2A-A04C-4218-A245-CC95FE531CC1}">
+      <dsp:nvSpPr>
+        <dsp:cNvPr id="0" name=""/>
+        <dsp:cNvSpPr/>
+      </dsp:nvSpPr>
+      <dsp:spPr>
+        <a:xfrm>
+          <a:off x="1840237" y="680"/>
+          <a:ext cx="2927836" cy="1593279"/>
+        </a:xfrm>
+        <a:prstGeom prst="rect">
+          <a:avLst/>
+        </a:prstGeom>
+        <a:noFill/>
+        <a:ln>
+          <a:noFill/>
+        </a:ln>
+        <a:effectLst/>
+      </dsp:spPr>
+      <dsp:style>
+        <a:lnRef idx="0">
+          <a:scrgbClr r="0" g="0" b="0"/>
+        </a:lnRef>
+        <a:fillRef idx="0">
+          <a:scrgbClr r="0" g="0" b="0"/>
+        </a:fillRef>
+        <a:effectRef idx="0">
+          <a:scrgbClr r="0" g="0" b="0"/>
+        </a:effectRef>
+        <a:fontRef idx="minor"/>
+      </dsp:style>
+      <dsp:txBody>
+        <a:bodyPr spcFirstLastPara="0" vert="horz" wrap="square" lIns="168622" tIns="168622" rIns="168622" bIns="168622" numCol="1" spcCol="1270" anchor="ctr" anchorCtr="0">
+          <a:noAutofit/>
+        </a:bodyPr>
+        <a:lstStyle/>
+        <a:p>
+          <a:pPr marL="0" lvl="0" indent="0" algn="l" defTabSz="711200">
+            <a:lnSpc>
+              <a:spcPct val="100000"/>
+            </a:lnSpc>
+            <a:spcBef>
+              <a:spcPct val="0"/>
+            </a:spcBef>
+            <a:spcAft>
+              <a:spcPct val="35000"/>
+            </a:spcAft>
+            <a:buNone/>
+          </a:pPr>
+          <a:endParaRPr lang="en-US" sz="1600" kern="1200" dirty="0"/>
+        </a:p>
+        <a:p>
+          <a:pPr marL="0" lvl="0" indent="0" algn="l" defTabSz="711200">
+            <a:lnSpc>
+              <a:spcPct val="100000"/>
+            </a:lnSpc>
+            <a:spcBef>
+              <a:spcPct val="0"/>
+            </a:spcBef>
+            <a:spcAft>
+              <a:spcPct val="35000"/>
+            </a:spcAft>
+            <a:buNone/>
+          </a:pPr>
+          <a:r>
+            <a:rPr lang="en-US" sz="1600" kern="1200" dirty="0"/>
+            <a:t>Find the best way to </a:t>
+          </a:r>
+          <a:r>
+            <a:rPr lang="en-US" sz="1600" kern="1200" dirty="0" err="1"/>
+            <a:t>analyse</a:t>
+          </a:r>
+          <a:r>
+            <a:rPr lang="en-US" sz="1600" kern="1200" dirty="0"/>
+            <a:t> shopping basket data from a retailer partner in order to detect fraud cases</a:t>
+          </a:r>
+        </a:p>
+      </dsp:txBody>
+      <dsp:txXfrm>
+        <a:off x="1840237" y="680"/>
+        <a:ext cx="2927836" cy="1593279"/>
+      </dsp:txXfrm>
+    </dsp:sp>
+    <dsp:sp modelId="{5AFA770A-7ED3-481B-ABAE-C0E22B69FBD3}">
+      <dsp:nvSpPr>
+        <dsp:cNvPr id="0" name=""/>
+        <dsp:cNvSpPr/>
+      </dsp:nvSpPr>
+      <dsp:spPr>
+        <a:xfrm>
+          <a:off x="4768074" y="680"/>
+          <a:ext cx="1738229" cy="1593279"/>
+        </a:xfrm>
+        <a:prstGeom prst="rect">
+          <a:avLst/>
+        </a:prstGeom>
+        <a:noFill/>
+        <a:ln>
+          <a:noFill/>
+        </a:ln>
+        <a:effectLst/>
+      </dsp:spPr>
+      <dsp:style>
+        <a:lnRef idx="0">
+          <a:scrgbClr r="0" g="0" b="0"/>
+        </a:lnRef>
+        <a:fillRef idx="0">
+          <a:scrgbClr r="0" g="0" b="0"/>
+        </a:fillRef>
+        <a:effectRef idx="0">
+          <a:scrgbClr r="0" g="0" b="0"/>
+        </a:effectRef>
+        <a:fontRef idx="minor"/>
+      </dsp:style>
+      <dsp:txBody>
+        <a:bodyPr spcFirstLastPara="0" vert="horz" wrap="square" lIns="168622" tIns="168622" rIns="168622" bIns="168622" numCol="1" spcCol="1270" anchor="ctr" anchorCtr="0">
+          <a:noAutofit/>
+        </a:bodyPr>
+        <a:lstStyle/>
+        <a:p>
+          <a:pPr marL="0" lvl="0" indent="0" algn="l" defTabSz="711200">
+            <a:lnSpc>
+              <a:spcPct val="100000"/>
+            </a:lnSpc>
+            <a:spcBef>
+              <a:spcPct val="0"/>
+            </a:spcBef>
+            <a:spcAft>
+              <a:spcPct val="35000"/>
+            </a:spcAft>
+            <a:buNone/>
+          </a:pPr>
+          <a:r>
+            <a:rPr lang="de-DE" sz="1600" b="1" kern="1200" dirty="0"/>
+            <a:t>Problem</a:t>
+          </a:r>
+          <a:r>
+            <a:rPr lang="de-DE" sz="1600" kern="1200" dirty="0"/>
+            <a:t>:</a:t>
+          </a:r>
+        </a:p>
+        <a:p>
+          <a:pPr marL="0" lvl="0" indent="0" algn="l" defTabSz="711200">
+            <a:lnSpc>
+              <a:spcPct val="100000"/>
+            </a:lnSpc>
+            <a:spcBef>
+              <a:spcPct val="0"/>
+            </a:spcBef>
+            <a:spcAft>
+              <a:spcPct val="35000"/>
+            </a:spcAft>
+            <a:buNone/>
+          </a:pPr>
+          <a:r>
+            <a:rPr lang="de-DE" sz="1600" kern="1200" dirty="0" err="1"/>
+            <a:t>Fraudsters</a:t>
+          </a:r>
+          <a:r>
+            <a:rPr lang="de-DE" sz="1600" kern="1200" dirty="0"/>
+            <a:t> </a:t>
+          </a:r>
+          <a:r>
+            <a:rPr lang="de-DE" sz="1600" kern="1200" dirty="0" err="1"/>
+            <a:t>use</a:t>
+          </a:r>
+          <a:r>
+            <a:rPr lang="de-DE" sz="1600" kern="1200" dirty="0"/>
+            <a:t> </a:t>
+          </a:r>
+          <a:r>
+            <a:rPr lang="de-DE" sz="1600" b="1" kern="1200" dirty="0"/>
+            <a:t>“Buy </a:t>
+          </a:r>
+          <a:r>
+            <a:rPr lang="de-DE" sz="1600" b="1" kern="1200" dirty="0" err="1"/>
+            <a:t>now</a:t>
+          </a:r>
+          <a:r>
+            <a:rPr lang="de-DE" sz="1600" b="1" kern="1200" dirty="0"/>
+            <a:t> – </a:t>
+          </a:r>
+          <a:r>
+            <a:rPr lang="de-DE" sz="1600" b="1" kern="1200" dirty="0" err="1"/>
+            <a:t>pay</a:t>
+          </a:r>
+          <a:r>
+            <a:rPr lang="de-DE" sz="1600" b="1" kern="1200" dirty="0"/>
+            <a:t> </a:t>
+          </a:r>
+          <a:r>
+            <a:rPr lang="de-DE" sz="1600" b="1" kern="1200" dirty="0" err="1"/>
+            <a:t>later</a:t>
+          </a:r>
+          <a:r>
+            <a:rPr lang="de-DE" sz="1600" b="1" kern="1200" dirty="0"/>
+            <a:t>“ </a:t>
+          </a:r>
+          <a:r>
+            <a:rPr lang="de-DE" sz="1600" kern="1200" dirty="0"/>
+            <a:t>but </a:t>
+          </a:r>
+          <a:r>
+            <a:rPr lang="de-DE" sz="1600" kern="1200" dirty="0" err="1"/>
+            <a:t>never</a:t>
+          </a:r>
+          <a:r>
+            <a:rPr lang="de-DE" sz="1600" kern="1200" dirty="0"/>
+            <a:t> </a:t>
+          </a:r>
+          <a:r>
+            <a:rPr lang="de-DE" sz="1600" kern="1200" dirty="0" err="1"/>
+            <a:t>pay</a:t>
+          </a:r>
+          <a:endParaRPr lang="en-US" sz="1600" kern="1200" dirty="0"/>
+        </a:p>
+      </dsp:txBody>
+      <dsp:txXfrm>
+        <a:off x="4768074" y="680"/>
+        <a:ext cx="1738229" cy="1593279"/>
+      </dsp:txXfrm>
+    </dsp:sp>
+    <dsp:sp modelId="{A8008B8D-C222-4DB5-A92A-62267AF37509}">
+      <dsp:nvSpPr>
+        <dsp:cNvPr id="0" name=""/>
+        <dsp:cNvSpPr/>
+      </dsp:nvSpPr>
+      <dsp:spPr>
+        <a:xfrm>
+          <a:off x="0" y="1992280"/>
+          <a:ext cx="6506304" cy="1593279"/>
+        </a:xfrm>
+        <a:prstGeom prst="roundRect">
+          <a:avLst>
+            <a:gd name="adj" fmla="val 10000"/>
+          </a:avLst>
+        </a:prstGeom>
+        <a:solidFill>
+          <a:schemeClr val="accent3">
+            <a:hueOff val="0"/>
+            <a:satOff val="0"/>
+            <a:lumOff val="0"/>
+            <a:alphaOff val="0"/>
+          </a:schemeClr>
+        </a:solidFill>
+        <a:ln>
+          <a:noFill/>
+        </a:ln>
+        <a:effectLst/>
+      </dsp:spPr>
+      <dsp:style>
+        <a:lnRef idx="0">
+          <a:scrgbClr r="0" g="0" b="0"/>
+        </a:lnRef>
+        <a:fillRef idx="1">
+          <a:scrgbClr r="0" g="0" b="0"/>
+        </a:fillRef>
+        <a:effectRef idx="0">
+          <a:scrgbClr r="0" g="0" b="0"/>
+        </a:effectRef>
+        <a:fontRef idx="minor"/>
+      </dsp:style>
+    </dsp:sp>
+    <dsp:sp modelId="{8C515449-006B-4FC0-B094-35F0A7893B09}">
+      <dsp:nvSpPr>
+        <dsp:cNvPr id="0" name=""/>
+        <dsp:cNvSpPr/>
+      </dsp:nvSpPr>
+      <dsp:spPr>
+        <a:xfrm>
+          <a:off x="481967" y="2350768"/>
+          <a:ext cx="876303" cy="876303"/>
+        </a:xfrm>
+        <a:prstGeom prst="rect">
+          <a:avLst/>
+        </a:prstGeom>
+        <a:blipFill>
+          <a:blip xmlns:r="http://schemas.openxmlformats.org/officeDocument/2006/relationships">
+            <a:extLst>
+              <a:ext uri="{28A0092B-C50C-407E-A947-70E740481C1C}">
+                <a14:useLocalDpi xmlns:a14="http://schemas.microsoft.com/office/drawing/2010/main" val="0"/>
+              </a:ext>
+              <a:ext uri="{96DAC541-7B7A-43D3-8B79-37D633B846F1}">
+                <asvg:svgBlip xmlns:asvg="http://schemas.microsoft.com/office/drawing/2016/SVG/main" r:embed="rId2"/>
+              </a:ext>
+            </a:extLst>
+          </a:blip>
+          <a:stretch>
+            <a:fillRect/>
+          </a:stretch>
+        </a:blipFill>
+        <a:ln w="34925" cap="flat" cmpd="sng" algn="in">
+          <a:noFill/>
+          <a:prstDash val="solid"/>
+        </a:ln>
+        <a:effectLst/>
+      </dsp:spPr>
+      <dsp:style>
+        <a:lnRef idx="2">
+          <a:scrgbClr r="0" g="0" b="0"/>
+        </a:lnRef>
+        <a:fillRef idx="1">
+          <a:scrgbClr r="0" g="0" b="0"/>
+        </a:fillRef>
+        <a:effectRef idx="0">
+          <a:scrgbClr r="0" g="0" b="0"/>
+        </a:effectRef>
+        <a:fontRef idx="minor">
+          <a:schemeClr val="lt1"/>
+        </a:fontRef>
+      </dsp:style>
+    </dsp:sp>
+    <dsp:sp modelId="{4CBA44FE-B05D-4CC6-BC98-DDEB1DFA7E11}">
+      <dsp:nvSpPr>
+        <dsp:cNvPr id="0" name=""/>
+        <dsp:cNvSpPr/>
+      </dsp:nvSpPr>
+      <dsp:spPr>
+        <a:xfrm>
+          <a:off x="1840237" y="1992280"/>
+          <a:ext cx="4666066" cy="1593279"/>
+        </a:xfrm>
+        <a:prstGeom prst="rect">
+          <a:avLst/>
+        </a:prstGeom>
+        <a:noFill/>
+        <a:ln>
+          <a:noFill/>
+        </a:ln>
+        <a:effectLst/>
+      </dsp:spPr>
+      <dsp:style>
+        <a:lnRef idx="0">
+          <a:scrgbClr r="0" g="0" b="0"/>
+        </a:lnRef>
+        <a:fillRef idx="0">
+          <a:scrgbClr r="0" g="0" b="0"/>
+        </a:fillRef>
+        <a:effectRef idx="0">
+          <a:scrgbClr r="0" g="0" b="0"/>
+        </a:effectRef>
+        <a:fontRef idx="minor"/>
+      </dsp:style>
+      <dsp:txBody>
+        <a:bodyPr spcFirstLastPara="0" vert="horz" wrap="square" lIns="168622" tIns="168622" rIns="168622" bIns="168622" numCol="1" spcCol="1270" anchor="ctr" anchorCtr="0">
+          <a:noAutofit/>
+        </a:bodyPr>
+        <a:lstStyle/>
+        <a:p>
+          <a:pPr marL="0" lvl="0" indent="0" algn="l" defTabSz="711200">
+            <a:lnSpc>
+              <a:spcPct val="100000"/>
+            </a:lnSpc>
+            <a:spcBef>
+              <a:spcPct val="0"/>
+            </a:spcBef>
+            <a:spcAft>
+              <a:spcPct val="35000"/>
+            </a:spcAft>
+            <a:buNone/>
+          </a:pPr>
+          <a:r>
+            <a:rPr lang="en-US" sz="1600" kern="1200" dirty="0"/>
+            <a:t>Classification – </a:t>
+          </a:r>
+          <a:r>
+            <a:rPr lang="en-US" sz="1600" b="1" kern="1200" dirty="0"/>
+            <a:t>Fraud</a:t>
+          </a:r>
+          <a:r>
+            <a:rPr lang="en-US" sz="1600" kern="1200" dirty="0"/>
+            <a:t>/</a:t>
+          </a:r>
+          <a:r>
+            <a:rPr lang="en-US" sz="1600" b="1" kern="1200" dirty="0"/>
+            <a:t>Not</a:t>
+          </a:r>
+          <a:r>
+            <a:rPr lang="en-US" sz="1600" kern="1200" dirty="0"/>
+            <a:t> </a:t>
+          </a:r>
+          <a:r>
+            <a:rPr lang="en-US" sz="1600" b="1" kern="1200" dirty="0"/>
+            <a:t>Fraud</a:t>
+          </a:r>
+        </a:p>
+      </dsp:txBody>
+      <dsp:txXfrm>
+        <a:off x="1840237" y="1992280"/>
+        <a:ext cx="4666066" cy="1593279"/>
+      </dsp:txXfrm>
+    </dsp:sp>
+    <dsp:sp modelId="{AA9F011E-40AF-47E0-A8F9-D2565559C056}">
+      <dsp:nvSpPr>
+        <dsp:cNvPr id="0" name=""/>
+        <dsp:cNvSpPr/>
+      </dsp:nvSpPr>
+      <dsp:spPr>
+        <a:xfrm>
+          <a:off x="0" y="3983879"/>
+          <a:ext cx="6506304" cy="1593279"/>
+        </a:xfrm>
+        <a:prstGeom prst="roundRect">
+          <a:avLst>
+            <a:gd name="adj" fmla="val 10000"/>
+          </a:avLst>
+        </a:prstGeom>
+        <a:solidFill>
+          <a:schemeClr val="accent4">
+            <a:hueOff val="0"/>
+            <a:satOff val="0"/>
+            <a:lumOff val="0"/>
+            <a:alphaOff val="0"/>
+          </a:schemeClr>
+        </a:solidFill>
+        <a:ln>
+          <a:noFill/>
+        </a:ln>
+        <a:effectLst/>
+      </dsp:spPr>
+      <dsp:style>
+        <a:lnRef idx="0">
+          <a:scrgbClr r="0" g="0" b="0"/>
+        </a:lnRef>
+        <a:fillRef idx="1">
+          <a:scrgbClr r="0" g="0" b="0"/>
+        </a:fillRef>
+        <a:effectRef idx="0">
+          <a:scrgbClr r="0" g="0" b="0"/>
+        </a:effectRef>
+        <a:fontRef idx="minor"/>
+      </dsp:style>
+    </dsp:sp>
+    <dsp:sp modelId="{FA189174-2E5A-4C19-A586-0334DEC6835B}">
+      <dsp:nvSpPr>
+        <dsp:cNvPr id="0" name=""/>
+        <dsp:cNvSpPr/>
+      </dsp:nvSpPr>
+      <dsp:spPr>
+        <a:xfrm>
+          <a:off x="481967" y="4342367"/>
+          <a:ext cx="876303" cy="876303"/>
+        </a:xfrm>
+        <a:prstGeom prst="rect">
+          <a:avLst/>
+        </a:prstGeom>
+        <a:blipFill>
+          <a:blip xmlns:r="http://schemas.openxmlformats.org/officeDocument/2006/relationships">
+            <a:extLst>
+              <a:ext uri="{28A0092B-C50C-407E-A947-70E740481C1C}">
+                <a14:useLocalDpi xmlns:a14="http://schemas.microsoft.com/office/drawing/2010/main" val="0"/>
+              </a:ext>
+              <a:ext uri="{96DAC541-7B7A-43D3-8B79-37D633B846F1}">
+                <asvg:svgBlip xmlns:asvg="http://schemas.microsoft.com/office/drawing/2016/SVG/main" r:embed="rId3"/>
+              </a:ext>
+            </a:extLst>
+          </a:blip>
+          <a:stretch>
+            <a:fillRect/>
+          </a:stretch>
+        </a:blipFill>
+        <a:ln w="34925" cap="flat" cmpd="sng" algn="in">
+          <a:noFill/>
+          <a:prstDash val="solid"/>
+        </a:ln>
+        <a:effectLst/>
+      </dsp:spPr>
+      <dsp:style>
+        <a:lnRef idx="2">
+          <a:scrgbClr r="0" g="0" b="0"/>
+        </a:lnRef>
+        <a:fillRef idx="1">
+          <a:scrgbClr r="0" g="0" b="0"/>
+        </a:fillRef>
+        <a:effectRef idx="0">
+          <a:scrgbClr r="0" g="0" b="0"/>
+        </a:effectRef>
+        <a:fontRef idx="minor">
+          <a:schemeClr val="lt1"/>
+        </a:fontRef>
+      </dsp:style>
+    </dsp:sp>
+    <dsp:sp modelId="{5409EBFA-0566-4A12-AB95-91D792EEFEE4}">
+      <dsp:nvSpPr>
+        <dsp:cNvPr id="0" name=""/>
+        <dsp:cNvSpPr/>
+      </dsp:nvSpPr>
+      <dsp:spPr>
+        <a:xfrm>
+          <a:off x="1840237" y="3983879"/>
+          <a:ext cx="2927836" cy="1593279"/>
+        </a:xfrm>
+        <a:prstGeom prst="rect">
+          <a:avLst/>
+        </a:prstGeom>
+        <a:noFill/>
+        <a:ln>
+          <a:noFill/>
+        </a:ln>
+        <a:effectLst/>
+      </dsp:spPr>
+      <dsp:style>
+        <a:lnRef idx="0">
+          <a:scrgbClr r="0" g="0" b="0"/>
+        </a:lnRef>
+        <a:fillRef idx="0">
+          <a:scrgbClr r="0" g="0" b="0"/>
+        </a:fillRef>
+        <a:effectRef idx="0">
+          <a:scrgbClr r="0" g="0" b="0"/>
+        </a:effectRef>
+        <a:fontRef idx="minor"/>
+      </dsp:style>
+      <dsp:txBody>
+        <a:bodyPr spcFirstLastPara="0" vert="horz" wrap="square" lIns="168622" tIns="168622" rIns="168622" bIns="168622" numCol="1" spcCol="1270" anchor="ctr" anchorCtr="0">
+          <a:noAutofit/>
+        </a:bodyPr>
+        <a:lstStyle/>
+        <a:p>
+          <a:pPr marL="0" lvl="0" indent="0" algn="l" defTabSz="711200">
+            <a:lnSpc>
+              <a:spcPct val="100000"/>
+            </a:lnSpc>
+            <a:spcBef>
+              <a:spcPct val="0"/>
+            </a:spcBef>
+            <a:spcAft>
+              <a:spcPct val="35000"/>
+            </a:spcAft>
+            <a:buNone/>
+          </a:pPr>
+          <a:endParaRPr lang="en-US" sz="1600" kern="1200" dirty="0"/>
+        </a:p>
+        <a:p>
+          <a:pPr marL="0" lvl="0" indent="0" algn="l" defTabSz="711200">
+            <a:lnSpc>
+              <a:spcPct val="100000"/>
+            </a:lnSpc>
+            <a:spcBef>
+              <a:spcPct val="0"/>
+            </a:spcBef>
+            <a:spcAft>
+              <a:spcPct val="35000"/>
+            </a:spcAft>
+            <a:buNone/>
+          </a:pPr>
+          <a:r>
+            <a:rPr lang="en-US" sz="1600" kern="1200" dirty="0"/>
+            <a:t>Tabular Data with shopping basket contents, e.g. item type, number of items, prices per item</a:t>
+          </a:r>
+        </a:p>
+      </dsp:txBody>
+      <dsp:txXfrm>
+        <a:off x="1840237" y="3983879"/>
+        <a:ext cx="2927836" cy="1593279"/>
+      </dsp:txXfrm>
+    </dsp:sp>
+    <dsp:sp modelId="{4DFC89F5-32BE-4FDB-9EF4-15F94E86BE40}">
+      <dsp:nvSpPr>
+        <dsp:cNvPr id="0" name=""/>
+        <dsp:cNvSpPr/>
+      </dsp:nvSpPr>
+      <dsp:spPr>
+        <a:xfrm>
+          <a:off x="4768074" y="3983879"/>
+          <a:ext cx="1738229" cy="1593279"/>
+        </a:xfrm>
+        <a:prstGeom prst="rect">
+          <a:avLst/>
+        </a:prstGeom>
+        <a:noFill/>
+        <a:ln>
+          <a:noFill/>
+        </a:ln>
+        <a:effectLst/>
+      </dsp:spPr>
+      <dsp:style>
+        <a:lnRef idx="0">
+          <a:scrgbClr r="0" g="0" b="0"/>
+        </a:lnRef>
+        <a:fillRef idx="0">
+          <a:scrgbClr r="0" g="0" b="0"/>
+        </a:fillRef>
+        <a:effectRef idx="0">
+          <a:scrgbClr r="0" g="0" b="0"/>
+        </a:effectRef>
+        <a:fontRef idx="minor"/>
+      </dsp:style>
+      <dsp:txBody>
+        <a:bodyPr spcFirstLastPara="0" vert="horz" wrap="square" lIns="168622" tIns="168622" rIns="168622" bIns="168622" numCol="1" spcCol="1270" anchor="ctr" anchorCtr="0">
+          <a:noAutofit/>
+        </a:bodyPr>
+        <a:lstStyle/>
+        <a:p>
+          <a:pPr marL="0" lvl="0" indent="0" algn="l" defTabSz="622300">
+            <a:lnSpc>
+              <a:spcPct val="100000"/>
+            </a:lnSpc>
+            <a:spcBef>
+              <a:spcPct val="0"/>
+            </a:spcBef>
+            <a:spcAft>
+              <a:spcPct val="35000"/>
+            </a:spcAft>
+            <a:buNone/>
+          </a:pPr>
+          <a:r>
+            <a:rPr lang="de-DE" sz="1400" b="1" i="0" kern="1200" dirty="0"/>
+            <a:t>115.988 </a:t>
+          </a:r>
+          <a:r>
+            <a:rPr lang="de-DE" sz="1400" b="1" i="0" kern="1200" dirty="0" err="1"/>
+            <a:t>samples</a:t>
+          </a:r>
+          <a:r>
+            <a:rPr lang="de-DE" sz="1400" b="1" i="0" kern="1200" dirty="0"/>
+            <a:t>:</a:t>
+          </a:r>
+          <a:r>
+            <a:rPr lang="de-DE" sz="1400" i="0" kern="1200" dirty="0"/>
+            <a:t>  ~1.4% </a:t>
+          </a:r>
+          <a:r>
+            <a:rPr lang="de-DE" sz="1400" i="0" kern="1200" dirty="0" err="1"/>
+            <a:t>fraud</a:t>
+          </a:r>
+          <a:endParaRPr lang="en-US" sz="1400" kern="1200" dirty="0"/>
+        </a:p>
+        <a:p>
+          <a:pPr marL="0" lvl="0" indent="0" algn="l" defTabSz="622300">
+            <a:lnSpc>
+              <a:spcPct val="100000"/>
+            </a:lnSpc>
+            <a:spcBef>
+              <a:spcPct val="0"/>
+            </a:spcBef>
+            <a:spcAft>
+              <a:spcPct val="35000"/>
+            </a:spcAft>
+            <a:buNone/>
+          </a:pPr>
+          <a:r>
+            <a:rPr lang="de-DE" sz="1400" i="0" kern="1200" dirty="0"/>
+            <a:t>147 </a:t>
+          </a:r>
+          <a:r>
+            <a:rPr lang="de-DE" sz="1400" i="0" kern="1200" dirty="0" err="1"/>
+            <a:t>columns</a:t>
+          </a:r>
+          <a:r>
+            <a:rPr lang="de-DE" sz="1400" i="0" kern="1200" dirty="0"/>
+            <a:t>: 144 are </a:t>
+          </a:r>
+          <a:r>
+            <a:rPr lang="de-DE" sz="1400" i="0" kern="1200" dirty="0" err="1"/>
+            <a:t>grouped</a:t>
+          </a:r>
+          <a:r>
+            <a:rPr lang="de-DE" sz="1400" i="0" kern="1200" dirty="0"/>
+            <a:t> </a:t>
+          </a:r>
+          <a:r>
+            <a:rPr lang="de-DE" sz="1400" i="0" kern="1200" dirty="0" err="1"/>
+            <a:t>into</a:t>
+          </a:r>
+          <a:r>
+            <a:rPr lang="de-DE" sz="1400" i="0" kern="1200" dirty="0"/>
+            <a:t> 6 </a:t>
+          </a:r>
+          <a:r>
+            <a:rPr lang="de-DE" sz="1400" i="0" kern="1200" dirty="0" err="1"/>
+            <a:t>categories</a:t>
+          </a:r>
+          <a:r>
+            <a:rPr lang="de-DE" sz="1400" i="0" kern="1200" dirty="0"/>
+            <a:t> </a:t>
+          </a:r>
+          <a:endParaRPr lang="en-US" sz="1400" kern="1200" dirty="0"/>
+        </a:p>
+      </dsp:txBody>
+      <dsp:txXfrm>
+        <a:off x="4768074" y="3983879"/>
+        <a:ext cx="1738229" cy="1593279"/>
+      </dsp:txXfrm>
+    </dsp:sp>
+  </dsp:spTree>
+</dsp:drawing>
+</file>
+
+<file path=ppt/diagrams/layout1.xml><?xml version="1.0" encoding="utf-8"?>
+<dgm:layoutDef xmlns:dgm="http://schemas.openxmlformats.org/drawingml/2006/diagram" xmlns:a="http://schemas.openxmlformats.org/drawingml/2006/main" uniqueId="urn:microsoft.com/office/officeart/2018/2/layout/IconVerticalSolidList">
+  <dgm:title val="Icon Vertical Solid List"/>
+  <dgm:desc val="Use to show a series of visuals from top to bottom with Level 1 or Level 1 and Level 2 text grouped in a shape. Works best with icons or small pictures with lengthier descriptions."/>
+  <dgm:catLst>
+    <dgm:cat type="icon" pri="500"/>
+  </dgm:catLst>
+  <dgm:sampData useDef="1">
+    <dgm:dataModel>
+      <dgm:ptLst/>
+      <dgm:bg/>
+      <dgm:whole/>
+    </dgm:dataModel>
+  </dgm:sampData>
+  <dgm:styleData useDef="1">
+    <dgm:dataModel>
+      <dgm:ptLst/>
+      <dgm:bg/>
+      <dgm:whole/>
+    </dgm:dataModel>
+  </dgm:styleData>
+  <dgm:clrData useDef="1">
+    <dgm:dataModel>
+      <dgm:ptLst/>
+      <dgm:bg/>
+      <dgm:whole/>
+    </dgm:dataModel>
+  </dgm:clrData>
+  <dgm:layoutNode name="root">
+    <dgm:varLst>
+      <dgm:dir/>
+      <dgm:resizeHandles val="exact"/>
+    </dgm:varLst>
+    <dgm:choose name="Name0">
+      <dgm:if name="Name1" axis="self" func="var" arg="dir" op="equ" val="norm">
+        <dgm:alg type="lin">
+          <dgm:param type="linDir" val="fromT"/>
+          <dgm:param type="nodeHorzAlign" val="l"/>
+        </dgm:alg>
+      </dgm:if>
+      <dgm:else name="Name2">
+        <dgm:alg type="lin">
+          <dgm:param type="linDir" val="fromT"/>
+          <dgm:param type="nodeHorzAlign" val="r"/>
+        </dgm:alg>
+      </dgm:else>
+    </dgm:choose>
+    <dgm:shape xmlns:r="http://schemas.openxmlformats.org/officeDocument/2006/relationships" r:blip="">
+      <dgm:adjLst/>
+    </dgm:shape>
+    <dgm:presOf/>
+    <dgm:choose name="Name3">
+      <dgm:if name="Name4" axis="ch" ptType="node" func="cnt" op="lte" val="3">
+        <dgm:constrLst>
+          <dgm:constr type="h" for="ch" forName="compNode" refType="h" fact="0.3"/>
+          <dgm:constr type="w" for="ch" forName="compNode" refType="w"/>
+          <dgm:constr type="h" for="ch" forName="sibTrans" refType="h" refFor="ch" refForName="compNode" fact="0.25"/>
+          <dgm:constr type="primFontSz" for="des" forName="parTx" val="25"/>
+          <dgm:constr type="primFontSz" for="des" forName="desTx" refType="primFontSz" refFor="des" refForName="parTx" op="lte" fact="0.75"/>
+          <dgm:constr type="h" for="des" forName="compNode" op="equ"/>
+          <dgm:constr type="h" for="des" forName="bgRect" op="equ"/>
+          <dgm:constr type="h" for="des" forName="iconRect" op="equ"/>
+          <dgm:constr type="w" for="des" forName="iconRect" op="equ"/>
+          <dgm:constr type="h" for="des" forName="spaceRect" op="equ"/>
+          <dgm:constr type="h" for="des" forName="parTx" op="equ"/>
+          <dgm:constr type="h" for="des" forName="desTx" op="equ"/>
+        </dgm:constrLst>
+      </dgm:if>
+      <dgm:if name="Name5" axis="ch" ptType="node" func="cnt" op="lte" val="4">
+        <dgm:constrLst>
+          <dgm:constr type="h" for="ch" forName="compNode" refType="h" fact="0.3"/>
+          <dgm:constr type="w" for="ch" forName="compNode" refType="w"/>
+          <dgm:constr type="h" for="ch" forName="sibTrans" refType="h" refFor="ch" refForName="compNode" fact="0.25"/>
+          <dgm:constr type="primFontSz" for="des" forName="parTx" val="22"/>
+          <dgm:constr type="primFontSz" for="des" forName="desTx" refType="primFontSz" refFor="des" refForName="parTx" op="lte" fact="0.75"/>
+          <dgm:constr type="h" for="des" forName="compNode" op="equ"/>
+          <dgm:constr type="h" for="des" forName="bgRect" op="equ"/>
+          <dgm:constr type="h" for="des" forName="iconRect" op="equ"/>
+          <dgm:constr type="w" for="des" forName="iconRect" op="equ"/>
+          <dgm:constr type="h" for="des" forName="spaceRect" op="equ"/>
+          <dgm:constr type="h" for="des" forName="parTx" op="equ"/>
+          <dgm:constr type="h" for="des" forName="desTx" op="equ"/>
+        </dgm:constrLst>
+      </dgm:if>
+      <dgm:if name="Name6" axis="ch" ptType="node" func="cnt" op="lte" val="6">
+        <dgm:constrLst>
+          <dgm:constr type="h" for="ch" forName="compNode" refType="h" fact="0.3"/>
+          <dgm:constr type="w" for="ch" forName="compNode" refType="w"/>
+          <dgm:constr type="h" for="ch" forName="sibTrans" refType="h" refFor="ch" refForName="compNode" fact="0.25"/>
+          <dgm:constr type="primFontSz" for="des" forName="parTx" val="19"/>
+          <dgm:constr type="primFontSz" for="des" forName="desTx" refType="primFontSz" refFor="des" refForName="parTx" op="lte" fact="0.75"/>
+          <dgm:constr type="h" for="des" forName="compNode" op="equ"/>
+          <dgm:constr type="h" for="des" forName="bgRect" op="equ"/>
+          <dgm:constr type="h" for="des" forName="iconRect" op="equ"/>
+          <dgm:constr type="w" for="des" forName="iconRect" op="equ"/>
+          <dgm:constr type="h" for="des" forName="spaceRect" op="equ"/>
+          <dgm:constr type="h" for="des" forName="parTx" op="equ"/>
+          <dgm:constr type="h" for="des" forName="desTx" op="equ"/>
+        </dgm:constrLst>
+      </dgm:if>
+      <dgm:else name="Name7">
+        <dgm:constrLst>
+          <dgm:constr type="h" for="ch" forName="compNode" refType="h" fact="0.3"/>
+          <dgm:constr type="w" for="ch" forName="compNode" refType="w"/>
+          <dgm:constr type="h" for="ch" forName="sibTrans" refType="h" refFor="ch" refForName="compNode" fact="0.25"/>
+          <dgm:constr type="primFontSz" for="des" forName="parTx" val="16"/>
+          <dgm:constr type="primFontSz" for="des" forName="desTx" refType="primFontSz" refFor="des" refForName="parTx" op="lte" fact="0.75"/>
+          <dgm:constr type="h" for="des" forName="compNode" op="equ"/>
+          <dgm:constr type="h" for="des" forName="bgRect" op="equ"/>
+          <dgm:constr type="h" for="des" forName="iconRect" op="equ"/>
+          <dgm:constr type="w" for="des" forName="iconRect" op="equ"/>
+          <dgm:constr type="h" for="des" forName="spaceRect" op="equ"/>
+          <dgm:constr type="h" for="des" forName="parTx" op="equ"/>
+          <dgm:constr type="h" for="des" forName="desTx" op="equ"/>
+        </dgm:constrLst>
+      </dgm:else>
+    </dgm:choose>
+    <dgm:ruleLst>
+      <dgm:rule type="h" for="ch" forName="compNode" val="0" fact="NaN" max="NaN"/>
+    </dgm:ruleLst>
+    <dgm:forEach name="Name8" axis="ch" ptType="node">
+      <dgm:layoutNode name="compNode">
+        <dgm:alg type="composite"/>
+        <dgm:shape xmlns:r="http://schemas.openxmlformats.org/officeDocument/2006/relationships" r:blip="">
+          <dgm:adjLst/>
+        </dgm:shape>
+        <dgm:presOf axis="self"/>
+        <dgm:choose name="Name9">
+          <dgm:if name="Name10" axis="ch" ptType="node" func="cnt" op="gte" val="1">
+            <dgm:constrLst>
+              <dgm:constr type="w" for="ch" forName="bgRect" refType="w"/>
+              <dgm:constr type="h" for="ch" forName="bgRect" refType="h"/>
+              <dgm:constr type="l" for="ch" forName="bgRect"/>
+              <dgm:constr type="t" for="ch" forName="bgRect"/>
+              <dgm:constr type="h" for="ch" forName="iconRect" refType="h" fact="0.55"/>
+              <dgm:constr type="w" for="ch" forName="iconRect" refType="h" refFor="ch" refForName="iconRect"/>
+              <dgm:constr type="l" for="ch" forName="iconRect" refType="h" refFor="ch" refForName="iconRect" fact="0.55"/>
+              <dgm:constr type="ctrY" for="ch" forName="iconRect" refType="ctrY" refFor="ch" refForName="bgRect"/>
+              <dgm:constr type="w" for="ch" forName="spaceRect" refType="l" refFor="ch" refForName="iconRect"/>
+              <dgm:constr type="h" for="ch" forName="spaceRect" refType="h"/>
+              <dgm:constr type="l" for="ch" forName="spaceRect" refType="r" refFor="ch" refForName="iconRect"/>
+              <dgm:constr type="t" for="ch" forName="spaceRect"/>
+              <dgm:constr type="w" for="ch" forName="parTx" refType="w" fact="0.45"/>
+              <dgm:constr type="h" for="ch" forName="parTx" refType="h"/>
+              <dgm:constr type="l" for="ch" forName="parTx" refType="r" refFor="ch" refForName="spaceRect"/>
+              <dgm:constr type="t" for="ch" forName="parTx"/>
+              <dgm:constr type="h" for="ch" forName="desTx" refType="h"/>
+              <dgm:constr type="l" for="ch" forName="desTx" refType="r" refFor="ch" refForName="parTx"/>
+              <dgm:constr type="t" for="ch" forName="desTx"/>
+            </dgm:constrLst>
+          </dgm:if>
+          <dgm:else name="Name11">
+            <dgm:constrLst>
+              <dgm:constr type="w" for="ch" forName="bgRect" refType="w"/>
+              <dgm:constr type="h" for="ch" forName="bgRect" refType="h"/>
+              <dgm:constr type="l" for="ch" forName="bgRect"/>
+              <dgm:constr type="t" for="ch" forName="bgRect"/>
+              <dgm:constr type="h" for="ch" forName="iconRect" refType="h" fact="0.55"/>
+              <dgm:constr type="w" for="ch" forName="iconRect" refType="h" refFor="ch" refForName="iconRect"/>
+              <dgm:constr type="l" for="ch" forName="iconRect" refType="h" refFor="ch" refForName="iconRect" fact="0.55"/>
+              <dgm:constr type="ctrY" for="ch" forName="iconRect" refType="ctrY" refFor="ch" refForName="bgRect"/>
+              <dgm:constr type="w" for="ch" forName="spaceRect" refType="l" refFor="ch" refForName="iconRect"/>
+              <dgm:constr type="h" for="ch" forName="spaceRect" refType="h"/>
+              <dgm:constr type="l" for="ch" forName="spaceRect" refType="r" refFor="ch" refForName="iconRect"/>
+              <dgm:constr type="t" for="ch" forName="spaceRect"/>
+              <dgm:constr type="h" for="ch" forName="parTx" refType="h"/>
+              <dgm:constr type="l" for="ch" forName="parTx" refType="r" refFor="ch" refForName="spaceRect"/>
+              <dgm:constr type="t" for="ch" forName="parTx"/>
+            </dgm:constrLst>
+          </dgm:else>
+        </dgm:choose>
+        <dgm:ruleLst>
+          <dgm:rule type="h" val="INF" fact="NaN" max="NaN"/>
+        </dgm:ruleLst>
+        <dgm:layoutNode name="bgRect" styleLbl="bgShp">
+          <dgm:alg type="sp"/>
+          <dgm:shape xmlns:r="http://schemas.openxmlformats.org/officeDocument/2006/relationships" type="roundRect" r:blip="">
+            <dgm:adjLst>
+              <dgm:adj idx="1" val="0.1"/>
+            </dgm:adjLst>
+          </dgm:shape>
+          <dgm:presOf/>
+          <dgm:constrLst/>
+          <dgm:ruleLst/>
+        </dgm:layoutNode>
+        <dgm:layoutNode name="iconRect" styleLbl="node1">
+          <dgm:alg type="sp"/>
+          <dgm:shape xmlns:r="http://schemas.openxmlformats.org/officeDocument/2006/relationships" type="rect" r:blip="" blipPhldr="1">
+            <dgm:adjLst/>
+          </dgm:shape>
+          <dgm:presOf/>
+          <dgm:constrLst/>
+          <dgm:ruleLst/>
+        </dgm:layoutNode>
+        <dgm:layoutNode name="spaceRect">
+          <dgm:alg type="sp"/>
+          <dgm:shape xmlns:r="http://schemas.openxmlformats.org/officeDocument/2006/relationships" r:blip="">
+            <dgm:adjLst/>
+          </dgm:shape>
+          <dgm:presOf/>
+          <dgm:constrLst/>
+          <dgm:ruleLst/>
+        </dgm:layoutNode>
+        <dgm:layoutNode name="parTx" styleLbl="revTx">
+          <dgm:varLst>
+            <dgm:chMax val="0"/>
+            <dgm:chPref val="0"/>
+          </dgm:varLst>
+          <dgm:alg type="tx">
+            <dgm:param type="txAnchorVert" val="mid"/>
+            <dgm:param type="parTxLTRAlign" val="l"/>
+            <dgm:param type="shpTxLTRAlignCh" val="l"/>
+            <dgm:param type="parTxRTLAlign" val="r"/>
+            <dgm:param type="shpTxRTLAlignCh" val="r"/>
+          </dgm:alg>
+          <dgm:shape xmlns:r="http://schemas.openxmlformats.org/officeDocument/2006/relationships" type="rect" r:blip="">
+            <dgm:adjLst/>
+          </dgm:shape>
+          <dgm:presOf axis="self" ptType="node"/>
+          <dgm:constrLst>
+            <dgm:constr type="lMarg" refType="h" fact="0.3"/>
+            <dgm:constr type="rMarg" refType="h" fact="0.3"/>
+            <dgm:constr type="tMarg" refType="h" fact="0.3"/>
+            <dgm:constr type="bMarg" refType="h" fact="0.3"/>
+          </dgm:constrLst>
+          <dgm:ruleLst>
+            <dgm:rule type="primFontSz" val="14" fact="NaN" max="NaN"/>
+            <dgm:rule type="h" val="INF" fact="NaN" max="NaN"/>
+          </dgm:ruleLst>
+        </dgm:layoutNode>
+        <dgm:choose name="Name12">
+          <dgm:if name="Name13" axis="ch" ptType="node" func="cnt" op="gte" val="1">
+            <dgm:layoutNode name="desTx" styleLbl="revTx">
+              <dgm:varLst/>
+              <dgm:alg type="tx">
+                <dgm:param type="txAnchorVertCh" val="mid"/>
+                <dgm:param type="parTxLTRAlign" val="l"/>
+                <dgm:param type="shpTxLTRAlignCh" val="l"/>
+                <dgm:param type="parTxRTLAlign" val="r"/>
+                <dgm:param type="shpTxRTLAlignCh" val="r"/>
+                <dgm:param type="stBulletLvl" val="0"/>
+              </dgm:alg>
+              <dgm:shape xmlns:r="http://schemas.openxmlformats.org/officeDocument/2006/relationships" type="rect" r:blip="">
+                <dgm:adjLst/>
+              </dgm:shape>
+              <dgm:presOf axis="des" ptType="node"/>
+              <dgm:constrLst>
+                <dgm:constr type="primFontSz" val="18"/>
+                <dgm:constr type="secFontSz" refType="primFontSz"/>
+                <dgm:constr type="lMarg" refType="h" fact="0.3"/>
+                <dgm:constr type="rMarg" refType="h" fact="0.3"/>
+                <dgm:constr type="tMarg" refType="h" fact="0.3"/>
+                <dgm:constr type="bMarg" refType="h" fact="0.3"/>
+              </dgm:constrLst>
+              <dgm:ruleLst>
+                <dgm:rule type="primFontSz" val="11" fact="NaN" max="NaN"/>
+              </dgm:ruleLst>
+            </dgm:layoutNode>
+          </dgm:if>
+          <dgm:else name="Name14"/>
+        </dgm:choose>
+      </dgm:layoutNode>
+      <dgm:forEach name="Name15" axis="followSib" ptType="sibTrans" cnt="1">
+        <dgm:layoutNode name="sibTrans">
+          <dgm:alg type="sp"/>
+          <dgm:shape xmlns:r="http://schemas.openxmlformats.org/officeDocument/2006/relationships" r:blip="">
+            <dgm:adjLst/>
+          </dgm:shape>
+          <dgm:presOf axis="self"/>
+          <dgm:constrLst/>
+          <dgm:ruleLst/>
+        </dgm:layoutNode>
+      </dgm:forEach>
+    </dgm:forEach>
+  </dgm:layoutNode>
+  <dgm:extLst>
+    <a:ext uri="{68A01E43-0DF5-4B5B-8FA6-DAF915123BFB}">
+      <dgm1612:lstStyle xmlns:dgm1612="http://schemas.microsoft.com/office/drawing/2016/12/diagram">
+        <a:lvl1pPr>
+          <a:lnSpc>
+            <a:spcPct val="100000"/>
+          </a:lnSpc>
+        </a:lvl1pPr>
+        <a:lvl2pPr>
+          <a:lnSpc>
+            <a:spcPct val="100000"/>
+          </a:lnSpc>
+        </a:lvl2pPr>
+      </dgm1612:lstStyle>
+    </a:ext>
+  </dgm:extLst>
+</dgm:layoutDef>
+</file>
+
+<file path=ppt/diagrams/quickStyle1.xml><?xml version="1.0" encoding="utf-8"?>
+<dgm:styleDef xmlns:dgm="http://schemas.openxmlformats.org/drawingml/2006/diagram" xmlns:a="http://schemas.openxmlformats.org/drawingml/2006/main" uniqueId="urn:microsoft.com/office/officeart/2005/8/quickstyle/simple1">
+  <dgm:title val=""/>
+  <dgm:desc val=""/>
+  <dgm:catLst>
+    <dgm:cat type="simple" pri="10100"/>
+  </dgm:catLst>
+  <dgm:scene3d>
+    <a:camera prst="orthographicFront"/>
+    <a:lightRig rig="threePt" dir="t"/>
+  </dgm:scene3d>
+  <dgm:styleLbl name="node0">
+    <dgm:scene3d>
+      <a:camera prst="orthographicFront"/>
+      <a:lightRig rig="threePt" dir="t"/>
+    </dgm:scene3d>
+    <dgm:sp3d/>
+    <dgm:txPr/>
+    <dgm:style>
+      <a:lnRef idx="2">
+        <a:scrgbClr r="0" g="0" b="0"/>
+      </a:lnRef>
+      <a:fillRef idx="1">
+        <a:scrgbClr r="0" g="0" b="0"/>
+      </a:fillRef>
+      <a:effectRef idx="0">
+        <a:scrgbClr r="0" g="0" b="0"/>
+      </a:effectRef>
+      <a:fontRef idx="minor">
+        <a:schemeClr val="lt1"/>
+      </a:fontRef>
+    </dgm:style>
+  </dgm:styleLbl>
+  <dgm:styleLbl name="lnNode1">
+    <dgm:scene3d>
+      <a:camera prst="orthographicFront"/>
+      <a:lightRig rig="threePt" dir="t"/>
+    </dgm:scene3d>
+    <dgm:sp3d/>
+    <dgm:txPr/>
+    <dgm:style>
+      <a:lnRef idx="2">
+        <a:scrgbClr r="0" g="0" b="0"/>
+      </a:lnRef>
+      <a:fillRef idx="1">
+        <a:scrgbClr r="0" g="0" b="0"/>
+      </a:fillRef>
+      <a:effectRef idx="0">
+        <a:scrgbClr r="0" g="0" b="0"/>
+      </a:effectRef>
+      <a:fontRef idx="minor">
+        <a:schemeClr val="lt1"/>
+      </a:fontRef>
+    </dgm:style>
+  </dgm:styleLbl>
+  <dgm:styleLbl name="vennNode1">
+    <dgm:scene3d>
+      <a:camera prst="orthographicFront"/>
+      <a:lightRig rig="threePt" dir="t"/>
+    </dgm:scene3d>
+    <dgm:sp3d/>
+    <dgm:txPr/>
+    <dgm:style>
+      <a:lnRef idx="2">
+        <a:scrgbClr r="0" g="0" b="0"/>
+      </a:lnRef>
+      <a:fillRef idx="1">
+        <a:scrgbClr r="0" g="0" b="0"/>
+      </a:fillRef>
+      <a:effectRef idx="0">
+        <a:scrgbClr r="0" g="0" b="0"/>
+      </a:effectRef>
+      <a:fontRef idx="minor">
+        <a:schemeClr val="tx1"/>
+      </a:fontRef>
+    </dgm:style>
+  </dgm:styleLbl>
+  <dgm:styleLbl name="alignNode1">
+    <dgm:scene3d>
+      <a:camera prst="orthographicFront"/>
+      <a:lightRig rig="threePt" dir="t"/>
+    </dgm:scene3d>
+    <dgm:sp3d/>
+    <dgm:txPr/>
+    <dgm:style>
+      <a:lnRef idx="2">
+        <a:scrgbClr r="0" g="0" b="0"/>
+      </a:lnRef>
+      <a:fillRef idx="1">
+        <a:scrgbClr r="0" g="0" b="0"/>
+      </a:fillRef>
+      <a:effectRef idx="0">
+        <a:scrgbClr r="0" g="0" b="0"/>
+      </a:effectRef>
+      <a:fontRef idx="minor">
+        <a:schemeClr val="lt1"/>
+      </a:fontRef>
+    </dgm:style>
+  </dgm:styleLbl>
+  <dgm:styleLbl name="node1">
+    <dgm:scene3d>
+      <a:camera prst="orthographicFront"/>
+      <a:lightRig rig="threePt" dir="t"/>
+    </dgm:scene3d>
+    <dgm:sp3d/>
+    <dgm:txPr/>
+    <dgm:style>
+      <a:lnRef idx="2">
+        <a:scrgbClr r="0" g="0" b="0"/>
+      </a:lnRef>
+      <a:fillRef idx="1">
+        <a:scrgbClr r="0" g="0" b="0"/>
+      </a:fillRef>
+      <a:effectRef idx="0">
+        <a:scrgbClr r="0" g="0" b="0"/>
+      </a:effectRef>
+      <a:fontRef idx="minor">
+        <a:schemeClr val="lt1"/>
+      </a:fontRef>
+    </dgm:style>
+  </dgm:styleLbl>
+  <dgm:styleLbl name="node2">
+    <dgm:scene3d>
+      <a:camera prst="orthographicFront"/>
+      <a:lightRig rig="threePt" dir="t"/>
+    </dgm:scene3d>
+    <dgm:sp3d/>
+    <dgm:txPr/>
+    <dgm:style>
+      <a:lnRef idx="2">
+        <a:scrgbClr r="0" g="0" b="0"/>
+      </a:lnRef>
+      <a:fillRef idx="1">
+        <a:scrgbClr r="0" g="0" b="0"/>
+      </a:fillRef>
+      <a:effectRef idx="0">
+        <a:scrgbClr r="0" g="0" b="0"/>
+      </a:effectRef>
+      <a:fontRef idx="minor">
+        <a:schemeClr val="lt1"/>
+      </a:fontRef>
+    </dgm:style>
+  </dgm:styleLbl>
+  <dgm:styleLbl name="node3">
+    <dgm:scene3d>
+      <a:camera prst="orthographicFront"/>
+      <a:lightRig rig="threePt" dir="t"/>
+    </dgm:scene3d>
+    <dgm:sp3d/>
+    <dgm:txPr/>
+    <dgm:style>
+      <a:lnRef idx="2">
+        <a:scrgbClr r="0" g="0" b="0"/>
+      </a:lnRef>
+      <a:fillRef idx="1">
+        <a:scrgbClr r="0" g="0" b="0"/>
+      </a:fillRef>
+      <a:effectRef idx="0">
+        <a:scrgbClr r="0" g="0" b="0"/>
+      </a:effectRef>
+      <a:fontRef idx="minor">
+        <a:schemeClr val="lt1"/>
+      </a:fontRef>
+    </dgm:style>
+  </dgm:styleLbl>
+  <dgm:styleLbl name="node4">
+    <dgm:scene3d>
+      <a:camera prst="orthographicFront"/>
+      <a:lightRig rig="threePt" dir="t"/>
+    </dgm:scene3d>
+    <dgm:sp3d/>
+    <dgm:txPr/>
+    <dgm:style>
+      <a:lnRef idx="2">
+        <a:scrgbClr r="0" g="0" b="0"/>
+      </a:lnRef>
+      <a:fillRef idx="1">
+        <a:scrgbClr r="0" g="0" b="0"/>
+      </a:fillRef>
+      <a:effectRef idx="0">
+        <a:scrgbClr r="0" g="0" b="0"/>
+      </a:effectRef>
+      <a:fontRef idx="minor">
+        <a:schemeClr val="lt1"/>
+      </a:fontRef>
+    </dgm:style>
+  </dgm:styleLbl>
+  <dgm:styleLbl name="fgImgPlace1">
+    <dgm:scene3d>
+      <a:camera prst="orthographicFront"/>
+      <a:lightRig rig="threePt" dir="t"/>
+    </dgm:scene3d>
+    <dgm:sp3d/>
+    <dgm:txPr/>
+    <dgm:style>
+      <a:lnRef idx="2">
+        <a:scrgbClr r="0" g="0" b="0"/>
+      </a:lnRef>
+      <a:fillRef idx="1">
+        <a:scrgbClr r="0" g="0" b="0"/>
+      </a:fillRef>
+      <a:effectRef idx="0">
+        <a:scrgbClr r="0" g="0" b="0"/>
+      </a:effectRef>
+      <a:fontRef idx="minor"/>
+    </dgm:style>
+  </dgm:styleLbl>
+  <dgm:styleLbl name="alignImgPlace1">
+    <dgm:scene3d>
+      <a:camera prst="orthographicFront"/>
+      <a:lightRig rig="threePt" dir="t"/>
+    </dgm:scene3d>
+    <dgm:sp3d/>
+    <dgm:txPr/>
+    <dgm:style>
+      <a:lnRef idx="2">
+        <a:scrgbClr r="0" g="0" b="0"/>
+      </a:lnRef>
+      <a:fillRef idx="1">
+        <a:scrgbClr r="0" g="0" b="0"/>
+      </a:fillRef>
+      <a:effectRef idx="0">
+        <a:scrgbClr r="0" g="0" b="0"/>
+      </a:effectRef>
+      <a:fontRef idx="minor"/>
+    </dgm:style>
+  </dgm:styleLbl>
+  <dgm:styleLbl name="bgImgPlace1">
+    <dgm:scene3d>
+      <a:camera prst="orthographicFront"/>
+      <a:lightRig rig="threePt" dir="t"/>
+    </dgm:scene3d>
+    <dgm:sp3d/>
+    <dgm:txPr/>
+    <dgm:style>
+      <a:lnRef idx="2">
+        <a:scrgbClr r="0" g="0" b="0"/>
+      </a:lnRef>
+      <a:fillRef idx="1">
+        <a:scrgbClr r="0" g="0" b="0"/>
+      </a:fillRef>
+      <a:effectRef idx="0">
+        <a:scrgbClr r="0" g="0" b="0"/>
+      </a:effectRef>
+      <a:fontRef idx="minor"/>
+    </dgm:style>
+  </dgm:styleLbl>
+  <dgm:styleLbl name="sibTrans2D1">
+    <dgm:scene3d>
+      <a:camera prst="orthographicFront"/>
+      <a:lightRig rig="threePt" dir="t"/>
+    </dgm:scene3d>
+    <dgm:sp3d/>
+    <dgm:txPr/>
+    <dgm:style>
+      <a:lnRef idx="0">
+        <a:scrgbClr r="0" g="0" b="0"/>
+      </a:lnRef>
+      <a:fillRef idx="1">
+        <a:scrgbClr r="0" g="0" b="0"/>
+      </a:fillRef>
+      <a:effectRef idx="0">
+        <a:scrgbClr r="0" g="0" b="0"/>
+      </a:effectRef>
+      <a:fontRef idx="minor">
+        <a:schemeClr val="lt1"/>
+      </a:fontRef>
+    </dgm:style>
+  </dgm:styleLbl>
+  <dgm:styleLbl name="fgSibTrans2D1">
+    <dgm:scene3d>
+      <a:camera prst="orthographicFront"/>
+      <a:lightRig rig="threePt" dir="t"/>
+    </dgm:scene3d>
+    <dgm:sp3d/>
+    <dgm:txPr/>
+    <dgm:style>
+      <a:lnRef idx="0">
+        <a:scrgbClr r="0" g="0" b="0"/>
+      </a:lnRef>
+      <a:fillRef idx="1">
+        <a:scrgbClr r="0" g="0" b="0"/>
+      </a:fillRef>
+      <a:effectRef idx="0">
+        <a:scrgbClr r="0" g="0" b="0"/>
+      </a:effectRef>
+      <a:fontRef idx="minor">
+        <a:schemeClr val="lt1"/>
+      </a:fontRef>
+    </dgm:style>
+  </dgm:styleLbl>
+  <dgm:styleLbl name="bgSibTrans2D1">
+    <dgm:scene3d>
+      <a:camera prst="orthographicFront"/>
+      <a:lightRig rig="threePt" dir="t"/>
+    </dgm:scene3d>
+    <dgm:sp3d/>
+    <dgm:txPr/>
+    <dgm:style>
+      <a:lnRef idx="0">
+        <a:scrgbClr r="0" g="0" b="0"/>
+      </a:lnRef>
+      <a:fillRef idx="1">
+        <a:scrgbClr r="0" g="0" b="0"/>
+      </a:fillRef>
+      <a:effectRef idx="0">
+        <a:scrgbClr r="0" g="0" b="0"/>
+      </a:effectRef>
+      <a:fontRef idx="minor">
+        <a:schemeClr val="lt1"/>
+      </a:fontRef>
+    </dgm:style>
+  </dgm:styleLbl>
+  <dgm:styleLbl name="sibTrans1D1">
+    <dgm:scene3d>
+      <a:camera prst="orthographicFront"/>
+      <a:lightRig rig="threePt" dir="t"/>
+    </dgm:scene3d>
+    <dgm:sp3d/>
+    <dgm:txPr/>
+    <dgm:style>
+      <a:lnRef idx="1">
+        <a:scrgbClr r="0" g="0" b="0"/>
+      </a:lnRef>
+      <a:fillRef idx="0">
+        <a:scrgbClr r="0" g="0" b="0"/>
+      </a:fillRef>
+      <a:effectRef idx="0">
+        <a:scrgbClr r="0" g="0" b="0"/>
+      </a:effectRef>
+      <a:fontRef idx="minor"/>
+    </dgm:style>
+  </dgm:styleLbl>
+  <dgm:styleLbl name="callout">
+    <dgm:scene3d>
+      <a:camera prst="orthographicFront"/>
+      <a:lightRig rig="threePt" dir="t"/>
+    </dgm:scene3d>
+    <dgm:sp3d/>
+    <dgm:txPr/>
+    <dgm:style>
+      <a:lnRef idx="2">
+        <a:scrgbClr r="0" g="0" b="0"/>
+      </a:lnRef>
+      <a:fillRef idx="1">
+        <a:scrgbClr r="0" g="0" b="0"/>
+      </a:fillRef>
+      <a:effectRef idx="0">
+        <a:scrgbClr r="0" g="0" b="0"/>
+      </a:effectRef>
+      <a:fontRef idx="minor"/>
+    </dgm:style>
+  </dgm:styleLbl>
+  <dgm:styleLbl name="asst0">
+    <dgm:scene3d>
+      <a:camera prst="orthographicFront"/>
+      <a:lightRig rig="threePt" dir="t"/>
+    </dgm:scene3d>
+    <dgm:sp3d/>
+    <dgm:txPr/>
+    <dgm:style>
+      <a:lnRef idx="2">
+        <a:scrgbClr r="0" g="0" b="0"/>
+      </a:lnRef>
+      <a:fillRef idx="1">
+        <a:scrgbClr r="0" g="0" b="0"/>
+      </a:fillRef>
+      <a:effectRef idx="0">
+        <a:scrgbClr r="0" g="0" b="0"/>
+      </a:effectRef>
+      <a:fontRef idx="minor">
+        <a:schemeClr val="lt1"/>
+      </a:fontRef>
+    </dgm:style>
+  </dgm:styleLbl>
+  <dgm:styleLbl name="asst1">
+    <dgm:scene3d>
+      <a:camera prst="orthographicFront"/>
+      <a:lightRig rig="threePt" dir="t"/>
+    </dgm:scene3d>
+    <dgm:sp3d/>
+    <dgm:txPr/>
+    <dgm:style>
+      <a:lnRef idx="2">
+        <a:scrgbClr r="0" g="0" b="0"/>
+      </a:lnRef>
+      <a:fillRef idx="1">
+        <a:scrgbClr r="0" g="0" b="0"/>
+      </a:fillRef>
+      <a:effectRef idx="0">
+        <a:scrgbClr r="0" g="0" b="0"/>
+      </a:effectRef>
+      <a:fontRef idx="minor">
+        <a:schemeClr val="lt1"/>
+      </a:fontRef>
+    </dgm:style>
+  </dgm:styleLbl>
+  <dgm:styleLbl name="asst2">
+    <dgm:scene3d>
+      <a:camera prst="orthographicFront"/>
+      <a:lightRig rig="threePt" dir="t"/>
+    </dgm:scene3d>
+    <dgm:sp3d/>
+    <dgm:txPr/>
+    <dgm:style>
+      <a:lnRef idx="2">
+        <a:scrgbClr r="0" g="0" b="0"/>
+      </a:lnRef>
+      <a:fillRef idx="1">
+        <a:scrgbClr r="0" g="0" b="0"/>
+      </a:fillRef>
+      <a:effectRef idx="0">
+        <a:scrgbClr r="0" g="0" b="0"/>
+      </a:effectRef>
+      <a:fontRef idx="minor">
+        <a:schemeClr val="lt1"/>
+      </a:fontRef>
+    </dgm:style>
+  </dgm:styleLbl>
+  <dgm:styleLbl name="asst3">
+    <dgm:scene3d>
+      <a:camera prst="orthographicFront"/>
+      <a:lightRig rig="threePt" dir="t"/>
+    </dgm:scene3d>
+    <dgm:sp3d/>
+    <dgm:txPr/>
+    <dgm:style>
+      <a:lnRef idx="2">
+        <a:scrgbClr r="0" g="0" b="0"/>
+      </a:lnRef>
+      <a:fillRef idx="1">
+        <a:scrgbClr r="0" g="0" b="0"/>
+      </a:fillRef>
+      <a:effectRef idx="0">
+        <a:scrgbClr r="0" g="0" b="0"/>
+      </a:effectRef>
+      <a:fontRef idx="minor">
+        <a:schemeClr val="lt1"/>
+      </a:fontRef>
+    </dgm:style>
+  </dgm:styleLbl>
+  <dgm:styleLbl name="asst4">
+    <dgm:scene3d>
+      <a:camera prst="orthographicFront"/>
+      <a:lightRig rig="threePt" dir="t"/>
+    </dgm:scene3d>
+    <dgm:sp3d/>
+    <dgm:txPr/>
+    <dgm:style>
+      <a:lnRef idx="2">
+        <a:scrgbClr r="0" g="0" b="0"/>
+      </a:lnRef>
+      <a:fillRef idx="1">
+        <a:scrgbClr r="0" g="0" b="0"/>
+      </a:fillRef>
+      <a:effectRef idx="0">
+        <a:scrgbClr r="0" g="0" b="0"/>
+      </a:effectRef>
+      <a:fontRef idx="minor">
+        <a:schemeClr val="lt1"/>
+      </a:fontRef>
+    </dgm:style>
+  </dgm:styleLbl>
+  <dgm:styleLbl name="parChTrans2D1">
+    <dgm:scene3d>
+      <a:camera prst="orthographicFront"/>
+      <a:lightRig rig="threePt" dir="t"/>
+    </dgm:scene3d>
+    <dgm:sp3d/>
+    <dgm:txPr/>
+    <dgm:style>
+      <a:lnRef idx="2">
+        <a:scrgbClr r="0" g="0" b="0"/>
+      </a:lnRef>
+      <a:fillRef idx="1">
+        <a:scrgbClr r="0" g="0" b="0"/>
+      </a:fillRef>
+      <a:effectRef idx="0">
+        <a:scrgbClr r="0" g="0" b="0"/>
+      </a:effectRef>
+      <a:fontRef idx="minor">
+        <a:schemeClr val="lt1"/>
+      </a:fontRef>
+    </dgm:style>
+  </dgm:styleLbl>
+  <dgm:styleLbl name="parChTrans2D2">
+    <dgm:scene3d>
+      <a:camera prst="orthographicFront"/>
+      <a:lightRig rig="threePt" dir="t"/>
+    </dgm:scene3d>
+    <dgm:sp3d/>
+    <dgm:txPr/>
+    <dgm:style>
+      <a:lnRef idx="2">
+        <a:scrgbClr r="0" g="0" b="0"/>
+      </a:lnRef>
+      <a:fillRef idx="1">
+        <a:scrgbClr r="0" g="0" b="0"/>
+      </a:fillRef>
+      <a:effectRef idx="0">
+        <a:scrgbClr r="0" g="0" b="0"/>
+      </a:effectRef>
+      <a:fontRef idx="minor">
+        <a:schemeClr val="lt1"/>
+      </a:fontRef>
+    </dgm:style>
+  </dgm:styleLbl>
+  <dgm:styleLbl name="parChTrans2D3">
+    <dgm:scene3d>
+      <a:camera prst="orthographicFront"/>
+      <a:lightRig rig="threePt" dir="t"/>
+    </dgm:scene3d>
+    <dgm:sp3d/>
+    <dgm:txPr/>
+    <dgm:style>
+      <a:lnRef idx="2">
+        <a:scrgbClr r="0" g="0" b="0"/>
+      </a:lnRef>
+      <a:fillRef idx="1">
+        <a:scrgbClr r="0" g="0" b="0"/>
+      </a:fillRef>
+      <a:effectRef idx="0">
+        <a:scrgbClr r="0" g="0" b="0"/>
+      </a:effectRef>
+      <a:fontRef idx="minor">
+        <a:schemeClr val="lt1"/>
+      </a:fontRef>
+    </dgm:style>
+  </dgm:styleLbl>
+  <dgm:styleLbl name="parChTrans2D4">
+    <dgm:scene3d>
+      <a:camera prst="orthographicFront"/>
+      <a:lightRig rig="threePt" dir="t"/>
+    </dgm:scene3d>
+    <dgm:sp3d/>
+    <dgm:txPr/>
+    <dgm:style>
+      <a:lnRef idx="2">
+        <a:scrgbClr r="0" g="0" b="0"/>
+      </a:lnRef>
+      <a:fillRef idx="1">
+        <a:scrgbClr r="0" g="0" b="0"/>
+      </a:fillRef>
+      <a:effectRef idx="0">
+        <a:scrgbClr r="0" g="0" b="0"/>
+      </a:effectRef>
+      <a:fontRef idx="minor">
+        <a:schemeClr val="lt1"/>
+      </a:fontRef>
+    </dgm:style>
+  </dgm:styleLbl>
+  <dgm:styleLbl name="parChTrans1D1">
+    <dgm:scene3d>
+      <a:camera prst="orthographicFront"/>
+      <a:lightRig rig="threePt" dir="t"/>
+    </dgm:scene3d>
+    <dgm:sp3d/>
+    <dgm:txPr/>
+    <dgm:style>
+      <a:lnRef idx="2">
+        <a:scrgbClr r="0" g="0" b="0"/>
+      </a:lnRef>
+      <a:fillRef idx="0">
+        <a:scrgbClr r="0" g="0" b="0"/>
+      </a:fillRef>
+      <a:effectRef idx="0">
+        <a:scrgbClr r="0" g="0" b="0"/>
+      </a:effectRef>
+      <a:fontRef idx="minor"/>
+    </dgm:style>
+  </dgm:styleLbl>
+  <dgm:styleLbl name="parChTrans1D2">
+    <dgm:scene3d>
+      <a:camera prst="orthographicFront"/>
+      <a:lightRig rig="threePt" dir="t"/>
+    </dgm:scene3d>
+    <dgm:sp3d/>
+    <dgm:txPr/>
+    <dgm:style>
+      <a:lnRef idx="2">
+        <a:scrgbClr r="0" g="0" b="0"/>
+      </a:lnRef>
+      <a:fillRef idx="0">
+        <a:scrgbClr r="0" g="0" b="0"/>
+      </a:fillRef>
+      <a:effectRef idx="0">
+        <a:scrgbClr r="0" g="0" b="0"/>
+      </a:effectRef>
+      <a:fontRef idx="minor"/>
+    </dgm:style>
+  </dgm:styleLbl>
+  <dgm:styleLbl name="parChTrans1D3">
+    <dgm:scene3d>
+      <a:camera prst="orthographicFront"/>
+      <a:lightRig rig="threePt" dir="t"/>
+    </dgm:scene3d>
+    <dgm:sp3d/>
+    <dgm:txPr/>
+    <dgm:style>
+      <a:lnRef idx="2">
+        <a:scrgbClr r="0" g="0" b="0"/>
+      </a:lnRef>
+      <a:fillRef idx="0">
+        <a:scrgbClr r="0" g="0" b="0"/>
+      </a:fillRef>
+      <a:effectRef idx="0">
+        <a:scrgbClr r="0" g="0" b="0"/>
+      </a:effectRef>
+      <a:fontRef idx="minor"/>
+    </dgm:style>
+  </dgm:styleLbl>
+  <dgm:styleLbl name="parChTrans1D4">
+    <dgm:scene3d>
+      <a:camera prst="orthographicFront"/>
+      <a:lightRig rig="threePt" dir="t"/>
+    </dgm:scene3d>
+    <dgm:sp3d/>
+    <dgm:txPr/>
+    <dgm:style>
+      <a:lnRef idx="2">
+        <a:scrgbClr r="0" g="0" b="0"/>
+      </a:lnRef>
+      <a:fillRef idx="0">
+        <a:scrgbClr r="0" g="0" b="0"/>
+      </a:fillRef>
+      <a:effectRef idx="0">
+        <a:scrgbClr r="0" g="0" b="0"/>
+      </a:effectRef>
+      <a:fontRef idx="minor"/>
+    </dgm:style>
+  </dgm:styleLbl>
+  <dgm:styleLbl name="fgAcc1">
+    <dgm:scene3d>
+      <a:camera prst="orthographicFront"/>
+      <a:lightRig rig="threePt" dir="t"/>
+    </dgm:scene3d>
+    <dgm:sp3d/>
+    <dgm:txPr/>
+    <dgm:style>
+      <a:lnRef idx="2">
+        <a:scrgbClr r="0" g="0" b="0"/>
+      </a:lnRef>
+      <a:fillRef idx="1">
+        <a:scrgbClr r="0" g="0" b="0"/>
+      </a:fillRef>
+      <a:effectRef idx="0">
+        <a:scrgbClr r="0" g="0" b="0"/>
+      </a:effectRef>
+      <a:fontRef idx="minor"/>
+    </dgm:style>
+  </dgm:styleLbl>
+  <dgm:styleLbl name="conFgAcc1">
+    <dgm:scene3d>
+      <a:camera prst="orthographicFront"/>
+      <a:lightRig rig="threePt" dir="t"/>
+    </dgm:scene3d>
+    <dgm:sp3d/>
+    <dgm:txPr/>
+    <dgm:style>
+      <a:lnRef idx="2">
+        <a:scrgbClr r="0" g="0" b="0"/>
+      </a:lnRef>
+      <a:fillRef idx="1">
+        <a:scrgbClr r="0" g="0" b="0"/>
+      </a:fillRef>
+      <a:effectRef idx="0">
+        <a:scrgbClr r="0" g="0" b="0"/>
+      </a:effectRef>
+      <a:fontRef idx="minor"/>
+    </dgm:style>
+  </dgm:styleLbl>
+  <dgm:styleLbl name="alignAcc1">
+    <dgm:scene3d>
+      <a:camera prst="orthographicFront"/>
+      <a:lightRig rig="threePt" dir="t"/>
+    </dgm:scene3d>
+    <dgm:sp3d/>
+    <dgm:txPr/>
+    <dgm:style>
+      <a:lnRef idx="2">
+        <a:scrgbClr r="0" g="0" b="0"/>
+      </a:lnRef>
+      <a:fillRef idx="1">
+        <a:scrgbClr r="0" g="0" b="0"/>
+      </a:fillRef>
+      <a:effectRef idx="0">
+        <a:scrgbClr r="0" g="0" b="0"/>
+      </a:effectRef>
+      <a:fontRef idx="minor"/>
+    </dgm:style>
+  </dgm:styleLbl>
+  <dgm:styleLbl name="trAlignAcc1">
+    <dgm:scene3d>
+      <a:camera prst="orthographicFront"/>
+      <a:lightRig rig="threePt" dir="t"/>
+    </dgm:scene3d>
+    <dgm:sp3d/>
+    <dgm:txPr/>
+    <dgm:style>
+      <a:lnRef idx="1">
+        <a:scrgbClr r="0" g="0" b="0"/>
+      </a:lnRef>
+      <a:fillRef idx="1">
+        <a:scrgbClr r="0" g="0" b="0"/>
+      </a:fillRef>
+      <a:effectRef idx="0">
+        <a:scrgbClr r="0" g="0" b="0"/>
+      </a:effectRef>
+      <a:fontRef idx="minor"/>
+    </dgm:style>
+  </dgm:styleLbl>
+  <dgm:styleLbl name="bgAcc1">
+    <dgm:scene3d>
+      <a:camera prst="orthographicFront"/>
+      <a:lightRig rig="threePt" dir="t"/>
+    </dgm:scene3d>
+    <dgm:sp3d/>
+    <dgm:txPr/>
+    <dgm:style>
+      <a:lnRef idx="2">
+        <a:scrgbClr r="0" g="0" b="0"/>
+      </a:lnRef>
+      <a:fillRef idx="1">
+        <a:scrgbClr r="0" g="0" b="0"/>
+      </a:fillRef>
+      <a:effectRef idx="0">
+        <a:scrgbClr r="0" g="0" b="0"/>
+      </a:effectRef>
+      <a:fontRef idx="minor"/>
+    </dgm:style>
+  </dgm:styleLbl>
+  <dgm:styleLbl name="solidFgAcc1">
+    <dgm:scene3d>
+      <a:camera prst="orthographicFront"/>
+      <a:lightRig rig="threePt" dir="t"/>
+    </dgm:scene3d>
+    <dgm:sp3d/>
+    <dgm:txPr/>
+    <dgm:style>
+      <a:lnRef idx="2">
+        <a:scrgbClr r="0" g="0" b="0"/>
+      </a:lnRef>
+      <a:fillRef idx="1">
+        <a:scrgbClr r="0" g="0" b="0"/>
+      </a:fillRef>
+      <a:effectRef idx="0">
+        <a:scrgbClr r="0" g="0" b="0"/>
+      </a:effectRef>
+      <a:fontRef idx="minor"/>
+    </dgm:style>
+  </dgm:styleLbl>
+  <dgm:styleLbl name="solidAlignAcc1">
+    <dgm:scene3d>
+      <a:camera prst="orthographicFront"/>
+      <a:lightRig rig="threePt" dir="t"/>
+    </dgm:scene3d>
+    <dgm:sp3d/>
+    <dgm:txPr/>
+    <dgm:style>
+      <a:lnRef idx="2">
+        <a:scrgbClr r="0" g="0" b="0"/>
+      </a:lnRef>
+      <a:fillRef idx="1">
+        <a:scrgbClr r="0" g="0" b="0"/>
+      </a:fillRef>
+      <a:effectRef idx="0">
+        <a:scrgbClr r="0" g="0" b="0"/>
+      </a:effectRef>
+      <a:fontRef idx="minor"/>
+    </dgm:style>
+  </dgm:styleLbl>
+  <dgm:styleLbl name="solidBgAcc1">
+    <dgm:scene3d>
+      <a:camera prst="orthographicFront"/>
+      <a:lightRig rig="threePt" dir="t"/>
+    </dgm:scene3d>
+    <dgm:sp3d/>
+    <dgm:txPr/>
+    <dgm:style>
+      <a:lnRef idx="2">
+        <a:scrgbClr r="0" g="0" b="0"/>
+      </a:lnRef>
+      <a:fillRef idx="1">
+        <a:scrgbClr r="0" g="0" b="0"/>
+      </a:fillRef>
+      <a:effectRef idx="0">
+        <a:scrgbClr r="0" g="0" b="0"/>
+      </a:effectRef>
+      <a:fontRef idx="minor"/>
+    </dgm:style>
+  </dgm:styleLbl>
+  <dgm:styleLbl name="fgAccFollowNode1">
+    <dgm:scene3d>
+      <a:camera prst="orthographicFront"/>
+      <a:lightRig rig="threePt" dir="t"/>
+    </dgm:scene3d>
+    <dgm:sp3d/>
+    <dgm:txPr/>
+    <dgm:style>
+      <a:lnRef idx="2">
+        <a:scrgbClr r="0" g="0" b="0"/>
+      </a:lnRef>
+      <a:fillRef idx="1">
+        <a:scrgbClr r="0" g="0" b="0"/>
+      </a:fillRef>
+      <a:effectRef idx="0">
+        <a:scrgbClr r="0" g="0" b="0"/>
+      </a:effectRef>
+      <a:fontRef idx="minor"/>
+    </dgm:style>
+  </dgm:styleLbl>
+  <dgm:styleLbl name="alignAccFollowNode1">
+    <dgm:scene3d>
+      <a:camera prst="orthographicFront"/>
+      <a:lightRig rig="threePt" dir="t"/>
+    </dgm:scene3d>
+    <dgm:sp3d/>
+    <dgm:txPr/>
+    <dgm:style>
+      <a:lnRef idx="2">
+        <a:scrgbClr r="0" g="0" b="0"/>
+      </a:lnRef>
+      <a:fillRef idx="1">
+        <a:scrgbClr r="0" g="0" b="0"/>
+      </a:fillRef>
+      <a:effectRef idx="0">
+        <a:scrgbClr r="0" g="0" b="0"/>
+      </a:effectRef>
+      <a:fontRef idx="minor"/>
+    </dgm:style>
+  </dgm:styleLbl>
+  <dgm:styleLbl name="bgAccFollowNode1">
+    <dgm:scene3d>
+      <a:camera prst="orthographicFront"/>
+      <a:lightRig rig="threePt" dir="t"/>
+    </dgm:scene3d>
+    <dgm:sp3d/>
+    <dgm:txPr/>
+    <dgm:style>
+      <a:lnRef idx="2">
+        <a:scrgbClr r="0" g="0" b="0"/>
+      </a:lnRef>
+      <a:fillRef idx="1">
+        <a:scrgbClr r="0" g="0" b="0"/>
+      </a:fillRef>
+      <a:effectRef idx="0">
+        <a:scrgbClr r="0" g="0" b="0"/>
+      </a:effectRef>
+      <a:fontRef idx="minor"/>
+    </dgm:style>
+  </dgm:styleLbl>
+  <dgm:styleLbl name="fgAcc0">
+    <dgm:scene3d>
+      <a:camera prst="orthographicFront"/>
+      <a:lightRig rig="threePt" dir="t"/>
+    </dgm:scene3d>
+    <dgm:sp3d/>
+    <dgm:txPr/>
+    <dgm:style>
+      <a:lnRef idx="2">
+        <a:scrgbClr r="0" g="0" b="0"/>
+      </a:lnRef>
+      <a:fillRef idx="1">
+        <a:scrgbClr r="0" g="0" b="0"/>
+      </a:fillRef>
+      <a:effectRef idx="0">
+        <a:scrgbClr r="0" g="0" b="0"/>
+      </a:effectRef>
+      <a:fontRef idx="minor"/>
+    </dgm:style>
+  </dgm:styleLbl>
+  <dgm:styleLbl name="fgAcc2">
+    <dgm:scene3d>
+      <a:camera prst="orthographicFront"/>
+      <a:lightRig rig="threePt" dir="t"/>
+    </dgm:scene3d>
+    <dgm:sp3d/>
+    <dgm:txPr/>
+    <dgm:style>
+      <a:lnRef idx="2">
+        <a:scrgbClr r="0" g="0" b="0"/>
+      </a:lnRef>
+      <a:fillRef idx="1">
+        <a:scrgbClr r="0" g="0" b="0"/>
+      </a:fillRef>
+      <a:effectRef idx="0">
+        <a:scrgbClr r="0" g="0" b="0"/>
+      </a:effectRef>
+      <a:fontRef idx="minor"/>
+    </dgm:style>
+  </dgm:styleLbl>
+  <dgm:styleLbl name="fgAcc3">
+    <dgm:scene3d>
+      <a:camera prst="orthographicFront"/>
+      <a:lightRig rig="threePt" dir="t"/>
+    </dgm:scene3d>
+    <dgm:sp3d/>
+    <dgm:txPr/>
+    <dgm:style>
+      <a:lnRef idx="2">
+        <a:scrgbClr r="0" g="0" b="0"/>
+      </a:lnRef>
+      <a:fillRef idx="1">
+        <a:scrgbClr r="0" g="0" b="0"/>
+      </a:fillRef>
+      <a:effectRef idx="0">
+        <a:scrgbClr r="0" g="0" b="0"/>
+      </a:effectRef>
+      <a:fontRef idx="minor"/>
+    </dgm:style>
+  </dgm:styleLbl>
+  <dgm:styleLbl name="fgAcc4">
+    <dgm:scene3d>
+      <a:camera prst="orthographicFront"/>
+      <a:lightRig rig="threePt" dir="t"/>
+    </dgm:scene3d>
+    <dgm:sp3d/>
+    <dgm:txPr/>
+    <dgm:style>
+      <a:lnRef idx="2">
+        <a:scrgbClr r="0" g="0" b="0"/>
+      </a:lnRef>
+      <a:fillRef idx="1">
+        <a:scrgbClr r="0" g="0" b="0"/>
+      </a:fillRef>
+      <a:effectRef idx="0">
+        <a:scrgbClr r="0" g="0" b="0"/>
+      </a:effectRef>
+      <a:fontRef idx="minor"/>
+    </dgm:style>
+  </dgm:styleLbl>
+  <dgm:styleLbl name="bgShp">
+    <dgm:scene3d>
+      <a:camera prst="orthographicFront"/>
+      <a:lightRig rig="threePt" dir="t"/>
+    </dgm:scene3d>
+    <dgm:sp3d/>
+    <dgm:txPr/>
+    <dgm:style>
+      <a:lnRef idx="0">
+        <a:scrgbClr r="0" g="0" b="0"/>
+      </a:lnRef>
+      <a:fillRef idx="1">
+        <a:scrgbClr r="0" g="0" b="0"/>
+      </a:fillRef>
+      <a:effectRef idx="0">
+        <a:scrgbClr r="0" g="0" b="0"/>
+      </a:effectRef>
+      <a:fontRef idx="minor"/>
+    </dgm:style>
+  </dgm:styleLbl>
+  <dgm:styleLbl name="dkBgShp">
+    <dgm:scene3d>
+      <a:camera prst="orthographicFront"/>
+      <a:lightRig rig="threePt" dir="t"/>
+    </dgm:scene3d>
+    <dgm:sp3d/>
+    <dgm:txPr/>
+    <dgm:style>
+      <a:lnRef idx="0">
+        <a:scrgbClr r="0" g="0" b="0"/>
+      </a:lnRef>
+      <a:fillRef idx="1">
+        <a:scrgbClr r="0" g="0" b="0"/>
+      </a:fillRef>
+      <a:effectRef idx="0">
+        <a:scrgbClr r="0" g="0" b="0"/>
+      </a:effectRef>
+      <a:fontRef idx="minor"/>
+    </dgm:style>
+  </dgm:styleLbl>
+  <dgm:styleLbl name="trBgShp">
+    <dgm:scene3d>
+      <a:camera prst="orthographicFront"/>
+      <a:lightRig rig="threePt" dir="t"/>
+    </dgm:scene3d>
+    <dgm:sp3d/>
+    <dgm:txPr/>
+    <dgm:style>
+      <a:lnRef idx="0">
+        <a:scrgbClr r="0" g="0" b="0"/>
+      </a:lnRef>
+      <a:fillRef idx="1">
+        <a:scrgbClr r="0" g="0" b="0"/>
+      </a:fillRef>
+      <a:effectRef idx="0">
+        <a:scrgbClr r="0" g="0" b="0"/>
+      </a:effectRef>
+      <a:fontRef idx="minor"/>
+    </dgm:style>
+  </dgm:styleLbl>
+  <dgm:styleLbl name="fgShp">
+    <dgm:scene3d>
+      <a:camera prst="orthographicFront"/>
+      <a:lightRig rig="threePt" dir="t"/>
+    </dgm:scene3d>
+    <dgm:sp3d/>
+    <dgm:txPr/>
+    <dgm:style>
+      <a:lnRef idx="2">
+        <a:scrgbClr r="0" g="0" b="0"/>
+      </a:lnRef>
+      <a:fillRef idx="1">
+        <a:scrgbClr r="0" g="0" b="0"/>
+      </a:fillRef>
+      <a:effectRef idx="0">
+        <a:scrgbClr r="0" g="0" b="0"/>
+      </a:effectRef>
+      <a:fontRef idx="minor"/>
+    </dgm:style>
+  </dgm:styleLbl>
+  <dgm:styleLbl name="revTx">
+    <dgm:scene3d>
+      <a:camera prst="orthographicFront"/>
+      <a:lightRig rig="threePt" dir="t"/>
+    </dgm:scene3d>
+    <dgm:sp3d/>
+    <dgm:txPr/>
+    <dgm:style>
+      <a:lnRef idx="0">
+        <a:scrgbClr r="0" g="0" b="0"/>
+      </a:lnRef>
+      <a:fillRef idx="0">
+        <a:scrgbClr r="0" g="0" b="0"/>
+      </a:fillRef>
+      <a:effectRef idx="0">
+        <a:scrgbClr r="0" g="0" b="0"/>
+      </a:effectRef>
+      <a:fontRef idx="minor"/>
+    </dgm:style>
+  </dgm:styleLbl>
+</dgm:styleDef>
+</file>
+
 <file path=ppt/slideLayouts/slideLayout1.xml><?xml version="1.0" encoding="utf-8"?>
 <p:sldLayout xmlns:a="http://schemas.openxmlformats.org/drawingml/2006/main" xmlns:r="http://schemas.openxmlformats.org/officeDocument/2006/relationships" xmlns:p="http://schemas.openxmlformats.org/presentationml/2006/main" showMasterSp="0" type="title" preserve="1">
   <p:cSld name="Titelfolie">
@@ -1187,7 +4864,7 @@
               <a:rPr lang="de-DE"/>
               <a:t>Mastertitelformat bearbeiten</a:t>
             </a:r>
-            <a:endParaRPr lang="en-US" dirty="0"/>
+            <a:endParaRPr lang="en-US"/>
           </a:p>
         </p:txBody>
       </p:sp>
@@ -1263,7 +4940,7 @@
               <a:rPr lang="de-DE"/>
               <a:t>Master-Untertitelformat bearbeiten</a:t>
             </a:r>
-            <a:endParaRPr lang="en-US" dirty="0"/>
+            <a:endParaRPr lang="en-US"/>
           </a:p>
         </p:txBody>
       </p:sp>
@@ -1297,7 +4974,7 @@
           <a:p>
             <a:fld id="{C98380DB-4D18-4E8E-ABC4-18847E13405E}" type="datetimeFigureOut">
               <a:rPr lang="de-DE" smtClean="0"/>
-              <a:t>17.06.2026</a:t>
+              <a:t>25.06.2026</a:t>
             </a:fld>
             <a:endParaRPr lang="de-DE"/>
           </a:p>
@@ -1563,7 +5240,7 @@
               <a:rPr lang="de-DE"/>
               <a:t>Mastertitelformat bearbeiten</a:t>
             </a:r>
-            <a:endParaRPr lang="en-US" dirty="0"/>
+            <a:endParaRPr lang="en-US"/>
           </a:p>
         </p:txBody>
       </p:sp>
@@ -1620,7 +5297,7 @@
               <a:rPr lang="de-DE"/>
               <a:t>Fünfte Ebene</a:t>
             </a:r>
-            <a:endParaRPr lang="en-US" dirty="0"/>
+            <a:endParaRPr lang="en-US"/>
           </a:p>
         </p:txBody>
       </p:sp>
@@ -1641,7 +5318,7 @@
           <a:p>
             <a:fld id="{C98380DB-4D18-4E8E-ABC4-18847E13405E}" type="datetimeFigureOut">
               <a:rPr lang="de-DE" smtClean="0"/>
-              <a:t>17.06.2026</a:t>
+              <a:t>25.06.2026</a:t>
             </a:fld>
             <a:endParaRPr lang="de-DE"/>
           </a:p>
@@ -1743,7 +5420,7 @@
               <a:rPr lang="de-DE"/>
               <a:t>Mastertitelformat bearbeiten</a:t>
             </a:r>
-            <a:endParaRPr lang="en-US" dirty="0"/>
+            <a:endParaRPr lang="en-US"/>
           </a:p>
         </p:txBody>
       </p:sp>
@@ -1800,7 +5477,7 @@
               <a:rPr lang="de-DE"/>
               <a:t>Fünfte Ebene</a:t>
             </a:r>
-            <a:endParaRPr lang="en-US" dirty="0"/>
+            <a:endParaRPr lang="en-US"/>
           </a:p>
         </p:txBody>
       </p:sp>
@@ -1821,7 +5498,7 @@
           <a:p>
             <a:fld id="{C98380DB-4D18-4E8E-ABC4-18847E13405E}" type="datetimeFigureOut">
               <a:rPr lang="de-DE" smtClean="0"/>
-              <a:t>17.06.2026</a:t>
+              <a:t>25.06.2026</a:t>
             </a:fld>
             <a:endParaRPr lang="de-DE"/>
           </a:p>
@@ -1918,7 +5595,7 @@
               <a:rPr lang="de-DE"/>
               <a:t>Mastertitelformat bearbeiten</a:t>
             </a:r>
-            <a:endParaRPr lang="en-US" dirty="0"/>
+            <a:endParaRPr lang="en-US"/>
           </a:p>
         </p:txBody>
       </p:sp>
@@ -1970,7 +5647,7 @@
               <a:rPr lang="de-DE"/>
               <a:t>Fünfte Ebene</a:t>
             </a:r>
-            <a:endParaRPr lang="en-US" dirty="0"/>
+            <a:endParaRPr lang="en-US"/>
           </a:p>
         </p:txBody>
       </p:sp>
@@ -1991,7 +5668,7 @@
           <a:p>
             <a:fld id="{C98380DB-4D18-4E8E-ABC4-18847E13405E}" type="datetimeFigureOut">
               <a:rPr lang="de-DE" smtClean="0"/>
-              <a:t>17.06.2026</a:t>
+              <a:t>25.06.2026</a:t>
             </a:fld>
             <a:endParaRPr lang="de-DE"/>
           </a:p>
@@ -2108,7 +5785,7 @@
               <a:rPr lang="de-DE"/>
               <a:t>Mastertitelformat bearbeiten</a:t>
             </a:r>
-            <a:endParaRPr lang="en-US" dirty="0"/>
+            <a:endParaRPr lang="en-US"/>
           </a:p>
         </p:txBody>
       </p:sp>
@@ -2268,7 +5945,7 @@
           <a:p>
             <a:fld id="{C98380DB-4D18-4E8E-ABC4-18847E13405E}" type="datetimeFigureOut">
               <a:rPr lang="de-DE" smtClean="0"/>
-              <a:t>17.06.2026</a:t>
+              <a:t>25.06.2026</a:t>
             </a:fld>
             <a:endParaRPr lang="de-DE"/>
           </a:p>
@@ -2462,7 +6139,7 @@
               <a:rPr lang="de-DE"/>
               <a:t>Mastertitelformat bearbeiten</a:t>
             </a:r>
-            <a:endParaRPr lang="en-US" dirty="0"/>
+            <a:endParaRPr lang="en-US"/>
           </a:p>
         </p:txBody>
       </p:sp>
@@ -2555,7 +6232,7 @@
               <a:rPr lang="de-DE"/>
               <a:t>Fünfte Ebene</a:t>
             </a:r>
-            <a:endParaRPr lang="en-US" dirty="0"/>
+            <a:endParaRPr lang="en-US"/>
           </a:p>
         </p:txBody>
       </p:sp>
@@ -2648,7 +6325,7 @@
               <a:rPr lang="de-DE"/>
               <a:t>Fünfte Ebene</a:t>
             </a:r>
-            <a:endParaRPr lang="en-US" dirty="0"/>
+            <a:endParaRPr lang="en-US"/>
           </a:p>
         </p:txBody>
       </p:sp>
@@ -2669,7 +6346,7 @@
           <a:p>
             <a:fld id="{C98380DB-4D18-4E8E-ABC4-18847E13405E}" type="datetimeFigureOut">
               <a:rPr lang="de-DE" smtClean="0"/>
-              <a:t>17.06.2026</a:t>
+              <a:t>25.06.2026</a:t>
             </a:fld>
             <a:endParaRPr lang="de-DE"/>
           </a:p>
@@ -2779,7 +6456,7 @@
               <a:rPr lang="de-DE"/>
               <a:t>Mastertitelformat bearbeiten</a:t>
             </a:r>
-            <a:endParaRPr lang="en-US" dirty="0"/>
+            <a:endParaRPr lang="en-US"/>
           </a:p>
         </p:txBody>
       </p:sp>
@@ -2952,7 +6629,7 @@
               <a:rPr lang="de-DE"/>
               <a:t>Fünfte Ebene</a:t>
             </a:r>
-            <a:endParaRPr lang="en-US" dirty="0"/>
+            <a:endParaRPr lang="en-US"/>
           </a:p>
         </p:txBody>
       </p:sp>
@@ -3125,7 +6802,7 @@
               <a:rPr lang="de-DE"/>
               <a:t>Fünfte Ebene</a:t>
             </a:r>
-            <a:endParaRPr lang="en-US" dirty="0"/>
+            <a:endParaRPr lang="en-US"/>
           </a:p>
         </p:txBody>
       </p:sp>
@@ -3146,7 +6823,7 @@
           <a:p>
             <a:fld id="{C98380DB-4D18-4E8E-ABC4-18847E13405E}" type="datetimeFigureOut">
               <a:rPr lang="de-DE" smtClean="0"/>
-              <a:t>17.06.2026</a:t>
+              <a:t>25.06.2026</a:t>
             </a:fld>
             <a:endParaRPr lang="de-DE"/>
           </a:p>
@@ -3243,7 +6920,7 @@
               <a:rPr lang="de-DE"/>
               <a:t>Mastertitelformat bearbeiten</a:t>
             </a:r>
-            <a:endParaRPr lang="en-US" dirty="0"/>
+            <a:endParaRPr lang="en-US"/>
           </a:p>
         </p:txBody>
       </p:sp>
@@ -3264,7 +6941,7 @@
           <a:p>
             <a:fld id="{C98380DB-4D18-4E8E-ABC4-18847E13405E}" type="datetimeFigureOut">
               <a:rPr lang="de-DE" smtClean="0"/>
-              <a:t>17.06.2026</a:t>
+              <a:t>25.06.2026</a:t>
             </a:fld>
             <a:endParaRPr lang="de-DE"/>
           </a:p>
@@ -3359,7 +7036,7 @@
           <a:p>
             <a:fld id="{C98380DB-4D18-4E8E-ABC4-18847E13405E}" type="datetimeFigureOut">
               <a:rPr lang="de-DE" smtClean="0"/>
-              <a:t>17.06.2026</a:t>
+              <a:t>25.06.2026</a:t>
             </a:fld>
             <a:endParaRPr lang="de-DE"/>
           </a:p>
@@ -3519,7 +7196,7 @@
               <a:rPr lang="de-DE"/>
               <a:t>Mastertitelformat bearbeiten</a:t>
             </a:r>
-            <a:endParaRPr lang="en-US" dirty="0"/>
+            <a:endParaRPr lang="en-US"/>
           </a:p>
         </p:txBody>
       </p:sp>
@@ -3604,7 +7281,7 @@
               <a:rPr lang="de-DE"/>
               <a:t>Fünfte Ebene</a:t>
             </a:r>
-            <a:endParaRPr lang="en-US" dirty="0"/>
+            <a:endParaRPr lang="en-US"/>
           </a:p>
         </p:txBody>
       </p:sp>
@@ -3712,7 +7389,7 @@
           <a:p>
             <a:fld id="{C98380DB-4D18-4E8E-ABC4-18847E13405E}" type="datetimeFigureOut">
               <a:rPr lang="de-DE" smtClean="0"/>
-              <a:t>17.06.2026</a:t>
+              <a:t>25.06.2026</a:t>
             </a:fld>
             <a:endParaRPr lang="de-DE"/>
           </a:p>
@@ -3939,7 +7616,7 @@
               <a:rPr lang="de-DE"/>
               <a:t>Mastertitelformat bearbeiten</a:t>
             </a:r>
-            <a:endParaRPr lang="en-US" dirty="0"/>
+            <a:endParaRPr lang="en-US"/>
           </a:p>
         </p:txBody>
       </p:sp>
@@ -4006,7 +7683,7 @@
               <a:rPr lang="de-DE"/>
               <a:t>Bild durch Klicken auf Symbol hinzufügen</a:t>
             </a:r>
-            <a:endParaRPr lang="en-US" dirty="0"/>
+            <a:endParaRPr lang="en-US"/>
           </a:p>
         </p:txBody>
       </p:sp>
@@ -4114,7 +7791,7 @@
           <a:p>
             <a:fld id="{C98380DB-4D18-4E8E-ABC4-18847E13405E}" type="datetimeFigureOut">
               <a:rPr lang="de-DE" smtClean="0"/>
-              <a:t>17.06.2026</a:t>
+              <a:t>25.06.2026</a:t>
             </a:fld>
             <a:endParaRPr lang="de-DE"/>
           </a:p>
@@ -4300,7 +7977,7 @@
               <a:rPr lang="de-DE"/>
               <a:t>Mastertitelformat bearbeiten</a:t>
             </a:r>
-            <a:endParaRPr lang="en-US" dirty="0"/>
+            <a:endParaRPr lang="en-US"/>
           </a:p>
         </p:txBody>
       </p:sp>
@@ -4362,7 +8039,7 @@
               <a:rPr lang="de-DE"/>
               <a:t>Fünfte Ebene</a:t>
             </a:r>
-            <a:endParaRPr lang="en-US" dirty="0"/>
+            <a:endParaRPr lang="en-US"/>
           </a:p>
         </p:txBody>
       </p:sp>
@@ -4399,7 +8076,7 @@
           <a:p>
             <a:fld id="{C98380DB-4D18-4E8E-ABC4-18847E13405E}" type="datetimeFigureOut">
               <a:rPr lang="de-DE" smtClean="0"/>
-              <a:t>17.06.2026</a:t>
+              <a:t>25.06.2026</a:t>
             </a:fld>
             <a:endParaRPr lang="de-DE"/>
           </a:p>
@@ -4945,17 +8622,17 @@
               </a:lnSpc>
             </a:pPr>
             <a:r>
-              <a:rPr lang="en-US" sz="5400" dirty="0"/>
+              <a:rPr lang="en-US" sz="5400"/>
               <a:t>“How to detect a niche of fraudsters?”</a:t>
             </a:r>
             <a:br>
-              <a:rPr lang="en-US" dirty="0"/>
+              <a:rPr lang="en-US"/>
             </a:br>
             <a:r>
-              <a:rPr lang="en-US" sz="2400" dirty="0"/>
+              <a:rPr lang="en-US" sz="2400"/>
               <a:t>by BNP Paribas PF</a:t>
             </a:r>
-            <a:endParaRPr lang="de-DE" dirty="0"/>
+            <a:endParaRPr lang="de-DE"/>
           </a:p>
         </p:txBody>
       </p:sp>
@@ -4982,24 +8659,24 @@
           </a:bodyPr>
           <a:lstStyle/>
           <a:p>
-            <a:endParaRPr lang="de-DE" dirty="0"/>
-          </a:p>
-          <a:p>
-            <a:endParaRPr lang="de-DE" dirty="0"/>
-          </a:p>
-          <a:p>
-            <a:r>
-              <a:rPr lang="de-DE" dirty="0" err="1"/>
+            <a:endParaRPr lang="de-DE"/>
+          </a:p>
+          <a:p>
+            <a:endParaRPr lang="de-DE"/>
+          </a:p>
+          <a:p>
+            <a:r>
+              <a:rPr lang="de-DE" err="1"/>
               <a:t>Advanced</a:t>
             </a:r>
             <a:r>
-              <a:rPr lang="de-DE" dirty="0"/>
+              <a:rPr lang="de-DE"/>
               <a:t> Machine Learning – Open Campus SS 2026</a:t>
             </a:r>
           </a:p>
           <a:p>
             <a:r>
-              <a:rPr lang="de-DE" sz="2100" b="1" dirty="0"/>
+              <a:rPr lang="de-DE" sz="2100" b="1"/>
               <a:t>Alexander Neumann &amp; Tom Hillekamp</a:t>
             </a:r>
           </a:p>
@@ -5487,26 +9164,26 @@
           <a:lstStyle/>
           <a:p>
             <a:r>
-              <a:rPr lang="de-DE" sz="2400" dirty="0"/>
+              <a:rPr lang="de-DE" sz="2400"/>
               <a:t>Feature Engineering (</a:t>
             </a:r>
             <a:r>
-              <a:rPr lang="de-DE" sz="2400" dirty="0" err="1"/>
+              <a:rPr lang="de-DE" sz="2400" err="1"/>
               <a:t>Aggregated</a:t>
             </a:r>
             <a:r>
-              <a:rPr lang="de-DE" sz="2400" dirty="0"/>
+              <a:rPr lang="de-DE" sz="2400"/>
               <a:t> </a:t>
             </a:r>
             <a:r>
-              <a:rPr lang="de-DE" sz="2400" dirty="0" err="1"/>
+              <a:rPr lang="de-DE" sz="2400" err="1"/>
               <a:t>Numerical</a:t>
             </a:r>
             <a:r>
-              <a:rPr lang="de-DE" sz="2400" dirty="0"/>
+              <a:rPr lang="de-DE" sz="2400"/>
               <a:t> Features)</a:t>
             </a:r>
-            <a:endParaRPr lang="de-DE" dirty="0"/>
+            <a:endParaRPr lang="de-DE"/>
           </a:p>
         </p:txBody>
       </p:sp>
@@ -5568,14 +9245,14 @@
           <a:lstStyle/>
           <a:p>
             <a:r>
-              <a:rPr lang="de-DE" dirty="0"/>
+              <a:rPr lang="de-DE"/>
               <a:t>Models to </a:t>
             </a:r>
             <a:r>
-              <a:rPr lang="de-DE" dirty="0" err="1"/>
+              <a:rPr lang="de-DE" err="1"/>
               <a:t>compare</a:t>
             </a:r>
-            <a:endParaRPr lang="de-DE" dirty="0"/>
+            <a:endParaRPr lang="de-DE"/>
           </a:p>
         </p:txBody>
       </p:sp>
@@ -5616,92 +9293,6 @@
           </a:prstGeom>
         </p:spPr>
       </p:pic>
-      <p:sp>
-        <p:nvSpPr>
-          <p:cNvPr id="3" name="Textfeld 2">
-            <a:extLst>
-              <a:ext uri="{FF2B5EF4-FFF2-40B4-BE49-F238E27FC236}">
-                <a16:creationId xmlns:a16="http://schemas.microsoft.com/office/drawing/2014/main" id="{61DF97C0-E220-5680-8D7D-0AF45AA646C9}"/>
-              </a:ext>
-            </a:extLst>
-          </p:cNvPr>
-          <p:cNvSpPr txBox="1"/>
-          <p:nvPr/>
-        </p:nvSpPr>
-        <p:spPr>
-          <a:xfrm>
-            <a:off x="7723031" y="1601551"/>
-            <a:ext cx="3097369" cy="461665"/>
-          </a:xfrm>
-          <a:prstGeom prst="rect">
-            <a:avLst/>
-          </a:prstGeom>
-          <a:noFill/>
-        </p:spPr>
-        <p:txBody>
-          <a:bodyPr wrap="square" rtlCol="0">
-            <a:spAutoFit/>
-          </a:bodyPr>
-          <a:lstStyle/>
-          <a:p>
-            <a:pPr algn="ctr"/>
-            <a:r>
-              <a:rPr lang="de-DE" sz="2400" b="1" dirty="0"/>
-              <a:t>2. </a:t>
-            </a:r>
-            <a:r>
-              <a:rPr lang="de-DE" sz="2400" b="1" dirty="0" err="1"/>
-              <a:t>XGBoost</a:t>
-            </a:r>
-            <a:endParaRPr lang="de-DE" sz="4400" b="1" dirty="0"/>
-          </a:p>
-        </p:txBody>
-      </p:sp>
-      <p:sp>
-        <p:nvSpPr>
-          <p:cNvPr id="4" name="Textfeld 3">
-            <a:extLst>
-              <a:ext uri="{FF2B5EF4-FFF2-40B4-BE49-F238E27FC236}">
-                <a16:creationId xmlns:a16="http://schemas.microsoft.com/office/drawing/2014/main" id="{80128E79-B37C-C1F9-5EE6-755311CA3E9C}"/>
-              </a:ext>
-            </a:extLst>
-          </p:cNvPr>
-          <p:cNvSpPr txBox="1"/>
-          <p:nvPr/>
-        </p:nvSpPr>
-        <p:spPr>
-          <a:xfrm>
-            <a:off x="1219200" y="1601552"/>
-            <a:ext cx="3097369" cy="461665"/>
-          </a:xfrm>
-          <a:prstGeom prst="rect">
-            <a:avLst/>
-          </a:prstGeom>
-          <a:noFill/>
-        </p:spPr>
-        <p:txBody>
-          <a:bodyPr wrap="square" rtlCol="0">
-            <a:spAutoFit/>
-          </a:bodyPr>
-          <a:lstStyle/>
-          <a:p>
-            <a:pPr algn="ctr"/>
-            <a:r>
-              <a:rPr lang="de-DE" sz="2400" b="1" dirty="0"/>
-              <a:t>1. </a:t>
-            </a:r>
-            <a:r>
-              <a:rPr lang="de-DE" sz="2400" b="1" dirty="0" err="1"/>
-              <a:t>Embeddings</a:t>
-            </a:r>
-            <a:r>
-              <a:rPr lang="de-DE" sz="2400" b="1" dirty="0"/>
-              <a:t> Model</a:t>
-            </a:r>
-            <a:endParaRPr lang="de-DE" sz="4400" b="1" dirty="0"/>
-          </a:p>
-        </p:txBody>
-      </p:sp>
       <p:pic>
         <p:nvPicPr>
           <p:cNvPr id="7" name="Grafik 6">
@@ -5738,6 +9329,92 @@
           </a:prstGeom>
         </p:spPr>
       </p:pic>
+      <p:sp>
+        <p:nvSpPr>
+          <p:cNvPr id="3" name="Textfeld 2">
+            <a:extLst>
+              <a:ext uri="{FF2B5EF4-FFF2-40B4-BE49-F238E27FC236}">
+                <a16:creationId xmlns:a16="http://schemas.microsoft.com/office/drawing/2014/main" id="{61DF97C0-E220-5680-8D7D-0AF45AA646C9}"/>
+              </a:ext>
+            </a:extLst>
+          </p:cNvPr>
+          <p:cNvSpPr txBox="1"/>
+          <p:nvPr/>
+        </p:nvSpPr>
+        <p:spPr>
+          <a:xfrm>
+            <a:off x="7723031" y="1601551"/>
+            <a:ext cx="3097369" cy="461665"/>
+          </a:xfrm>
+          <a:prstGeom prst="rect">
+            <a:avLst/>
+          </a:prstGeom>
+          <a:noFill/>
+        </p:spPr>
+        <p:txBody>
+          <a:bodyPr wrap="square" rtlCol="0">
+            <a:spAutoFit/>
+          </a:bodyPr>
+          <a:lstStyle/>
+          <a:p>
+            <a:pPr algn="ctr"/>
+            <a:r>
+              <a:rPr lang="de-DE" sz="2400" b="1"/>
+              <a:t>2. </a:t>
+            </a:r>
+            <a:r>
+              <a:rPr lang="de-DE" sz="2400" b="1" err="1"/>
+              <a:t>XGBoost</a:t>
+            </a:r>
+            <a:endParaRPr lang="de-DE" sz="4400" b="1"/>
+          </a:p>
+        </p:txBody>
+      </p:sp>
+      <p:sp>
+        <p:nvSpPr>
+          <p:cNvPr id="4" name="Textfeld 3">
+            <a:extLst>
+              <a:ext uri="{FF2B5EF4-FFF2-40B4-BE49-F238E27FC236}">
+                <a16:creationId xmlns:a16="http://schemas.microsoft.com/office/drawing/2014/main" id="{80128E79-B37C-C1F9-5EE6-755311CA3E9C}"/>
+              </a:ext>
+            </a:extLst>
+          </p:cNvPr>
+          <p:cNvSpPr txBox="1"/>
+          <p:nvPr/>
+        </p:nvSpPr>
+        <p:spPr>
+          <a:xfrm>
+            <a:off x="1219200" y="1601552"/>
+            <a:ext cx="3097369" cy="461665"/>
+          </a:xfrm>
+          <a:prstGeom prst="rect">
+            <a:avLst/>
+          </a:prstGeom>
+          <a:noFill/>
+        </p:spPr>
+        <p:txBody>
+          <a:bodyPr wrap="square" rtlCol="0">
+            <a:spAutoFit/>
+          </a:bodyPr>
+          <a:lstStyle/>
+          <a:p>
+            <a:pPr algn="ctr"/>
+            <a:r>
+              <a:rPr lang="de-DE" sz="2400" b="1"/>
+              <a:t>1. </a:t>
+            </a:r>
+            <a:r>
+              <a:rPr lang="de-DE" sz="2400" b="1" err="1"/>
+              <a:t>Embeddings</a:t>
+            </a:r>
+            <a:r>
+              <a:rPr lang="de-DE" sz="2400" b="1"/>
+              <a:t> Model</a:t>
+            </a:r>
+            <a:endParaRPr lang="de-DE" sz="4400" b="1"/>
+          </a:p>
+        </p:txBody>
+      </p:sp>
     </p:spTree>
     <p:extLst>
       <p:ext uri="{BB962C8B-B14F-4D97-AF65-F5344CB8AC3E}">
@@ -5790,14 +9467,14 @@
           <a:lstStyle/>
           <a:p>
             <a:r>
-              <a:rPr lang="de-DE" dirty="0"/>
+              <a:rPr lang="de-DE"/>
               <a:t>ANN with </a:t>
             </a:r>
             <a:r>
-              <a:rPr lang="de-DE" dirty="0" err="1"/>
+              <a:rPr lang="de-DE" err="1"/>
               <a:t>Embeddings</a:t>
             </a:r>
-            <a:endParaRPr lang="de-DE" dirty="0"/>
+            <a:endParaRPr lang="de-DE"/>
           </a:p>
         </p:txBody>
       </p:sp>
@@ -5933,14 +9610,14 @@
           <a:lstStyle/>
           <a:p>
             <a:r>
-              <a:rPr lang="de-DE" dirty="0"/>
+              <a:rPr lang="de-DE"/>
               <a:t>ANN with </a:t>
             </a:r>
             <a:r>
-              <a:rPr lang="de-DE" dirty="0" err="1"/>
+              <a:rPr lang="de-DE" err="1"/>
               <a:t>Embeddings</a:t>
             </a:r>
-            <a:endParaRPr lang="de-DE" dirty="0"/>
+            <a:endParaRPr lang="de-DE"/>
           </a:p>
         </p:txBody>
       </p:sp>
@@ -5996,7 +9673,7 @@
           <a:lstStyle/>
           <a:p>
             <a:r>
-              <a:rPr lang="de-DE" dirty="0"/>
+              <a:rPr lang="de-DE"/>
               <a:t>Results</a:t>
             </a:r>
           </a:p>
@@ -6102,7 +9779,7 @@
           <a:lstStyle/>
           <a:p>
             <a:r>
-              <a:rPr lang="de-DE" sz="1200" dirty="0"/>
+              <a:rPr lang="de-DE" sz="1200"/>
               <a:t>Challenge Benchmark</a:t>
             </a:r>
           </a:p>
@@ -6210,7 +9887,7 @@
           <a:lstStyle/>
           <a:p>
             <a:r>
-              <a:rPr lang="de-DE" dirty="0"/>
+              <a:rPr lang="de-DE"/>
               <a:t>Results</a:t>
             </a:r>
           </a:p>
@@ -6350,7 +10027,7 @@
           <a:lstStyle/>
           <a:p>
             <a:r>
-              <a:rPr lang="de-DE" dirty="0"/>
+              <a:rPr lang="de-DE"/>
               <a:t>Challenges and Errors</a:t>
             </a:r>
           </a:p>
@@ -6390,7 +10067,7 @@
               <a:t>How to deal with the </a:t>
             </a:r>
             <a:r>
-              <a:rPr lang="de-DE" sz="1800" dirty="0" err="1"/>
+              <a:rPr lang="de-DE" sz="1800" b="1" dirty="0" err="1"/>
               <a:t>categorical</a:t>
             </a:r>
             <a:r>
@@ -6437,7 +10114,7 @@
               <a:t>How to deal with the </a:t>
             </a:r>
             <a:r>
-              <a:rPr lang="de-DE" sz="1800" dirty="0" err="1"/>
+              <a:rPr lang="de-DE" sz="1800" b="1" dirty="0" err="1"/>
               <a:t>varying</a:t>
             </a:r>
             <a:r>
@@ -6445,7 +10122,7 @@
               <a:t> </a:t>
             </a:r>
             <a:r>
-              <a:rPr lang="de-DE" sz="1800" dirty="0" err="1"/>
+              <a:rPr lang="de-DE" sz="1800" b="1" dirty="0" err="1"/>
               <a:t>number</a:t>
             </a:r>
             <a:r>
@@ -6487,7 +10164,7 @@
               <a:t> </a:t>
             </a:r>
             <a:r>
-              <a:rPr lang="de-DE" sz="1800" dirty="0" err="1"/>
+              <a:rPr lang="de-DE" sz="1800" b="1" dirty="0" err="1"/>
               <a:t>parameters</a:t>
             </a:r>
             <a:r>
@@ -6495,7 +10172,7 @@
               <a:t> to </a:t>
             </a:r>
             <a:r>
-              <a:rPr lang="de-DE" sz="1800" dirty="0" err="1"/>
+              <a:rPr lang="de-DE" sz="1800" b="1" dirty="0" err="1"/>
               <a:t>optimize</a:t>
             </a:r>
             <a:r>
@@ -6549,7 +10226,7 @@
           <a:p>
             <a:pPr marL="383540" indent="-383540"/>
             <a:r>
-              <a:rPr lang="de-DE" sz="1800" dirty="0" err="1"/>
+              <a:rPr lang="de-DE" sz="1800" b="1" dirty="0" err="1"/>
               <a:t>Improving</a:t>
             </a:r>
             <a:r>
@@ -6557,7 +10234,7 @@
               <a:t> </a:t>
             </a:r>
             <a:r>
-              <a:rPr lang="de-DE" sz="1800" dirty="0" err="1"/>
+              <a:rPr lang="de-DE" sz="1800" b="1" dirty="0" err="1"/>
               <a:t>results</a:t>
             </a:r>
             <a:r>
@@ -6680,8 +10357,20 @@
           <a:p>
             <a:pPr marL="286258" indent="-285750"/>
             <a:r>
+              <a:rPr lang="de-DE" sz="1800" b="1" dirty="0"/>
+              <a:t>Ensemble</a:t>
+            </a:r>
+            <a:r>
               <a:rPr lang="de-DE" sz="1800" dirty="0"/>
-              <a:t>Ensemble Approach (ANN + </a:t>
+              <a:t> </a:t>
+            </a:r>
+            <a:r>
+              <a:rPr lang="de-DE" sz="1800" b="1" dirty="0"/>
+              <a:t>Approach</a:t>
+            </a:r>
+            <a:r>
+              <a:rPr lang="de-DE" sz="1800" dirty="0"/>
+              <a:t> (ANN + </a:t>
             </a:r>
             <a:r>
               <a:rPr lang="de-DE" sz="1800" dirty="0" err="1"/>
@@ -6767,10 +10456,10 @@
           <a:lstStyle/>
           <a:p>
             <a:r>
-              <a:rPr lang="de-DE" dirty="0" err="1"/>
+              <a:rPr lang="de-DE" err="1"/>
               <a:t>Discussion</a:t>
             </a:r>
-            <a:endParaRPr lang="de-DE" dirty="0"/>
+            <a:endParaRPr lang="de-DE"/>
           </a:p>
         </p:txBody>
       </p:sp>
@@ -6963,11 +10652,11 @@
           <a:lstStyle/>
           <a:p>
             <a:r>
-              <a:rPr lang="de-DE" dirty="0" err="1"/>
+              <a:rPr lang="de-DE" err="1"/>
               <a:t>Conclusion</a:t>
             </a:r>
             <a:r>
-              <a:rPr lang="de-DE" dirty="0"/>
+              <a:rPr lang="de-DE"/>
               <a:t> and Future Work</a:t>
             </a:r>
           </a:p>
@@ -6997,194 +10686,194 @@
           <a:lstStyle/>
           <a:p>
             <a:r>
-              <a:rPr lang="de-DE" dirty="0" err="1"/>
+              <a:rPr lang="de-DE" err="1"/>
               <a:t>We</a:t>
             </a:r>
             <a:r>
-              <a:rPr lang="de-DE" dirty="0"/>
+              <a:rPr lang="de-DE"/>
               <a:t> </a:t>
             </a:r>
             <a:r>
-              <a:rPr lang="de-DE" dirty="0" err="1"/>
+              <a:rPr lang="de-DE" err="1"/>
               <a:t>were</a:t>
             </a:r>
             <a:r>
-              <a:rPr lang="de-DE" dirty="0"/>
+              <a:rPr lang="de-DE"/>
               <a:t> </a:t>
             </a:r>
             <a:r>
-              <a:rPr lang="de-DE" dirty="0" err="1"/>
+              <a:rPr lang="de-DE" err="1"/>
               <a:t>able</a:t>
             </a:r>
             <a:r>
-              <a:rPr lang="de-DE" dirty="0"/>
+              <a:rPr lang="de-DE"/>
               <a:t> to </a:t>
             </a:r>
             <a:r>
-              <a:rPr lang="de-DE" dirty="0" err="1"/>
+              <a:rPr lang="de-DE" err="1"/>
               <a:t>train</a:t>
             </a:r>
             <a:r>
-              <a:rPr lang="de-DE" dirty="0"/>
+              <a:rPr lang="de-DE"/>
               <a:t> a </a:t>
             </a:r>
             <a:r>
-              <a:rPr lang="de-DE" dirty="0" err="1"/>
+              <a:rPr lang="de-DE" err="1"/>
               <a:t>model</a:t>
             </a:r>
             <a:r>
-              <a:rPr lang="de-DE" dirty="0"/>
+              <a:rPr lang="de-DE"/>
               <a:t> </a:t>
             </a:r>
             <a:r>
-              <a:rPr lang="de-DE" dirty="0" err="1"/>
+              <a:rPr lang="de-DE" err="1"/>
               <a:t>that</a:t>
             </a:r>
             <a:r>
-              <a:rPr lang="de-DE" dirty="0"/>
+              <a:rPr lang="de-DE"/>
               <a:t> </a:t>
             </a:r>
             <a:r>
-              <a:rPr lang="de-DE" dirty="0" err="1"/>
+              <a:rPr lang="de-DE" err="1"/>
               <a:t>performs</a:t>
             </a:r>
             <a:r>
-              <a:rPr lang="de-DE" dirty="0"/>
+              <a:rPr lang="de-DE"/>
               <a:t> better </a:t>
             </a:r>
             <a:r>
-              <a:rPr lang="de-DE" dirty="0" err="1"/>
+              <a:rPr lang="de-DE" err="1"/>
               <a:t>than</a:t>
             </a:r>
             <a:r>
-              <a:rPr lang="de-DE" dirty="0"/>
+              <a:rPr lang="de-DE"/>
               <a:t> the Benchmark on the Public Test Set</a:t>
             </a:r>
           </a:p>
           <a:p>
             <a:pPr lvl="1"/>
             <a:r>
-              <a:rPr lang="de-DE" dirty="0"/>
+              <a:rPr lang="de-DE"/>
               <a:t>Rank 102: 0.1895 PR-AUC (</a:t>
             </a:r>
             <a:r>
-              <a:rPr lang="de-DE" dirty="0" err="1"/>
+              <a:rPr lang="de-DE" err="1"/>
               <a:t>XGBoost</a:t>
             </a:r>
             <a:r>
-              <a:rPr lang="de-DE" dirty="0"/>
+              <a:rPr lang="de-DE"/>
               <a:t>)</a:t>
             </a:r>
           </a:p>
           <a:p>
             <a:pPr lvl="1"/>
             <a:r>
-              <a:rPr lang="de-DE" dirty="0"/>
+              <a:rPr lang="de-DE"/>
               <a:t>Rank 225: Benchmark</a:t>
             </a:r>
           </a:p>
           <a:p>
-            <a:endParaRPr lang="de-DE" dirty="0"/>
-          </a:p>
-          <a:p>
-            <a:endParaRPr lang="de-DE" dirty="0"/>
+            <a:endParaRPr lang="de-DE"/>
+          </a:p>
+          <a:p>
+            <a:endParaRPr lang="de-DE"/>
           </a:p>
           <a:p>
             <a:pPr marL="0" indent="0">
               <a:buNone/>
             </a:pPr>
             <a:r>
-              <a:rPr lang="de-DE" b="1" dirty="0"/>
+              <a:rPr lang="de-DE" b="1"/>
               <a:t>Future Work:</a:t>
             </a:r>
           </a:p>
           <a:p>
             <a:r>
-              <a:rPr lang="de-DE" dirty="0"/>
+              <a:rPr lang="de-DE"/>
               <a:t>Try </a:t>
             </a:r>
             <a:r>
-              <a:rPr lang="de-DE" dirty="0" err="1"/>
+              <a:rPr lang="de-DE" err="1"/>
               <a:t>other</a:t>
             </a:r>
             <a:r>
-              <a:rPr lang="de-DE" dirty="0"/>
+              <a:rPr lang="de-DE"/>
               <a:t> </a:t>
             </a:r>
             <a:r>
-              <a:rPr lang="de-DE" dirty="0" err="1"/>
+              <a:rPr lang="de-DE" err="1"/>
               <a:t>tree-based</a:t>
             </a:r>
             <a:r>
-              <a:rPr lang="de-DE" dirty="0"/>
+              <a:rPr lang="de-DE"/>
               <a:t> </a:t>
             </a:r>
             <a:r>
-              <a:rPr lang="de-DE" dirty="0" err="1"/>
+              <a:rPr lang="de-DE" err="1"/>
               <a:t>algorithms</a:t>
             </a:r>
-            <a:endParaRPr lang="de-DE" dirty="0"/>
-          </a:p>
-          <a:p>
-            <a:r>
-              <a:rPr lang="de-DE" dirty="0" err="1"/>
+            <a:endParaRPr lang="de-DE"/>
+          </a:p>
+          <a:p>
+            <a:r>
+              <a:rPr lang="de-DE" err="1"/>
               <a:t>Refine</a:t>
             </a:r>
             <a:r>
-              <a:rPr lang="de-DE" dirty="0"/>
+              <a:rPr lang="de-DE"/>
               <a:t> </a:t>
             </a:r>
             <a:r>
-              <a:rPr lang="de-DE" dirty="0" err="1"/>
+              <a:rPr lang="de-DE" err="1"/>
               <a:t>embedding</a:t>
             </a:r>
             <a:r>
-              <a:rPr lang="de-DE" dirty="0"/>
+              <a:rPr lang="de-DE"/>
               <a:t> </a:t>
             </a:r>
             <a:r>
-              <a:rPr lang="de-DE" dirty="0" err="1"/>
+              <a:rPr lang="de-DE" err="1"/>
               <a:t>approach</a:t>
             </a:r>
-            <a:endParaRPr lang="de-DE" dirty="0"/>
+            <a:endParaRPr lang="de-DE"/>
           </a:p>
           <a:p>
             <a:pPr lvl="1"/>
             <a:r>
-              <a:rPr lang="de-DE" dirty="0"/>
+              <a:rPr lang="de-DE"/>
               <a:t>Maybe </a:t>
             </a:r>
             <a:r>
-              <a:rPr lang="de-DE" dirty="0" err="1"/>
+              <a:rPr lang="de-DE" err="1"/>
               <a:t>transfer</a:t>
             </a:r>
             <a:r>
-              <a:rPr lang="de-DE" dirty="0"/>
+              <a:rPr lang="de-DE"/>
               <a:t> </a:t>
             </a:r>
             <a:r>
-              <a:rPr lang="de-DE" dirty="0" err="1"/>
+              <a:rPr lang="de-DE" err="1"/>
               <a:t>learning</a:t>
             </a:r>
             <a:r>
-              <a:rPr lang="de-DE" dirty="0"/>
+              <a:rPr lang="de-DE"/>
               <a:t>?</a:t>
             </a:r>
           </a:p>
           <a:p>
-            <a:endParaRPr lang="de-DE" dirty="0"/>
+            <a:endParaRPr lang="de-DE"/>
           </a:p>
           <a:p>
             <a:pPr marL="0" indent="0">
               <a:buNone/>
             </a:pPr>
-            <a:endParaRPr lang="de-DE" dirty="0"/>
+            <a:endParaRPr lang="de-DE"/>
           </a:p>
           <a:p>
             <a:pPr marL="0" indent="0">
               <a:buNone/>
             </a:pPr>
-            <a:endParaRPr lang="de-DE" dirty="0"/>
+            <a:endParaRPr lang="de-DE"/>
           </a:p>
         </p:txBody>
       </p:sp>
@@ -7240,28 +10929,28 @@
           <a:lstStyle/>
           <a:p>
             <a:r>
-              <a:rPr lang="de-DE" dirty="0" err="1"/>
+              <a:rPr lang="de-DE" err="1"/>
               <a:t>Thank</a:t>
             </a:r>
             <a:r>
-              <a:rPr lang="de-DE" dirty="0"/>
+              <a:rPr lang="de-DE"/>
               <a:t> </a:t>
             </a:r>
             <a:r>
-              <a:rPr lang="de-DE" dirty="0" err="1"/>
+              <a:rPr lang="de-DE" err="1"/>
               <a:t>you</a:t>
             </a:r>
             <a:r>
-              <a:rPr lang="de-DE" dirty="0"/>
+              <a:rPr lang="de-DE"/>
               <a:t>! </a:t>
             </a:r>
             <a:r>
-              <a:rPr lang="de-DE" dirty="0">
+              <a:rPr lang="de-DE">
                 <a:sym typeface="Wingdings" panose="05000000000000000000" pitchFamily="2" charset="2"/>
               </a:rPr>
               <a:t></a:t>
             </a:r>
-            <a:endParaRPr lang="de-DE" dirty="0"/>
+            <a:endParaRPr lang="de-DE"/>
           </a:p>
         </p:txBody>
       </p:sp>
@@ -7314,7 +11003,7 @@
           <a:p>
             <a:pPr algn="ctr"/>
             <a:r>
-              <a:rPr lang="de-DE" b="1" dirty="0"/>
+              <a:rPr lang="de-DE" b="1"/>
               <a:t>Q &amp; A</a:t>
             </a:r>
           </a:p>
@@ -7408,7 +11097,7 @@
           <a:lstStyle/>
           <a:p>
             <a:r>
-              <a:rPr lang="de-DE" dirty="0"/>
+              <a:rPr lang="de-DE"/>
               <a:t>Agenda</a:t>
             </a:r>
           </a:p>
@@ -7438,78 +11127,78 @@
           <a:lstStyle/>
           <a:p>
             <a:r>
-              <a:rPr lang="de-DE" dirty="0" err="1"/>
+              <a:rPr lang="de-DE" err="1"/>
               <a:t>Introduction</a:t>
             </a:r>
-            <a:endParaRPr lang="de-DE" dirty="0"/>
-          </a:p>
-          <a:p>
-            <a:r>
-              <a:rPr lang="de-DE" dirty="0" err="1"/>
+            <a:endParaRPr lang="de-DE"/>
+          </a:p>
+          <a:p>
+            <a:r>
+              <a:rPr lang="de-DE" err="1"/>
               <a:t>Literature</a:t>
             </a:r>
             <a:r>
-              <a:rPr lang="de-DE" dirty="0"/>
+              <a:rPr lang="de-DE"/>
               <a:t> Review</a:t>
             </a:r>
           </a:p>
           <a:p>
             <a:r>
-              <a:rPr lang="de-DE" dirty="0"/>
+              <a:rPr lang="de-DE"/>
               <a:t>Dataset </a:t>
             </a:r>
             <a:r>
-              <a:rPr lang="de-DE" dirty="0" err="1"/>
+              <a:rPr lang="de-DE" err="1"/>
               <a:t>Characeristics</a:t>
             </a:r>
-            <a:endParaRPr lang="de-DE" dirty="0"/>
-          </a:p>
-          <a:p>
-            <a:r>
-              <a:rPr lang="de-DE" dirty="0"/>
+            <a:endParaRPr lang="de-DE"/>
+          </a:p>
+          <a:p>
+            <a:r>
+              <a:rPr lang="de-DE"/>
               <a:t>Baseline Model</a:t>
             </a:r>
           </a:p>
           <a:p>
             <a:r>
-              <a:rPr lang="de-DE" dirty="0"/>
+              <a:rPr lang="de-DE"/>
               <a:t>Model Definition and Evaluation</a:t>
             </a:r>
           </a:p>
           <a:p>
             <a:r>
-              <a:rPr lang="de-DE" dirty="0"/>
+              <a:rPr lang="de-DE"/>
               <a:t>Results</a:t>
             </a:r>
           </a:p>
           <a:p>
             <a:r>
-              <a:rPr lang="de-DE" dirty="0"/>
+              <a:rPr lang="de-DE"/>
               <a:t>Challenges &amp; Errors</a:t>
             </a:r>
           </a:p>
           <a:p>
             <a:r>
-              <a:rPr lang="de-DE" dirty="0" err="1"/>
+              <a:rPr lang="de-DE" err="1"/>
               <a:t>Discussion</a:t>
             </a:r>
-            <a:endParaRPr lang="de-DE" dirty="0"/>
-          </a:p>
-          <a:p>
-            <a:r>
-              <a:rPr lang="de-DE" dirty="0" err="1"/>
+            <a:endParaRPr lang="de-DE"/>
+          </a:p>
+          <a:p>
+            <a:r>
+              <a:rPr lang="de-DE" err="1"/>
               <a:t>Conclusion</a:t>
             </a:r>
-            <a:endParaRPr lang="de-DE" dirty="0"/>
-          </a:p>
-          <a:p>
-            <a:r>
-              <a:rPr lang="de-DE" dirty="0"/>
+            <a:endParaRPr lang="de-DE"/>
+          </a:p>
+          <a:p>
+            <a:r>
+              <a:rPr lang="de-DE"/>
               <a:t>Q &amp; A</a:t>
             </a:r>
           </a:p>
           <a:p>
-            <a:endParaRPr lang="de-DE" dirty="0"/>
+            <a:endParaRPr lang="de-DE"/>
           </a:p>
         </p:txBody>
       </p:sp>
@@ -7529,6 +11218,14 @@
 <file path=ppt/slides/slide3.xml><?xml version="1.0" encoding="utf-8"?>
 <p:sld xmlns:a="http://schemas.openxmlformats.org/drawingml/2006/main" xmlns:r="http://schemas.openxmlformats.org/officeDocument/2006/relationships" xmlns:p="http://schemas.openxmlformats.org/presentationml/2006/main">
   <p:cSld>
+    <p:bg>
+      <p:bgPr>
+        <a:solidFill>
+          <a:schemeClr val="bg2"/>
+        </a:solidFill>
+        <a:effectLst/>
+      </p:bgPr>
+    </p:bg>
     <p:spTree>
       <p:nvGrpSpPr>
         <p:cNvPr id="1" name=""/>
@@ -7543,6 +11240,66 @@
           <a:chExt cx="0" cy="0"/>
         </a:xfrm>
       </p:grpSpPr>
+      <p:sp useBgFill="1">
+        <p:nvSpPr>
+          <p:cNvPr id="9" name="Rectangle 8">
+            <a:extLst>
+              <a:ext uri="{FF2B5EF4-FFF2-40B4-BE49-F238E27FC236}">
+                <a16:creationId xmlns:a16="http://schemas.microsoft.com/office/drawing/2014/main" id="{30BC9609-A8AF-411F-A9E0-C3B93C8945CA}"/>
+              </a:ext>
+              <a:ext uri="{C183D7F6-B498-43B3-948B-1728B52AA6E4}">
+                <adec:decorative xmlns:adec="http://schemas.microsoft.com/office/drawing/2017/decorative" val="1"/>
+              </a:ext>
+            </a:extLst>
+          </p:cNvPr>
+          <p:cNvSpPr>
+            <a:spLocks noGrp="1" noRot="1" noChangeAspect="1" noMove="1" noResize="1" noEditPoints="1" noAdjustHandles="1" noChangeArrowheads="1" noChangeShapeType="1" noTextEdit="1"/>
+          </p:cNvSpPr>
+          <p:nvPr>
+            <p:extLst>
+              <p:ext uri="{386F3935-93C4-4BCD-93E2-E3B085C9AB24}">
+                <p16:designElem xmlns:p16="http://schemas.microsoft.com/office/powerpoint/2015/main" val="1"/>
+              </p:ext>
+            </p:extLst>
+          </p:nvPr>
+        </p:nvSpPr>
+        <p:spPr>
+          <a:xfrm>
+            <a:off x="0" y="0"/>
+            <a:ext cx="12192000" cy="6858000"/>
+          </a:xfrm>
+          <a:prstGeom prst="rect">
+            <a:avLst/>
+          </a:prstGeom>
+          <a:ln>
+            <a:noFill/>
+          </a:ln>
+        </p:spPr>
+        <p:style>
+          <a:lnRef idx="2">
+            <a:schemeClr val="accent1">
+              <a:shade val="50000"/>
+            </a:schemeClr>
+          </a:lnRef>
+          <a:fillRef idx="1">
+            <a:schemeClr val="accent1"/>
+          </a:fillRef>
+          <a:effectRef idx="0">
+            <a:schemeClr val="accent1"/>
+          </a:effectRef>
+          <a:fontRef idx="minor">
+            <a:schemeClr val="lt1"/>
+          </a:fontRef>
+        </p:style>
+        <p:txBody>
+          <a:bodyPr rtlCol="0" anchor="ctr"/>
+          <a:lstStyle/>
+          <a:p>
+            <a:pPr algn="ctr"/>
+            <a:endParaRPr lang="en-US"/>
+          </a:p>
+        </p:txBody>
+      </p:sp>
       <p:sp>
         <p:nvSpPr>
           <p:cNvPr id="2" name="Titel 1">
@@ -7559,256 +11316,253 @@
             <p:ph type="title"/>
           </p:nvPr>
         </p:nvSpPr>
-        <p:spPr/>
+        <p:spPr>
+          <a:xfrm>
+            <a:off x="640080" y="639704"/>
+            <a:ext cx="3299579" cy="5577840"/>
+          </a:xfrm>
+        </p:spPr>
         <p:txBody>
-          <a:bodyPr/>
+          <a:bodyPr anchor="ctr">
+            <a:normAutofit/>
+          </a:bodyPr>
           <a:lstStyle/>
           <a:p>
+            <a:pPr algn="ctr">
+              <a:lnSpc>
+                <a:spcPct val="100000"/>
+              </a:lnSpc>
+            </a:pPr>
             <a:r>
               <a:rPr lang="de-DE" dirty="0" err="1"/>
               <a:t>Introduction</a:t>
             </a:r>
-            <a:endParaRPr lang="de-DE" dirty="0"/>
+            <a:br>
+              <a:rPr lang="de-DE" dirty="0"/>
+            </a:br>
+            <a:r>
+              <a:rPr lang="de-DE" sz="2800" b="1" dirty="0"/>
+              <a:t>Fraud </a:t>
+            </a:r>
+            <a:r>
+              <a:rPr lang="de-DE" sz="2800" b="1" dirty="0" err="1"/>
+              <a:t>Detection</a:t>
+            </a:r>
+            <a:endParaRPr lang="de-DE" b="1" dirty="0"/>
+          </a:p>
+        </p:txBody>
+      </p:sp>
+      <p:graphicFrame>
+        <p:nvGraphicFramePr>
+          <p:cNvPr id="5" name="Inhaltsplatzhalter 2">
+            <a:extLst>
+              <a:ext uri="{FF2B5EF4-FFF2-40B4-BE49-F238E27FC236}">
+                <a16:creationId xmlns:a16="http://schemas.microsoft.com/office/drawing/2014/main" id="{B5E40505-CA63-DB14-FAC2-70A4BDF09744}"/>
+              </a:ext>
+            </a:extLst>
+          </p:cNvPr>
+          <p:cNvGraphicFramePr>
+            <a:graphicFrameLocks noGrp="1"/>
+          </p:cNvGraphicFramePr>
+          <p:nvPr>
+            <p:ph idx="1"/>
+            <p:extLst>
+              <p:ext uri="{D42A27DB-BD31-4B8C-83A1-F6EECF244321}">
+                <p14:modId xmlns:p14="http://schemas.microsoft.com/office/powerpoint/2010/main" val="1605242380"/>
+              </p:ext>
+            </p:extLst>
+          </p:nvPr>
+        </p:nvGraphicFramePr>
+        <p:xfrm>
+          <a:off x="4901472" y="639705"/>
+          <a:ext cx="6506304" cy="5577840"/>
+        </p:xfrm>
+        <a:graphic>
+          <a:graphicData uri="http://schemas.openxmlformats.org/drawingml/2006/diagram">
+            <dgm:relIds xmlns:dgm="http://schemas.openxmlformats.org/drawingml/2006/diagram" xmlns:r="http://schemas.openxmlformats.org/officeDocument/2006/relationships" r:dm="rId2" r:lo="rId3" r:qs="rId4" r:cs="rId5"/>
+          </a:graphicData>
+        </a:graphic>
+      </p:graphicFrame>
+      <p:sp>
+        <p:nvSpPr>
+          <p:cNvPr id="4" name="Textfeld 3">
+            <a:extLst>
+              <a:ext uri="{FF2B5EF4-FFF2-40B4-BE49-F238E27FC236}">
+                <a16:creationId xmlns:a16="http://schemas.microsoft.com/office/drawing/2014/main" id="{62A56831-0E17-F21F-4E01-A0F17BE59788}"/>
+              </a:ext>
+            </a:extLst>
+          </p:cNvPr>
+          <p:cNvSpPr txBox="1"/>
+          <p:nvPr/>
+        </p:nvSpPr>
+        <p:spPr>
+          <a:xfrm>
+            <a:off x="7038061" y="734243"/>
+            <a:ext cx="2233126" cy="369332"/>
+          </a:xfrm>
+          <a:prstGeom prst="rect">
+            <a:avLst/>
+          </a:prstGeom>
+          <a:noFill/>
+        </p:spPr>
+        <p:txBody>
+          <a:bodyPr wrap="square" rtlCol="0">
+            <a:spAutoFit/>
+          </a:bodyPr>
+          <a:lstStyle/>
+          <a:p>
+            <a:pPr algn="ctr"/>
+            <a:r>
+              <a:rPr lang="de-DE" b="1" u="sng" dirty="0">
+                <a:solidFill>
+                  <a:schemeClr val="bg1"/>
+                </a:solidFill>
+              </a:rPr>
+              <a:t>GOAL</a:t>
+            </a:r>
           </a:p>
         </p:txBody>
       </p:sp>
       <p:sp>
         <p:nvSpPr>
-          <p:cNvPr id="3" name="Inhaltsplatzhalter 2">
+          <p:cNvPr id="6" name="Textfeld 5">
             <a:extLst>
               <a:ext uri="{FF2B5EF4-FFF2-40B4-BE49-F238E27FC236}">
-                <a16:creationId xmlns:a16="http://schemas.microsoft.com/office/drawing/2014/main" id="{8B2649C9-3AC0-9F97-C8EB-666B9E162F51}"/>
+                <a16:creationId xmlns:a16="http://schemas.microsoft.com/office/drawing/2014/main" id="{70FE3643-B24D-0A55-A557-7263A6A6AE4A}"/>
               </a:ext>
             </a:extLst>
           </p:cNvPr>
-          <p:cNvSpPr>
-            <a:spLocks noGrp="1"/>
-          </p:cNvSpPr>
-          <p:nvPr>
-            <p:ph idx="1"/>
-          </p:nvPr>
+          <p:cNvSpPr txBox="1"/>
+          <p:nvPr/>
         </p:nvSpPr>
-        <p:spPr/>
+        <p:spPr>
+          <a:xfrm>
+            <a:off x="7038061" y="4643533"/>
+            <a:ext cx="2233126" cy="369332"/>
+          </a:xfrm>
+          <a:prstGeom prst="rect">
+            <a:avLst/>
+          </a:prstGeom>
+          <a:noFill/>
+        </p:spPr>
         <p:txBody>
-          <a:bodyPr>
-            <a:normAutofit lnSpcReduction="10000"/>
+          <a:bodyPr wrap="square" rtlCol="0">
+            <a:spAutoFit/>
           </a:bodyPr>
           <a:lstStyle/>
           <a:p>
-            <a:r>
-              <a:rPr lang="de-DE" b="1" dirty="0"/>
-              <a:t>Challenge Goal: </a:t>
-            </a:r>
-            <a:r>
-              <a:rPr lang="en-US" dirty="0"/>
-              <a:t>Find the best way to process and </a:t>
-            </a:r>
-            <a:r>
-              <a:rPr lang="en-US" dirty="0" err="1"/>
-              <a:t>analyse</a:t>
-            </a:r>
-            <a:r>
-              <a:rPr lang="en-US" dirty="0"/>
-              <a:t> shopping basket data from a retailer partner in order to detect fraud cases</a:t>
-            </a:r>
-          </a:p>
-          <a:p>
-            <a:pPr lvl="1"/>
-            <a:r>
-              <a:rPr lang="en-US" dirty="0"/>
+            <a:pPr algn="ctr"/>
+            <a:r>
+              <a:rPr lang="de-DE" b="1" u="sng" dirty="0">
+                <a:solidFill>
+                  <a:schemeClr val="bg1"/>
+                </a:solidFill>
+              </a:rPr>
+              <a:t>DATA</a:t>
+            </a:r>
+          </a:p>
+        </p:txBody>
+      </p:sp>
+      <p:sp>
+        <p:nvSpPr>
+          <p:cNvPr id="7" name="Textfeld 6">
+            <a:extLst>
+              <a:ext uri="{FF2B5EF4-FFF2-40B4-BE49-F238E27FC236}">
+                <a16:creationId xmlns:a16="http://schemas.microsoft.com/office/drawing/2014/main" id="{B5989130-C614-350F-52F7-2A9386DD23D3}"/>
+              </a:ext>
+            </a:extLst>
+          </p:cNvPr>
+          <p:cNvSpPr txBox="1"/>
+          <p:nvPr/>
+        </p:nvSpPr>
+        <p:spPr>
+          <a:xfrm>
+            <a:off x="7038061" y="2688888"/>
+            <a:ext cx="2233126" cy="369332"/>
+          </a:xfrm>
+          <a:prstGeom prst="rect">
+            <a:avLst/>
+          </a:prstGeom>
+          <a:noFill/>
+        </p:spPr>
+        <p:txBody>
+          <a:bodyPr wrap="square" rtlCol="0">
+            <a:spAutoFit/>
+          </a:bodyPr>
+          <a:lstStyle/>
+          <a:p>
+            <a:pPr algn="ctr"/>
+            <a:r>
+              <a:rPr lang="de-DE" b="1" u="sng" dirty="0">
+                <a:solidFill>
+                  <a:schemeClr val="bg1"/>
+                </a:solidFill>
+              </a:rPr>
+              <a:t>TASK</a:t>
+            </a:r>
+          </a:p>
+        </p:txBody>
+      </p:sp>
+      <p:sp>
+        <p:nvSpPr>
+          <p:cNvPr id="10" name="Textfeld 9">
+            <a:extLst>
+              <a:ext uri="{FF2B5EF4-FFF2-40B4-BE49-F238E27FC236}">
+                <a16:creationId xmlns:a16="http://schemas.microsoft.com/office/drawing/2014/main" id="{384C0A9C-9D09-B12D-89E0-602018FC7051}"/>
+              </a:ext>
+            </a:extLst>
+          </p:cNvPr>
+          <p:cNvSpPr txBox="1"/>
+          <p:nvPr/>
+        </p:nvSpPr>
+        <p:spPr>
+          <a:xfrm>
+            <a:off x="84909" y="6008676"/>
+            <a:ext cx="5336177" cy="1169551"/>
+          </a:xfrm>
+          <a:prstGeom prst="rect">
+            <a:avLst/>
+          </a:prstGeom>
+          <a:noFill/>
+        </p:spPr>
+        <p:txBody>
+          <a:bodyPr wrap="square" rtlCol="0">
+            <a:spAutoFit/>
+          </a:bodyPr>
+          <a:lstStyle/>
+          <a:p>
+            <a:endParaRPr lang="de-DE" sz="1400" dirty="0"/>
+          </a:p>
+          <a:p>
+            <a:r>
+              <a:rPr lang="en-US" sz="1400" i="1" dirty="0"/>
               <a:t>Found on </a:t>
             </a:r>
             <a:r>
-              <a:rPr lang="en-US" dirty="0" err="1"/>
+              <a:rPr lang="en-US" sz="1400" i="1" dirty="0" err="1"/>
               <a:t>ChallengeData</a:t>
             </a:r>
             <a:r>
-              <a:rPr lang="en-US" dirty="0"/>
+              <a:rPr lang="en-US" sz="1400" i="1" dirty="0"/>
               <a:t>: </a:t>
             </a:r>
             <a:r>
-              <a:rPr lang="x-none" dirty="0">
-                <a:hlinkClick r:id="rId2"/>
+              <a:rPr lang="en-US" sz="1400" i="1" dirty="0">
+                <a:hlinkClick r:id="rId7"/>
               </a:rPr>
               <a:t>https://challengedata.ens.fr/challenges/104</a:t>
             </a:r>
-            <a:endParaRPr lang="de-DE" dirty="0"/>
-          </a:p>
-          <a:p>
-            <a:pPr lvl="1"/>
-            <a:r>
-              <a:rPr lang="de-DE" dirty="0"/>
-              <a:t>Problem: </a:t>
-            </a:r>
-            <a:r>
-              <a:rPr lang="de-DE" dirty="0" err="1"/>
-              <a:t>Fraudsters</a:t>
-            </a:r>
-            <a:r>
-              <a:rPr lang="de-DE" dirty="0"/>
+            <a:r>
+              <a:rPr lang="en-US" sz="1400" i="1" dirty="0"/>
               <a:t> </a:t>
             </a:r>
-            <a:r>
-              <a:rPr lang="de-DE" dirty="0" err="1"/>
-              <a:t>use</a:t>
-            </a:r>
-            <a:r>
-              <a:rPr lang="de-DE" dirty="0"/>
-              <a:t> “Buy </a:t>
-            </a:r>
-            <a:r>
-              <a:rPr lang="de-DE" dirty="0" err="1"/>
-              <a:t>now</a:t>
-            </a:r>
-            <a:r>
-              <a:rPr lang="de-DE" dirty="0"/>
-              <a:t> – </a:t>
-            </a:r>
-            <a:r>
-              <a:rPr lang="de-DE" dirty="0" err="1"/>
-              <a:t>pay</a:t>
-            </a:r>
-            <a:r>
-              <a:rPr lang="de-DE" dirty="0"/>
-              <a:t> </a:t>
-            </a:r>
-            <a:r>
-              <a:rPr lang="de-DE" dirty="0" err="1"/>
-              <a:t>later</a:t>
-            </a:r>
-            <a:r>
-              <a:rPr lang="de-DE" dirty="0"/>
-              <a:t>“ but </a:t>
-            </a:r>
-            <a:r>
-              <a:rPr lang="de-DE" dirty="0" err="1"/>
-              <a:t>never</a:t>
-            </a:r>
-            <a:r>
-              <a:rPr lang="de-DE" dirty="0"/>
-              <a:t> </a:t>
-            </a:r>
-            <a:r>
-              <a:rPr lang="de-DE" dirty="0" err="1"/>
-              <a:t>pay</a:t>
-            </a:r>
-            <a:endParaRPr lang="de-DE" dirty="0"/>
-          </a:p>
-          <a:p>
-            <a:pPr marL="530352" lvl="1" indent="0">
-              <a:buNone/>
-            </a:pPr>
-            <a:endParaRPr lang="en-US" dirty="0"/>
-          </a:p>
-          <a:p>
-            <a:r>
-              <a:rPr lang="en-US" b="1" dirty="0"/>
-              <a:t>Task</a:t>
-            </a:r>
-            <a:r>
-              <a:rPr lang="en-US" dirty="0"/>
-              <a:t>: Classification – Fraud/Not Fraud</a:t>
-            </a:r>
-          </a:p>
-          <a:p>
-            <a:r>
-              <a:rPr lang="en-US" b="1" dirty="0"/>
-              <a:t>Data: </a:t>
-            </a:r>
-            <a:r>
-              <a:rPr lang="en-US" dirty="0"/>
-              <a:t>Tabular Data with shopping basket contents, e.g. item type, number of items, prices per item</a:t>
-            </a:r>
-          </a:p>
-          <a:p>
-            <a:pPr lvl="1"/>
-            <a:r>
-              <a:rPr lang="de-DE" i="0" dirty="0"/>
-              <a:t>Total: 115.988 </a:t>
-            </a:r>
-            <a:r>
-              <a:rPr lang="de-DE" i="0" dirty="0" err="1"/>
-              <a:t>samples</a:t>
-            </a:r>
-            <a:r>
-              <a:rPr lang="de-DE" i="0" dirty="0"/>
-              <a:t> – </a:t>
-            </a:r>
-            <a:r>
-              <a:rPr lang="de-DE" i="0" dirty="0" err="1"/>
-              <a:t>only</a:t>
-            </a:r>
-            <a:r>
-              <a:rPr lang="de-DE" i="0" dirty="0"/>
-              <a:t> </a:t>
-            </a:r>
-            <a:r>
-              <a:rPr lang="de-DE" b="1" i="0" dirty="0"/>
-              <a:t>1.681</a:t>
-            </a:r>
-            <a:r>
-              <a:rPr lang="de-DE" i="0" dirty="0"/>
-              <a:t> are </a:t>
-            </a:r>
-            <a:r>
-              <a:rPr lang="de-DE" i="0" dirty="0" err="1"/>
-              <a:t>fraud</a:t>
-            </a:r>
-            <a:r>
-              <a:rPr lang="de-DE" i="0" dirty="0"/>
-              <a:t> (~1.4%)</a:t>
-            </a:r>
-          </a:p>
-          <a:p>
-            <a:pPr lvl="1"/>
-            <a:r>
-              <a:rPr lang="de-DE" i="0" dirty="0"/>
-              <a:t>147 </a:t>
-            </a:r>
-            <a:r>
-              <a:rPr lang="de-DE" i="0" dirty="0" err="1"/>
-              <a:t>columns</a:t>
-            </a:r>
-            <a:r>
-              <a:rPr lang="de-DE" i="0" dirty="0"/>
-              <a:t>: 144 are </a:t>
-            </a:r>
-            <a:r>
-              <a:rPr lang="de-DE" i="0" dirty="0" err="1"/>
-              <a:t>grouped</a:t>
-            </a:r>
-            <a:r>
-              <a:rPr lang="de-DE" i="0" dirty="0"/>
-              <a:t> </a:t>
-            </a:r>
-            <a:r>
-              <a:rPr lang="de-DE" i="0" dirty="0" err="1"/>
-              <a:t>into</a:t>
-            </a:r>
-            <a:r>
-              <a:rPr lang="de-DE" i="0" dirty="0"/>
-              <a:t> 6 </a:t>
-            </a:r>
-            <a:r>
-              <a:rPr lang="de-DE" i="0" dirty="0" err="1"/>
-              <a:t>categories</a:t>
-            </a:r>
-            <a:r>
-              <a:rPr lang="de-DE" i="0" dirty="0"/>
-              <a:t> (up to 24 </a:t>
-            </a:r>
-            <a:r>
-              <a:rPr lang="de-DE" i="0" dirty="0" err="1"/>
-              <a:t>items</a:t>
-            </a:r>
-            <a:r>
-              <a:rPr lang="de-DE" i="0" dirty="0"/>
-              <a:t> per sample)</a:t>
-            </a:r>
-            <a:endParaRPr lang="en-US" b="1" dirty="0"/>
-          </a:p>
-          <a:p>
-            <a:endParaRPr lang="de-DE" dirty="0"/>
+            <a:endParaRPr lang="en-US" sz="1400" dirty="0"/>
+          </a:p>
+          <a:p>
+            <a:endParaRPr lang="de-DE" sz="1400" dirty="0"/>
+          </a:p>
+          <a:p>
+            <a:endParaRPr lang="de-DE" sz="1400" dirty="0"/>
           </a:p>
         </p:txBody>
       </p:sp>
@@ -7864,11 +11618,11 @@
           <a:lstStyle/>
           <a:p>
             <a:r>
-              <a:rPr lang="de-DE" dirty="0" err="1"/>
+              <a:rPr lang="de-DE" err="1"/>
               <a:t>Literature</a:t>
             </a:r>
             <a:r>
-              <a:rPr lang="de-DE" dirty="0"/>
+              <a:rPr lang="de-DE"/>
               <a:t> Review</a:t>
             </a:r>
           </a:p>
@@ -8290,79 +12044,155 @@
               <a:buNone/>
             </a:pPr>
             <a:r>
-              <a:rPr lang="de-DE" sz="1800" b="1" dirty="0" err="1"/>
+              <a:rPr lang="de-DE" sz="1800" b="1" dirty="0" err="1">
+                <a:highlight>
+                  <a:srgbClr val="FFFF00"/>
+                </a:highlight>
+              </a:rPr>
               <a:t>However</a:t>
             </a:r>
             <a:r>
-              <a:rPr lang="de-DE" sz="1800" b="1" dirty="0"/>
+              <a:rPr lang="de-DE" sz="1800" b="1" dirty="0">
+                <a:highlight>
+                  <a:srgbClr val="FFFF00"/>
+                </a:highlight>
+              </a:rPr>
               <a:t>: </a:t>
             </a:r>
             <a:r>
-              <a:rPr lang="de-DE" sz="1800" dirty="0"/>
+              <a:rPr lang="de-DE" sz="1800" dirty="0">
+                <a:highlight>
+                  <a:srgbClr val="FFFF00"/>
+                </a:highlight>
+              </a:rPr>
               <a:t>not </a:t>
             </a:r>
             <a:r>
-              <a:rPr lang="de-DE" sz="1800" dirty="0" err="1"/>
+              <a:rPr lang="de-DE" sz="1800" dirty="0" err="1">
+                <a:highlight>
+                  <a:srgbClr val="FFFF00"/>
+                </a:highlight>
+              </a:rPr>
               <a:t>much</a:t>
             </a:r>
             <a:r>
-              <a:rPr lang="de-DE" sz="1800" dirty="0"/>
+              <a:rPr lang="de-DE" sz="1800" dirty="0">
+                <a:highlight>
+                  <a:srgbClr val="FFFF00"/>
+                </a:highlight>
+              </a:rPr>
               <a:t> </a:t>
             </a:r>
             <a:r>
-              <a:rPr lang="de-DE" sz="1800" dirty="0" err="1"/>
+              <a:rPr lang="de-DE" sz="1800" dirty="0" err="1">
+                <a:highlight>
+                  <a:srgbClr val="FFFF00"/>
+                </a:highlight>
+              </a:rPr>
               <a:t>research</a:t>
             </a:r>
             <a:r>
-              <a:rPr lang="de-DE" sz="1800" dirty="0"/>
+              <a:rPr lang="de-DE" sz="1800" dirty="0">
+                <a:highlight>
+                  <a:srgbClr val="FFFF00"/>
+                </a:highlight>
+              </a:rPr>
               <a:t> </a:t>
             </a:r>
             <a:r>
-              <a:rPr lang="de-DE" sz="1800" dirty="0" err="1"/>
+              <a:rPr lang="de-DE" sz="1800" dirty="0" err="1">
+                <a:highlight>
+                  <a:srgbClr val="FFFF00"/>
+                </a:highlight>
+              </a:rPr>
               <a:t>concerning</a:t>
             </a:r>
             <a:r>
-              <a:rPr lang="de-DE" sz="1800" dirty="0"/>
+              <a:rPr lang="de-DE" sz="1800" dirty="0">
+                <a:highlight>
+                  <a:srgbClr val="FFFF00"/>
+                </a:highlight>
+              </a:rPr>
               <a:t> </a:t>
             </a:r>
             <a:r>
-              <a:rPr lang="de-DE" sz="1800" dirty="0" err="1"/>
+              <a:rPr lang="de-DE" sz="1800" dirty="0" err="1">
+                <a:highlight>
+                  <a:srgbClr val="FFFF00"/>
+                </a:highlight>
+              </a:rPr>
               <a:t>basket</a:t>
             </a:r>
             <a:r>
-              <a:rPr lang="de-DE" sz="1800" dirty="0"/>
+              <a:rPr lang="de-DE" sz="1800" dirty="0">
+                <a:highlight>
+                  <a:srgbClr val="FFFF00"/>
+                </a:highlight>
+              </a:rPr>
               <a:t>-level </a:t>
             </a:r>
             <a:r>
-              <a:rPr lang="de-DE" sz="1800" dirty="0" err="1"/>
+              <a:rPr lang="de-DE" sz="1800" dirty="0" err="1">
+                <a:highlight>
+                  <a:srgbClr val="FFFF00"/>
+                </a:highlight>
+              </a:rPr>
               <a:t>data</a:t>
             </a:r>
             <a:r>
-              <a:rPr lang="de-DE" sz="1800" dirty="0"/>
+              <a:rPr lang="de-DE" sz="1800" dirty="0">
+                <a:highlight>
+                  <a:srgbClr val="FFFF00"/>
+                </a:highlight>
+              </a:rPr>
               <a:t>, often </a:t>
             </a:r>
             <a:r>
-              <a:rPr lang="de-DE" sz="1800" dirty="0" err="1"/>
+              <a:rPr lang="de-DE" sz="1800" dirty="0" err="1">
+                <a:highlight>
+                  <a:srgbClr val="FFFF00"/>
+                </a:highlight>
+              </a:rPr>
               <a:t>includes</a:t>
             </a:r>
             <a:r>
-              <a:rPr lang="de-DE" sz="1800" dirty="0"/>
+              <a:rPr lang="de-DE" sz="1800" dirty="0">
+                <a:highlight>
+                  <a:srgbClr val="FFFF00"/>
+                </a:highlight>
+              </a:rPr>
               <a:t> </a:t>
             </a:r>
             <a:r>
-              <a:rPr lang="de-DE" sz="1800" dirty="0" err="1"/>
+              <a:rPr lang="de-DE" sz="1800" dirty="0" err="1">
+                <a:highlight>
+                  <a:srgbClr val="FFFF00"/>
+                </a:highlight>
+              </a:rPr>
               <a:t>user</a:t>
             </a:r>
             <a:r>
-              <a:rPr lang="de-DE" sz="1800" dirty="0"/>
+              <a:rPr lang="de-DE" sz="1800" dirty="0">
+                <a:highlight>
+                  <a:srgbClr val="FFFF00"/>
+                </a:highlight>
+              </a:rPr>
               <a:t> </a:t>
             </a:r>
             <a:r>
-              <a:rPr lang="de-DE" sz="1800" dirty="0" err="1"/>
+              <a:rPr lang="de-DE" sz="1800" dirty="0" err="1">
+                <a:highlight>
+                  <a:srgbClr val="FFFF00"/>
+                </a:highlight>
+              </a:rPr>
               <a:t>data</a:t>
             </a:r>
             <a:r>
-              <a:rPr lang="de-DE" sz="1800" dirty="0"/>
+              <a:rPr lang="de-DE" sz="1800" dirty="0">
+                <a:highlight>
+                  <a:srgbClr val="FFFF00"/>
+                </a:highlight>
+              </a:rPr>
               <a:t> etc.</a:t>
             </a:r>
           </a:p>
@@ -8446,14 +12276,14 @@
           <a:lstStyle/>
           <a:p>
             <a:r>
-              <a:rPr lang="de-DE" dirty="0"/>
+              <a:rPr lang="de-DE"/>
               <a:t>Dataset </a:t>
             </a:r>
             <a:r>
-              <a:rPr lang="de-DE" dirty="0" err="1"/>
+              <a:rPr lang="de-DE" err="1"/>
               <a:t>Characteristics</a:t>
             </a:r>
-            <a:endParaRPr lang="de-DE" dirty="0"/>
+            <a:endParaRPr lang="de-DE"/>
           </a:p>
         </p:txBody>
       </p:sp>
@@ -8803,7 +12633,7 @@
           <a:lstStyle/>
           <a:p>
             <a:r>
-              <a:rPr lang="de-DE" dirty="0"/>
+              <a:rPr lang="de-DE"/>
               <a:t>Baseline Model</a:t>
             </a:r>
           </a:p>
@@ -8831,161 +12661,161 @@
           <a:lstStyle/>
           <a:p>
             <a:r>
-              <a:rPr lang="de-DE" b="1" dirty="0"/>
+              <a:rPr lang="de-DE" b="1"/>
               <a:t>Simple </a:t>
             </a:r>
             <a:r>
-              <a:rPr lang="de-DE" b="1" dirty="0" err="1"/>
+              <a:rPr lang="de-DE" b="1" err="1"/>
               <a:t>Neural</a:t>
             </a:r>
             <a:r>
-              <a:rPr lang="de-DE" b="1" dirty="0"/>
+              <a:rPr lang="de-DE" b="1"/>
               <a:t> Network </a:t>
             </a:r>
           </a:p>
           <a:p>
             <a:r>
-              <a:rPr lang="de-DE" b="1" dirty="0"/>
+              <a:rPr lang="de-DE" b="1"/>
               <a:t>Evaluation </a:t>
             </a:r>
             <a:r>
-              <a:rPr lang="de-DE" b="1" dirty="0" err="1"/>
+              <a:rPr lang="de-DE" b="1" err="1"/>
               <a:t>Metric</a:t>
             </a:r>
             <a:r>
-              <a:rPr lang="de-DE" b="1" dirty="0"/>
+              <a:rPr lang="de-DE" b="1"/>
               <a:t>: </a:t>
             </a:r>
             <a:r>
-              <a:rPr lang="de-DE" dirty="0"/>
+              <a:rPr lang="de-DE"/>
               <a:t>PR-AUC</a:t>
             </a:r>
           </a:p>
           <a:p>
             <a:r>
-              <a:rPr lang="de-DE" b="1" dirty="0"/>
+              <a:rPr lang="de-DE" b="1"/>
               <a:t>Features: </a:t>
             </a:r>
             <a:r>
-              <a:rPr lang="de-DE" dirty="0" err="1"/>
+              <a:rPr lang="de-DE" err="1"/>
               <a:t>Aggregated</a:t>
             </a:r>
             <a:r>
-              <a:rPr lang="de-DE" dirty="0"/>
+              <a:rPr lang="de-DE"/>
               <a:t> </a:t>
             </a:r>
             <a:r>
-              <a:rPr lang="de-DE" dirty="0" err="1"/>
+              <a:rPr lang="de-DE" err="1"/>
               <a:t>numerical</a:t>
             </a:r>
             <a:r>
-              <a:rPr lang="de-DE" dirty="0"/>
+              <a:rPr lang="de-DE"/>
               <a:t> </a:t>
             </a:r>
             <a:r>
-              <a:rPr lang="de-DE" dirty="0" err="1"/>
+              <a:rPr lang="de-DE" err="1"/>
               <a:t>features</a:t>
             </a:r>
-            <a:endParaRPr lang="de-DE" dirty="0"/>
+            <a:endParaRPr lang="de-DE"/>
           </a:p>
           <a:p>
             <a:pPr lvl="1"/>
             <a:r>
-              <a:rPr lang="de-DE" dirty="0"/>
+              <a:rPr lang="de-DE"/>
               <a:t>Total </a:t>
             </a:r>
             <a:r>
-              <a:rPr lang="de-DE" dirty="0" err="1"/>
+              <a:rPr lang="de-DE" err="1"/>
               <a:t>number</a:t>
             </a:r>
             <a:r>
-              <a:rPr lang="de-DE" dirty="0"/>
+              <a:rPr lang="de-DE"/>
               <a:t> of </a:t>
             </a:r>
             <a:r>
-              <a:rPr lang="de-DE" dirty="0" err="1"/>
+              <a:rPr lang="de-DE" err="1"/>
               <a:t>items</a:t>
             </a:r>
             <a:r>
-              <a:rPr lang="de-DE" dirty="0"/>
+              <a:rPr lang="de-DE"/>
               <a:t> in </a:t>
             </a:r>
             <a:r>
-              <a:rPr lang="de-DE" dirty="0" err="1"/>
+              <a:rPr lang="de-DE" err="1"/>
               <a:t>basket</a:t>
             </a:r>
-            <a:endParaRPr lang="de-DE" dirty="0"/>
+            <a:endParaRPr lang="de-DE"/>
           </a:p>
           <a:p>
             <a:pPr lvl="1"/>
             <a:r>
-              <a:rPr lang="de-DE" dirty="0"/>
+              <a:rPr lang="de-DE"/>
               <a:t>Total </a:t>
             </a:r>
             <a:r>
-              <a:rPr lang="de-DE" dirty="0" err="1"/>
+              <a:rPr lang="de-DE" err="1"/>
               <a:t>value</a:t>
             </a:r>
             <a:r>
-              <a:rPr lang="de-DE" dirty="0"/>
+              <a:rPr lang="de-DE"/>
               <a:t> of </a:t>
             </a:r>
             <a:r>
-              <a:rPr lang="de-DE" dirty="0" err="1"/>
+              <a:rPr lang="de-DE" err="1"/>
               <a:t>basket</a:t>
             </a:r>
-            <a:endParaRPr lang="de-DE" dirty="0"/>
+            <a:endParaRPr lang="de-DE"/>
           </a:p>
           <a:p>
             <a:pPr lvl="1"/>
             <a:r>
-              <a:rPr lang="de-DE" dirty="0"/>
+              <a:rPr lang="de-DE"/>
               <a:t>Maximum item </a:t>
             </a:r>
             <a:r>
-              <a:rPr lang="de-DE" dirty="0" err="1"/>
+              <a:rPr lang="de-DE" err="1"/>
               <a:t>price</a:t>
             </a:r>
-            <a:endParaRPr lang="de-DE" dirty="0"/>
+            <a:endParaRPr lang="de-DE"/>
           </a:p>
           <a:p>
             <a:pPr lvl="1"/>
             <a:r>
-              <a:rPr lang="de-DE" dirty="0"/>
+              <a:rPr lang="de-DE"/>
               <a:t>Average item </a:t>
             </a:r>
             <a:r>
-              <a:rPr lang="de-DE" dirty="0" err="1"/>
+              <a:rPr lang="de-DE" err="1"/>
               <a:t>price</a:t>
             </a:r>
-            <a:endParaRPr lang="de-DE" dirty="0"/>
+            <a:endParaRPr lang="de-DE"/>
           </a:p>
           <a:p>
             <a:pPr lvl="1"/>
             <a:r>
-              <a:rPr lang="de-DE" dirty="0"/>
+              <a:rPr lang="de-DE"/>
               <a:t>Number of </a:t>
             </a:r>
             <a:r>
-              <a:rPr lang="de-DE" dirty="0" err="1"/>
+              <a:rPr lang="de-DE" err="1"/>
               <a:t>items</a:t>
             </a:r>
             <a:r>
-              <a:rPr lang="de-DE" dirty="0"/>
+              <a:rPr lang="de-DE"/>
               <a:t> from </a:t>
             </a:r>
             <a:r>
-              <a:rPr lang="de-DE" dirty="0" err="1"/>
+              <a:rPr lang="de-DE" err="1"/>
               <a:t>category</a:t>
             </a:r>
             <a:r>
-              <a:rPr lang="de-DE" dirty="0"/>
+              <a:rPr lang="de-DE"/>
               <a:t> “Computers“</a:t>
             </a:r>
           </a:p>
           <a:p>
             <a:pPr lvl="1"/>
-            <a:endParaRPr lang="de-DE" b="1" dirty="0"/>
+            <a:endParaRPr lang="de-DE" b="1"/>
           </a:p>
         </p:txBody>
       </p:sp>
@@ -9083,7 +12913,7 @@
           <a:lstStyle/>
           <a:p>
             <a:r>
-              <a:rPr lang="de-DE" dirty="0"/>
+              <a:rPr lang="de-DE"/>
               <a:t>Baseline Model - Results</a:t>
             </a:r>
           </a:p>
@@ -9239,15 +13069,27 @@
               <a:t>&lt; </a:t>
             </a:r>
             <a:r>
-              <a:rPr lang="de-DE" b="1" u="sng" dirty="0" err="1"/>
+              <a:rPr lang="de-DE" b="1" u="sng" dirty="0" err="1">
+                <a:highlight>
+                  <a:srgbClr val="FFFF00"/>
+                </a:highlight>
+              </a:rPr>
               <a:t>Our</a:t>
             </a:r>
             <a:r>
-              <a:rPr lang="de-DE" b="1" u="sng" dirty="0"/>
+              <a:rPr lang="de-DE" b="1" u="sng" dirty="0">
+                <a:highlight>
+                  <a:srgbClr val="FFFF00"/>
+                </a:highlight>
+              </a:rPr>
               <a:t> Baseline Model</a:t>
             </a:r>
             <a:r>
-              <a:rPr lang="de-DE" u="sng" dirty="0"/>
+              <a:rPr lang="de-DE" u="sng" dirty="0">
+                <a:highlight>
+                  <a:srgbClr val="FFFF00"/>
+                </a:highlight>
+              </a:rPr>
               <a:t> </a:t>
             </a:r>
             <a:r>
@@ -9308,20 +13150,20 @@
               <a:buNone/>
             </a:pPr>
             <a:r>
-              <a:rPr lang="de-DE" sz="1600" dirty="0"/>
+              <a:rPr lang="de-DE" sz="1600"/>
               <a:t>Source: </a:t>
             </a:r>
             <a:r>
-              <a:rPr lang="x-none" sz="1600" dirty="0">
+              <a:rPr lang="x-none" sz="1600">
                 <a:hlinkClick r:id="rId2"/>
               </a:rPr>
               <a:t>https://challengedata.ens.fr/challenges/104</a:t>
             </a:r>
             <a:r>
-              <a:rPr lang="de-DE" sz="1600" dirty="0"/>
+              <a:rPr lang="de-DE" sz="1600"/>
               <a:t> </a:t>
             </a:r>
-            <a:endParaRPr lang="x-none" sz="1600" dirty="0"/>
+            <a:endParaRPr lang="x-none" sz="1600"/>
           </a:p>
         </p:txBody>
       </p:sp>
